--- a/QueryForge-Pitch.pptx
+++ b/QueryForge-Pitch.pptx
@@ -14,8 +14,6 @@
     <p:sldId id="262" r:id="rId13"/>
     <p:sldId id="263" r:id="rId14"/>
     <p:sldId id="264" r:id="rId15"/>
-    <p:sldId id="265" r:id="rId16"/>
-    <p:sldId id="266" r:id="rId17"/>
   </p:sldIdLst>
   <p:sldSz cx="12191695" cy="6858000" type="screen4x3"/>
   <p:notesSz cx="6858000" cy="9144000"/>
@@ -3225,7 +3223,11 @@
               </a:defRPr>
             </a:pPr>
             <a:r>
-              <a:t>让业务数据快速变成经营洞察</a:t>
+              <a:t>让业务部门自助取数</a:t>
+            </a:r>
+            <a:br/>
+            <a:r>
+              <a:t>解放数据分析师的重复需求</a:t>
             </a:r>
           </a:p>
         </p:txBody>
@@ -3238,7 +3240,7 @@
         </p:nvSpPr>
         <p:spPr>
           <a:xfrm>
-            <a:off x="731520" y="3474720"/>
+            <a:off x="731520" y="3657600"/>
             <a:ext cx="5486400" cy="914400"/>
           </a:xfrm>
           <a:prstGeom prst="rect">
@@ -3253,18 +3255,18 @@
           <a:lstStyle/>
           <a:p>
             <a:pPr algn="l">
-              <a:defRPr sz="1600" b="0">
+              <a:defRPr sz="1500" b="0">
                 <a:solidFill>
                   <a:srgbClr val="8B949E"/>
                 </a:solidFill>
               </a:defRPr>
             </a:pPr>
             <a:r>
-              <a:t>自然语言提问 → AI 生成 SQL → 实时可视化</a:t>
+              <a:t>分析师调整好底层数据和指标后</a:t>
             </a:r>
             <a:br/>
             <a:r>
-              <a:t>不是关键词匹配，是真正的 AI 推理</a:t>
+              <a:t>业务人员用自然语言自己抓取数据、生成看板、做异常分析</a:t>
             </a:r>
           </a:p>
         </p:txBody>
@@ -3420,7 +3422,7 @@
               </a:defRPr>
             </a:pPr>
             <a:r>
-              <a:t>各地区月度销售额趋势</a:t>
+              <a:t>"哪个品类退货率最高？"</a:t>
             </a:r>
           </a:p>
         </p:txBody>
@@ -3455,7 +3457,7 @@
               </a:defRPr>
             </a:pPr>
             <a:r>
-              <a:t>SELECT r.name, strftime('%Y-%m', o.order_date)...</a:t>
+              <a:t>SELECT c.name, SUM(CASE WHEN o.status='refunded'...</a:t>
             </a:r>
           </a:p>
         </p:txBody>
@@ -3533,24 +3535,28 @@
               </a:defRPr>
             </a:pPr>
             <a:r>
-              <a:t>📈 240 行数据 · 8 地区 · 30 个月</a:t>
+              <a:t>🧠 AI 正在分析...</a:t>
             </a:r>
             <a:br/>
             <a:r>
-              <a:t>折线图已生成</a:t>
+              <a:t>⚙️ 生成 SQL</a:t>
+            </a:r>
+            <a:br/>
+            <a:r>
+              <a:t>📊 执行查询</a:t>
+            </a:r>
+            <a:br/>
+            <a:r>
+              <a:t>✅ 查询完成</a:t>
             </a:r>
             <a:br/>
             <a:br/>
             <a:r>
-              <a:t>MiMo v2.5 Pro 实时推理</a:t>
+              <a:t>退货率最高：母婴用品 18.2%</a:t>
             </a:r>
             <a:br/>
             <a:r>
-              <a:t>SQL AST 安全校验</a:t>
-            </a:r>
-            <a:br/>
-            <a:r>
-              <a:t>自动 LIMIT 500</a:t>
+              <a:t>建议：排查供应链质量</a:t>
             </a:r>
           </a:p>
         </p:txBody>
@@ -3621,1507 +3627,6 @@
             </a:pPr>
             <a:r>
               <a:t>01</a:t>
-            </a:r>
-          </a:p>
-        </p:txBody>
-      </p:sp>
-    </p:spTree>
-  </p:cSld>
-  <p:clrMapOvr>
-    <a:masterClrMapping/>
-  </p:clrMapOvr>
-</p:sld>
-</file>
-
-<file path=ppt/slides/slide10.xml><?xml version="1.0" encoding="utf-8"?>
-<p:sld xmlns:a="http://schemas.openxmlformats.org/drawingml/2006/main" xmlns:p="http://schemas.openxmlformats.org/presentationml/2006/main" xmlns:r="http://schemas.openxmlformats.org/officeDocument/2006/relationships">
-  <p:cSld>
-    <p:bg>
-      <p:bgPr>
-        <a:solidFill>
-          <a:srgbClr val="0A0E17"/>
-        </a:solidFill>
-        <a:effectLst/>
-      </p:bgPr>
-    </p:bg>
-    <p:spTree>
-      <p:nvGrpSpPr>
-        <p:cNvPr id="1" name=""/>
-        <p:cNvGrpSpPr/>
-        <p:nvPr/>
-      </p:nvGrpSpPr>
-      <p:grpSpPr/>
-      <p:sp>
-        <p:nvSpPr>
-          <p:cNvPr id="2" name="Rounded Rectangle 1"/>
-          <p:cNvSpPr/>
-          <p:nvPr/>
-        </p:nvSpPr>
-        <p:spPr>
-          <a:xfrm>
-            <a:off x="731520" y="548640"/>
-            <a:ext cx="1645920" cy="320040"/>
-          </a:xfrm>
-          <a:prstGeom prst="roundRect">
-            <a:avLst/>
-          </a:prstGeom>
-          <a:solidFill>
-            <a:srgbClr val="1A2233"/>
-          </a:solidFill>
-          <a:ln w="12700">
-            <a:solidFill>
-              <a:srgbClr val="FF657A"/>
-            </a:solidFill>
-          </a:ln>
-        </p:spPr>
-        <p:style>
-          <a:lnRef idx="1">
-            <a:schemeClr val="accent1"/>
-          </a:lnRef>
-          <a:fillRef idx="3">
-            <a:schemeClr val="accent1"/>
-          </a:fillRef>
-          <a:effectRef idx="2">
-            <a:schemeClr val="accent1"/>
-          </a:effectRef>
-          <a:fontRef idx="minor">
-            <a:schemeClr val="lt1"/>
-          </a:fontRef>
-        </p:style>
-        <p:txBody>
-          <a:bodyPr rtlCol="0" anchor="ctr"/>
-          <a:lstStyle/>
-          <a:p>
-            <a:pPr algn="ctr">
-              <a:defRPr sz="1000" b="1">
-                <a:solidFill>
-                  <a:srgbClr val="FF657A"/>
-                </a:solidFill>
-              </a:defRPr>
-            </a:pPr>
-            <a:r>
-              <a:t>LIVE DEMO</a:t>
-            </a:r>
-          </a:p>
-        </p:txBody>
-      </p:sp>
-      <p:sp>
-        <p:nvSpPr>
-          <p:cNvPr id="3" name="TextBox 2"/>
-          <p:cNvSpPr txBox="1"/>
-          <p:nvPr/>
-        </p:nvSpPr>
-        <p:spPr>
-          <a:xfrm>
-            <a:off x="731520" y="1097280"/>
-            <a:ext cx="10058400" cy="731520"/>
-          </a:xfrm>
-          <a:prstGeom prst="rect">
-            <a:avLst/>
-          </a:prstGeom>
-          <a:noFill/>
-        </p:spPr>
-        <p:txBody>
-          <a:bodyPr wrap="square">
-            <a:spAutoFit/>
-          </a:bodyPr>
-          <a:lstStyle/>
-          <a:p>
-            <a:pPr algn="l">
-              <a:defRPr sz="2800" b="1">
-                <a:solidFill>
-                  <a:srgbClr val="FFFFFF"/>
-                </a:solidFill>
-              </a:defRPr>
-            </a:pPr>
-            <a:r>
-              <a:t>现场演示：queryforge-production-8d6f.up.railway.app</a:t>
-            </a:r>
-          </a:p>
-        </p:txBody>
-      </p:sp>
-      <p:sp>
-        <p:nvSpPr>
-          <p:cNvPr id="4" name="Rounded Rectangle 3"/>
-          <p:cNvSpPr/>
-          <p:nvPr/>
-        </p:nvSpPr>
-        <p:spPr>
-          <a:xfrm>
-            <a:off x="457200" y="2286000"/>
-            <a:ext cx="2103120" cy="3200400"/>
-          </a:xfrm>
-          <a:prstGeom prst="roundRect">
-            <a:avLst/>
-          </a:prstGeom>
-          <a:solidFill>
-            <a:srgbClr val="141A25"/>
-          </a:solidFill>
-          <a:ln>
-            <a:noFill/>
-          </a:ln>
-        </p:spPr>
-        <p:style>
-          <a:lnRef idx="1">
-            <a:schemeClr val="accent1"/>
-          </a:lnRef>
-          <a:fillRef idx="3">
-            <a:schemeClr val="accent1"/>
-          </a:fillRef>
-          <a:effectRef idx="2">
-            <a:schemeClr val="accent1"/>
-          </a:effectRef>
-          <a:fontRef idx="minor">
-            <a:schemeClr val="lt1"/>
-          </a:fontRef>
-        </p:style>
-        <p:txBody>
-          <a:bodyPr rtlCol="0" anchor="ctr"/>
-          <a:lstStyle/>
-          <a:p>
-            <a:pPr algn="ctr"/>
-          </a:p>
-        </p:txBody>
-      </p:sp>
-      <p:sp>
-        <p:nvSpPr>
-          <p:cNvPr id="5" name="Rectangle 4"/>
-          <p:cNvSpPr/>
-          <p:nvPr/>
-        </p:nvSpPr>
-        <p:spPr>
-          <a:xfrm>
-            <a:off x="594360" y="2286000"/>
-            <a:ext cx="1828799" cy="36576"/>
-          </a:xfrm>
-          <a:prstGeom prst="rect">
-            <a:avLst/>
-          </a:prstGeom>
-          <a:solidFill>
-            <a:srgbClr val="4AA3FF"/>
-          </a:solidFill>
-          <a:ln>
-            <a:noFill/>
-          </a:ln>
-        </p:spPr>
-        <p:style>
-          <a:lnRef idx="1">
-            <a:schemeClr val="accent1"/>
-          </a:lnRef>
-          <a:fillRef idx="3">
-            <a:schemeClr val="accent1"/>
-          </a:fillRef>
-          <a:effectRef idx="2">
-            <a:schemeClr val="accent1"/>
-          </a:effectRef>
-          <a:fontRef idx="minor">
-            <a:schemeClr val="lt1"/>
-          </a:fontRef>
-        </p:style>
-        <p:txBody>
-          <a:bodyPr rtlCol="0" anchor="ctr"/>
-          <a:lstStyle/>
-          <a:p>
-            <a:pPr algn="ctr"/>
-          </a:p>
-        </p:txBody>
-      </p:sp>
-      <p:sp>
-        <p:nvSpPr>
-          <p:cNvPr id="6" name="TextBox 5"/>
-          <p:cNvSpPr txBox="1"/>
-          <p:nvPr/>
-        </p:nvSpPr>
-        <p:spPr>
-          <a:xfrm>
-            <a:off x="594360" y="2468880"/>
-            <a:ext cx="1828800" cy="365760"/>
-          </a:xfrm>
-          <a:prstGeom prst="rect">
-            <a:avLst/>
-          </a:prstGeom>
-          <a:noFill/>
-        </p:spPr>
-        <p:txBody>
-          <a:bodyPr wrap="square">
-            <a:spAutoFit/>
-          </a:bodyPr>
-          <a:lstStyle/>
-          <a:p>
-            <a:pPr algn="ctr">
-              <a:defRPr sz="2000" b="1">
-                <a:solidFill>
-                  <a:srgbClr val="4AA3FF"/>
-                </a:solidFill>
-              </a:defRPr>
-            </a:pPr>
-            <a:r>
-              <a:t>01</a:t>
-            </a:r>
-          </a:p>
-        </p:txBody>
-      </p:sp>
-      <p:sp>
-        <p:nvSpPr>
-          <p:cNvPr id="7" name="TextBox 6"/>
-          <p:cNvSpPr txBox="1"/>
-          <p:nvPr/>
-        </p:nvSpPr>
-        <p:spPr>
-          <a:xfrm>
-            <a:off x="594360" y="2926080"/>
-            <a:ext cx="1828800" cy="365760"/>
-          </a:xfrm>
-          <a:prstGeom prst="rect">
-            <a:avLst/>
-          </a:prstGeom>
-          <a:noFill/>
-        </p:spPr>
-        <p:txBody>
-          <a:bodyPr wrap="square">
-            <a:spAutoFit/>
-          </a:bodyPr>
-          <a:lstStyle/>
-          <a:p>
-            <a:pPr algn="ctr">
-              <a:defRPr sz="1400" b="1">
-                <a:solidFill>
-                  <a:srgbClr val="FFFFFF"/>
-                </a:solidFill>
-              </a:defRPr>
-            </a:pPr>
-            <a:r>
-              <a:t>点击预设查询</a:t>
-            </a:r>
-          </a:p>
-        </p:txBody>
-      </p:sp>
-      <p:sp>
-        <p:nvSpPr>
-          <p:cNvPr id="8" name="TextBox 7"/>
-          <p:cNvSpPr txBox="1"/>
-          <p:nvPr/>
-        </p:nvSpPr>
-        <p:spPr>
-          <a:xfrm>
-            <a:off x="594360" y="3474720"/>
-            <a:ext cx="1828800" cy="1371600"/>
-          </a:xfrm>
-          <a:prstGeom prst="rect">
-            <a:avLst/>
-          </a:prstGeom>
-          <a:noFill/>
-        </p:spPr>
-        <p:txBody>
-          <a:bodyPr wrap="square">
-            <a:spAutoFit/>
-          </a:bodyPr>
-          <a:lstStyle/>
-          <a:p>
-            <a:pPr algn="ctr">
-              <a:defRPr sz="1100" b="0">
-                <a:solidFill>
-                  <a:srgbClr val="8B949E"/>
-                </a:solidFill>
-              </a:defRPr>
-            </a:pPr>
-            <a:r>
-              <a:t>展示 AI 生成 SQL + 图表</a:t>
-            </a:r>
-            <a:br/>
-            <a:r>
-              <a:t>流式进度推送</a:t>
-            </a:r>
-          </a:p>
-        </p:txBody>
-      </p:sp>
-      <p:sp>
-        <p:nvSpPr>
-          <p:cNvPr id="9" name="Rounded Rectangle 8"/>
-          <p:cNvSpPr/>
-          <p:nvPr/>
-        </p:nvSpPr>
-        <p:spPr>
-          <a:xfrm>
-            <a:off x="2743200" y="2286000"/>
-            <a:ext cx="2103120" cy="3200400"/>
-          </a:xfrm>
-          <a:prstGeom prst="roundRect">
-            <a:avLst/>
-          </a:prstGeom>
-          <a:solidFill>
-            <a:srgbClr val="141A25"/>
-          </a:solidFill>
-          <a:ln>
-            <a:noFill/>
-          </a:ln>
-        </p:spPr>
-        <p:style>
-          <a:lnRef idx="1">
-            <a:schemeClr val="accent1"/>
-          </a:lnRef>
-          <a:fillRef idx="3">
-            <a:schemeClr val="accent1"/>
-          </a:fillRef>
-          <a:effectRef idx="2">
-            <a:schemeClr val="accent1"/>
-          </a:effectRef>
-          <a:fontRef idx="minor">
-            <a:schemeClr val="lt1"/>
-          </a:fontRef>
-        </p:style>
-        <p:txBody>
-          <a:bodyPr rtlCol="0" anchor="ctr"/>
-          <a:lstStyle/>
-          <a:p>
-            <a:pPr algn="ctr"/>
-          </a:p>
-        </p:txBody>
-      </p:sp>
-      <p:sp>
-        <p:nvSpPr>
-          <p:cNvPr id="10" name="Rectangle 9"/>
-          <p:cNvSpPr/>
-          <p:nvPr/>
-        </p:nvSpPr>
-        <p:spPr>
-          <a:xfrm>
-            <a:off x="2880360" y="2286000"/>
-            <a:ext cx="1828799" cy="36576"/>
-          </a:xfrm>
-          <a:prstGeom prst="rect">
-            <a:avLst/>
-          </a:prstGeom>
-          <a:solidFill>
-            <a:srgbClr val="19D3C5"/>
-          </a:solidFill>
-          <a:ln>
-            <a:noFill/>
-          </a:ln>
-        </p:spPr>
-        <p:style>
-          <a:lnRef idx="1">
-            <a:schemeClr val="accent1"/>
-          </a:lnRef>
-          <a:fillRef idx="3">
-            <a:schemeClr val="accent1"/>
-          </a:fillRef>
-          <a:effectRef idx="2">
-            <a:schemeClr val="accent1"/>
-          </a:effectRef>
-          <a:fontRef idx="minor">
-            <a:schemeClr val="lt1"/>
-          </a:fontRef>
-        </p:style>
-        <p:txBody>
-          <a:bodyPr rtlCol="0" anchor="ctr"/>
-          <a:lstStyle/>
-          <a:p>
-            <a:pPr algn="ctr"/>
-          </a:p>
-        </p:txBody>
-      </p:sp>
-      <p:sp>
-        <p:nvSpPr>
-          <p:cNvPr id="11" name="TextBox 10"/>
-          <p:cNvSpPr txBox="1"/>
-          <p:nvPr/>
-        </p:nvSpPr>
-        <p:spPr>
-          <a:xfrm>
-            <a:off x="2880360" y="2468880"/>
-            <a:ext cx="1828800" cy="365760"/>
-          </a:xfrm>
-          <a:prstGeom prst="rect">
-            <a:avLst/>
-          </a:prstGeom>
-          <a:noFill/>
-        </p:spPr>
-        <p:txBody>
-          <a:bodyPr wrap="square">
-            <a:spAutoFit/>
-          </a:bodyPr>
-          <a:lstStyle/>
-          <a:p>
-            <a:pPr algn="ctr">
-              <a:defRPr sz="2000" b="1">
-                <a:solidFill>
-                  <a:srgbClr val="19D3C5"/>
-                </a:solidFill>
-              </a:defRPr>
-            </a:pPr>
-            <a:r>
-              <a:t>02</a:t>
-            </a:r>
-          </a:p>
-        </p:txBody>
-      </p:sp>
-      <p:sp>
-        <p:nvSpPr>
-          <p:cNvPr id="12" name="TextBox 11"/>
-          <p:cNvSpPr txBox="1"/>
-          <p:nvPr/>
-        </p:nvSpPr>
-        <p:spPr>
-          <a:xfrm>
-            <a:off x="2880360" y="2926080"/>
-            <a:ext cx="1828800" cy="365760"/>
-          </a:xfrm>
-          <a:prstGeom prst="rect">
-            <a:avLst/>
-          </a:prstGeom>
-          <a:noFill/>
-        </p:spPr>
-        <p:txBody>
-          <a:bodyPr wrap="square">
-            <a:spAutoFit/>
-          </a:bodyPr>
-          <a:lstStyle/>
-          <a:p>
-            <a:pPr algn="ctr">
-              <a:defRPr sz="1400" b="1">
-                <a:solidFill>
-                  <a:srgbClr val="FFFFFF"/>
-                </a:solidFill>
-              </a:defRPr>
-            </a:pPr>
-            <a:r>
-              <a:t>自由提问</a:t>
-            </a:r>
-          </a:p>
-        </p:txBody>
-      </p:sp>
-      <p:sp>
-        <p:nvSpPr>
-          <p:cNvPr id="13" name="TextBox 12"/>
-          <p:cNvSpPr txBox="1"/>
-          <p:nvPr/>
-        </p:nvSpPr>
-        <p:spPr>
-          <a:xfrm>
-            <a:off x="2880360" y="3474720"/>
-            <a:ext cx="1828800" cy="1371600"/>
-          </a:xfrm>
-          <a:prstGeom prst="rect">
-            <a:avLst/>
-          </a:prstGeom>
-          <a:noFill/>
-        </p:spPr>
-        <p:txBody>
-          <a:bodyPr wrap="square">
-            <a:spAutoFit/>
-          </a:bodyPr>
-          <a:lstStyle/>
-          <a:p>
-            <a:pPr algn="ctr">
-              <a:defRPr sz="1100" b="0">
-                <a:solidFill>
-                  <a:srgbClr val="8B949E"/>
-                </a:solidFill>
-              </a:defRPr>
-            </a:pPr>
-            <a:r>
-              <a:t>"最近三个月哪个品类增长最快"</a:t>
-            </a:r>
-            <a:br/>
-            <a:r>
-              <a:t>展示 AI 理解开放式问题</a:t>
-            </a:r>
-          </a:p>
-        </p:txBody>
-      </p:sp>
-      <p:sp>
-        <p:nvSpPr>
-          <p:cNvPr id="14" name="Rounded Rectangle 13"/>
-          <p:cNvSpPr/>
-          <p:nvPr/>
-        </p:nvSpPr>
-        <p:spPr>
-          <a:xfrm>
-            <a:off x="5029200" y="2286000"/>
-            <a:ext cx="2103120" cy="3200400"/>
-          </a:xfrm>
-          <a:prstGeom prst="roundRect">
-            <a:avLst/>
-          </a:prstGeom>
-          <a:solidFill>
-            <a:srgbClr val="141A25"/>
-          </a:solidFill>
-          <a:ln>
-            <a:noFill/>
-          </a:ln>
-        </p:spPr>
-        <p:style>
-          <a:lnRef idx="1">
-            <a:schemeClr val="accent1"/>
-          </a:lnRef>
-          <a:fillRef idx="3">
-            <a:schemeClr val="accent1"/>
-          </a:fillRef>
-          <a:effectRef idx="2">
-            <a:schemeClr val="accent1"/>
-          </a:effectRef>
-          <a:fontRef idx="minor">
-            <a:schemeClr val="lt1"/>
-          </a:fontRef>
-        </p:style>
-        <p:txBody>
-          <a:bodyPr rtlCol="0" anchor="ctr"/>
-          <a:lstStyle/>
-          <a:p>
-            <a:pPr algn="ctr"/>
-          </a:p>
-        </p:txBody>
-      </p:sp>
-      <p:sp>
-        <p:nvSpPr>
-          <p:cNvPr id="15" name="Rectangle 14"/>
-          <p:cNvSpPr/>
-          <p:nvPr/>
-        </p:nvSpPr>
-        <p:spPr>
-          <a:xfrm>
-            <a:off x="5166360" y="2286000"/>
-            <a:ext cx="1828799" cy="36576"/>
-          </a:xfrm>
-          <a:prstGeom prst="rect">
-            <a:avLst/>
-          </a:prstGeom>
-          <a:solidFill>
-            <a:srgbClr val="1A7F37"/>
-          </a:solidFill>
-          <a:ln>
-            <a:noFill/>
-          </a:ln>
-        </p:spPr>
-        <p:style>
-          <a:lnRef idx="1">
-            <a:schemeClr val="accent1"/>
-          </a:lnRef>
-          <a:fillRef idx="3">
-            <a:schemeClr val="accent1"/>
-          </a:fillRef>
-          <a:effectRef idx="2">
-            <a:schemeClr val="accent1"/>
-          </a:effectRef>
-          <a:fontRef idx="minor">
-            <a:schemeClr val="lt1"/>
-          </a:fontRef>
-        </p:style>
-        <p:txBody>
-          <a:bodyPr rtlCol="0" anchor="ctr"/>
-          <a:lstStyle/>
-          <a:p>
-            <a:pPr algn="ctr"/>
-          </a:p>
-        </p:txBody>
-      </p:sp>
-      <p:sp>
-        <p:nvSpPr>
-          <p:cNvPr id="16" name="TextBox 15"/>
-          <p:cNvSpPr txBox="1"/>
-          <p:nvPr/>
-        </p:nvSpPr>
-        <p:spPr>
-          <a:xfrm>
-            <a:off x="5166360" y="2468880"/>
-            <a:ext cx="1828800" cy="365760"/>
-          </a:xfrm>
-          <a:prstGeom prst="rect">
-            <a:avLst/>
-          </a:prstGeom>
-          <a:noFill/>
-        </p:spPr>
-        <p:txBody>
-          <a:bodyPr wrap="square">
-            <a:spAutoFit/>
-          </a:bodyPr>
-          <a:lstStyle/>
-          <a:p>
-            <a:pPr algn="ctr">
-              <a:defRPr sz="2000" b="1">
-                <a:solidFill>
-                  <a:srgbClr val="1A7F37"/>
-                </a:solidFill>
-              </a:defRPr>
-            </a:pPr>
-            <a:r>
-              <a:t>03</a:t>
-            </a:r>
-          </a:p>
-        </p:txBody>
-      </p:sp>
-      <p:sp>
-        <p:nvSpPr>
-          <p:cNvPr id="17" name="TextBox 16"/>
-          <p:cNvSpPr txBox="1"/>
-          <p:nvPr/>
-        </p:nvSpPr>
-        <p:spPr>
-          <a:xfrm>
-            <a:off x="5166360" y="2926080"/>
-            <a:ext cx="1828800" cy="365760"/>
-          </a:xfrm>
-          <a:prstGeom prst="rect">
-            <a:avLst/>
-          </a:prstGeom>
-          <a:noFill/>
-        </p:spPr>
-        <p:txBody>
-          <a:bodyPr wrap="square">
-            <a:spAutoFit/>
-          </a:bodyPr>
-          <a:lstStyle/>
-          <a:p>
-            <a:pPr algn="ctr">
-              <a:defRPr sz="1400" b="1">
-                <a:solidFill>
-                  <a:srgbClr val="FFFFFF"/>
-                </a:solidFill>
-              </a:defRPr>
-            </a:pPr>
-            <a:r>
-              <a:t>仪表盘联动</a:t>
-            </a:r>
-          </a:p>
-        </p:txBody>
-      </p:sp>
-      <p:sp>
-        <p:nvSpPr>
-          <p:cNvPr id="18" name="TextBox 17"/>
-          <p:cNvSpPr txBox="1"/>
-          <p:nvPr/>
-        </p:nvSpPr>
-        <p:spPr>
-          <a:xfrm>
-            <a:off x="5166360" y="3474720"/>
-            <a:ext cx="1828800" cy="1371600"/>
-          </a:xfrm>
-          <a:prstGeom prst="rect">
-            <a:avLst/>
-          </a:prstGeom>
-          <a:noFill/>
-        </p:spPr>
-        <p:txBody>
-          <a:bodyPr wrap="square">
-            <a:spAutoFit/>
-          </a:bodyPr>
-          <a:lstStyle/>
-          <a:p>
-            <a:pPr algn="ctr">
-              <a:defRPr sz="1100" b="0">
-                <a:solidFill>
-                  <a:srgbClr val="8B949E"/>
-                </a:solidFill>
-              </a:defRPr>
-            </a:pPr>
-            <a:r>
-              <a:t>8 个 KPI 指标 + 6 个图表</a:t>
-            </a:r>
-            <a:br/>
-            <a:r>
-              <a:t>全部真实数据库数据</a:t>
-            </a:r>
-          </a:p>
-        </p:txBody>
-      </p:sp>
-      <p:sp>
-        <p:nvSpPr>
-          <p:cNvPr id="19" name="Rounded Rectangle 18"/>
-          <p:cNvSpPr/>
-          <p:nvPr/>
-        </p:nvSpPr>
-        <p:spPr>
-          <a:xfrm>
-            <a:off x="7315200" y="2286000"/>
-            <a:ext cx="2103120" cy="3200400"/>
-          </a:xfrm>
-          <a:prstGeom prst="roundRect">
-            <a:avLst/>
-          </a:prstGeom>
-          <a:solidFill>
-            <a:srgbClr val="141A25"/>
-          </a:solidFill>
-          <a:ln>
-            <a:noFill/>
-          </a:ln>
-        </p:spPr>
-        <p:style>
-          <a:lnRef idx="1">
-            <a:schemeClr val="accent1"/>
-          </a:lnRef>
-          <a:fillRef idx="3">
-            <a:schemeClr val="accent1"/>
-          </a:fillRef>
-          <a:effectRef idx="2">
-            <a:schemeClr val="accent1"/>
-          </a:effectRef>
-          <a:fontRef idx="minor">
-            <a:schemeClr val="lt1"/>
-          </a:fontRef>
-        </p:style>
-        <p:txBody>
-          <a:bodyPr rtlCol="0" anchor="ctr"/>
-          <a:lstStyle/>
-          <a:p>
-            <a:pPr algn="ctr"/>
-          </a:p>
-        </p:txBody>
-      </p:sp>
-      <p:sp>
-        <p:nvSpPr>
-          <p:cNvPr id="20" name="Rectangle 19"/>
-          <p:cNvSpPr/>
-          <p:nvPr/>
-        </p:nvSpPr>
-        <p:spPr>
-          <a:xfrm>
-            <a:off x="7452360" y="2286000"/>
-            <a:ext cx="1828799" cy="36576"/>
-          </a:xfrm>
-          <a:prstGeom prst="rect">
-            <a:avLst/>
-          </a:prstGeom>
-          <a:solidFill>
-            <a:srgbClr val="F7D74D"/>
-          </a:solidFill>
-          <a:ln>
-            <a:noFill/>
-          </a:ln>
-        </p:spPr>
-        <p:style>
-          <a:lnRef idx="1">
-            <a:schemeClr val="accent1"/>
-          </a:lnRef>
-          <a:fillRef idx="3">
-            <a:schemeClr val="accent1"/>
-          </a:fillRef>
-          <a:effectRef idx="2">
-            <a:schemeClr val="accent1"/>
-          </a:effectRef>
-          <a:fontRef idx="minor">
-            <a:schemeClr val="lt1"/>
-          </a:fontRef>
-        </p:style>
-        <p:txBody>
-          <a:bodyPr rtlCol="0" anchor="ctr"/>
-          <a:lstStyle/>
-          <a:p>
-            <a:pPr algn="ctr"/>
-          </a:p>
-        </p:txBody>
-      </p:sp>
-      <p:sp>
-        <p:nvSpPr>
-          <p:cNvPr id="21" name="TextBox 20"/>
-          <p:cNvSpPr txBox="1"/>
-          <p:nvPr/>
-        </p:nvSpPr>
-        <p:spPr>
-          <a:xfrm>
-            <a:off x="7452360" y="2468880"/>
-            <a:ext cx="1828800" cy="365760"/>
-          </a:xfrm>
-          <a:prstGeom prst="rect">
-            <a:avLst/>
-          </a:prstGeom>
-          <a:noFill/>
-        </p:spPr>
-        <p:txBody>
-          <a:bodyPr wrap="square">
-            <a:spAutoFit/>
-          </a:bodyPr>
-          <a:lstStyle/>
-          <a:p>
-            <a:pPr algn="ctr">
-              <a:defRPr sz="2000" b="1">
-                <a:solidFill>
-                  <a:srgbClr val="F7D74D"/>
-                </a:solidFill>
-              </a:defRPr>
-            </a:pPr>
-            <a:r>
-              <a:t>04</a:t>
-            </a:r>
-          </a:p>
-        </p:txBody>
-      </p:sp>
-      <p:sp>
-        <p:nvSpPr>
-          <p:cNvPr id="22" name="TextBox 21"/>
-          <p:cNvSpPr txBox="1"/>
-          <p:nvPr/>
-        </p:nvSpPr>
-        <p:spPr>
-          <a:xfrm>
-            <a:off x="7452360" y="2926080"/>
-            <a:ext cx="1828800" cy="365760"/>
-          </a:xfrm>
-          <a:prstGeom prst="rect">
-            <a:avLst/>
-          </a:prstGeom>
-          <a:noFill/>
-        </p:spPr>
-        <p:txBody>
-          <a:bodyPr wrap="square">
-            <a:spAutoFit/>
-          </a:bodyPr>
-          <a:lstStyle/>
-          <a:p>
-            <a:pPr algn="ctr">
-              <a:defRPr sz="1400" b="1">
-                <a:solidFill>
-                  <a:srgbClr val="FFFFFF"/>
-                </a:solidFill>
-              </a:defRPr>
-            </a:pPr>
-            <a:r>
-              <a:t>指标保存复用</a:t>
-            </a:r>
-          </a:p>
-        </p:txBody>
-      </p:sp>
-      <p:sp>
-        <p:nvSpPr>
-          <p:cNvPr id="23" name="TextBox 22"/>
-          <p:cNvSpPr txBox="1"/>
-          <p:nvPr/>
-        </p:nvSpPr>
-        <p:spPr>
-          <a:xfrm>
-            <a:off x="7452360" y="3474720"/>
-            <a:ext cx="1828800" cy="1371600"/>
-          </a:xfrm>
-          <a:prstGeom prst="rect">
-            <a:avLst/>
-          </a:prstGeom>
-          <a:noFill/>
-        </p:spPr>
-        <p:txBody>
-          <a:bodyPr wrap="square">
-            <a:spAutoFit/>
-          </a:bodyPr>
-          <a:lstStyle/>
-          <a:p>
-            <a:pPr algn="ctr">
-              <a:defRPr sz="1100" b="0">
-                <a:solidFill>
-                  <a:srgbClr val="8B949E"/>
-                </a:solidFill>
-              </a:defRPr>
-            </a:pPr>
-            <a:r>
-              <a:t>侧边栏保存/删除/复用</a:t>
-            </a:r>
-            <a:br/>
-            <a:r>
-              <a:t>localStorage 持久化</a:t>
-            </a:r>
-          </a:p>
-        </p:txBody>
-      </p:sp>
-      <p:sp>
-        <p:nvSpPr>
-          <p:cNvPr id="24" name="Rounded Rectangle 23"/>
-          <p:cNvSpPr/>
-          <p:nvPr/>
-        </p:nvSpPr>
-        <p:spPr>
-          <a:xfrm>
-            <a:off x="9601200" y="2286000"/>
-            <a:ext cx="2103120" cy="3200400"/>
-          </a:xfrm>
-          <a:prstGeom prst="roundRect">
-            <a:avLst/>
-          </a:prstGeom>
-          <a:solidFill>
-            <a:srgbClr val="141A25"/>
-          </a:solidFill>
-          <a:ln>
-            <a:noFill/>
-          </a:ln>
-        </p:spPr>
-        <p:style>
-          <a:lnRef idx="1">
-            <a:schemeClr val="accent1"/>
-          </a:lnRef>
-          <a:fillRef idx="3">
-            <a:schemeClr val="accent1"/>
-          </a:fillRef>
-          <a:effectRef idx="2">
-            <a:schemeClr val="accent1"/>
-          </a:effectRef>
-          <a:fontRef idx="minor">
-            <a:schemeClr val="lt1"/>
-          </a:fontRef>
-        </p:style>
-        <p:txBody>
-          <a:bodyPr rtlCol="0" anchor="ctr"/>
-          <a:lstStyle/>
-          <a:p>
-            <a:pPr algn="ctr"/>
-          </a:p>
-        </p:txBody>
-      </p:sp>
-      <p:sp>
-        <p:nvSpPr>
-          <p:cNvPr id="25" name="Rectangle 24"/>
-          <p:cNvSpPr/>
-          <p:nvPr/>
-        </p:nvSpPr>
-        <p:spPr>
-          <a:xfrm>
-            <a:off x="9738360" y="2286000"/>
-            <a:ext cx="1828799" cy="36576"/>
-          </a:xfrm>
-          <a:prstGeom prst="rect">
-            <a:avLst/>
-          </a:prstGeom>
-          <a:solidFill>
-            <a:srgbClr val="FF657A"/>
-          </a:solidFill>
-          <a:ln>
-            <a:noFill/>
-          </a:ln>
-        </p:spPr>
-        <p:style>
-          <a:lnRef idx="1">
-            <a:schemeClr val="accent1"/>
-          </a:lnRef>
-          <a:fillRef idx="3">
-            <a:schemeClr val="accent1"/>
-          </a:fillRef>
-          <a:effectRef idx="2">
-            <a:schemeClr val="accent1"/>
-          </a:effectRef>
-          <a:fontRef idx="minor">
-            <a:schemeClr val="lt1"/>
-          </a:fontRef>
-        </p:style>
-        <p:txBody>
-          <a:bodyPr rtlCol="0" anchor="ctr"/>
-          <a:lstStyle/>
-          <a:p>
-            <a:pPr algn="ctr"/>
-          </a:p>
-        </p:txBody>
-      </p:sp>
-      <p:sp>
-        <p:nvSpPr>
-          <p:cNvPr id="26" name="TextBox 25"/>
-          <p:cNvSpPr txBox="1"/>
-          <p:nvPr/>
-        </p:nvSpPr>
-        <p:spPr>
-          <a:xfrm>
-            <a:off x="9738360" y="2468880"/>
-            <a:ext cx="1828800" cy="365760"/>
-          </a:xfrm>
-          <a:prstGeom prst="rect">
-            <a:avLst/>
-          </a:prstGeom>
-          <a:noFill/>
-        </p:spPr>
-        <p:txBody>
-          <a:bodyPr wrap="square">
-            <a:spAutoFit/>
-          </a:bodyPr>
-          <a:lstStyle/>
-          <a:p>
-            <a:pPr algn="ctr">
-              <a:defRPr sz="2000" b="1">
-                <a:solidFill>
-                  <a:srgbClr val="FF657A"/>
-                </a:solidFill>
-              </a:defRPr>
-            </a:pPr>
-            <a:r>
-              <a:t>05</a:t>
-            </a:r>
-          </a:p>
-        </p:txBody>
-      </p:sp>
-      <p:sp>
-        <p:nvSpPr>
-          <p:cNvPr id="27" name="TextBox 26"/>
-          <p:cNvSpPr txBox="1"/>
-          <p:nvPr/>
-        </p:nvSpPr>
-        <p:spPr>
-          <a:xfrm>
-            <a:off x="9738360" y="2926080"/>
-            <a:ext cx="1828800" cy="365760"/>
-          </a:xfrm>
-          <a:prstGeom prst="rect">
-            <a:avLst/>
-          </a:prstGeom>
-          <a:noFill/>
-        </p:spPr>
-        <p:txBody>
-          <a:bodyPr wrap="square">
-            <a:spAutoFit/>
-          </a:bodyPr>
-          <a:lstStyle/>
-          <a:p>
-            <a:pPr algn="ctr">
-              <a:defRPr sz="1400" b="1">
-                <a:solidFill>
-                  <a:srgbClr val="FFFFFF"/>
-                </a:solidFill>
-              </a:defRPr>
-            </a:pPr>
-            <a:r>
-              <a:t>自纠正演示</a:t>
-            </a:r>
-          </a:p>
-        </p:txBody>
-      </p:sp>
-      <p:sp>
-        <p:nvSpPr>
-          <p:cNvPr id="28" name="TextBox 27"/>
-          <p:cNvSpPr txBox="1"/>
-          <p:nvPr/>
-        </p:nvSpPr>
-        <p:spPr>
-          <a:xfrm>
-            <a:off x="9738360" y="3474720"/>
-            <a:ext cx="1828800" cy="1371600"/>
-          </a:xfrm>
-          <a:prstGeom prst="rect">
-            <a:avLst/>
-          </a:prstGeom>
-          <a:noFill/>
-        </p:spPr>
-        <p:txBody>
-          <a:bodyPr wrap="square">
-            <a:spAutoFit/>
-          </a:bodyPr>
-          <a:lstStyle/>
-          <a:p>
-            <a:pPr algn="ctr">
-              <a:defRPr sz="1100" b="0">
-                <a:solidFill>
-                  <a:srgbClr val="8B949E"/>
-                </a:solidFill>
-              </a:defRPr>
-            </a:pPr>
-            <a:r>
-              <a:t>SQL 报错 → 自动修正</a:t>
-            </a:r>
-            <a:br/>
-            <a:r>
-              <a:t>展示修正过程和结果</a:t>
-            </a:r>
-          </a:p>
-        </p:txBody>
-      </p:sp>
-      <p:sp>
-        <p:nvSpPr>
-          <p:cNvPr id="29" name="TextBox 28"/>
-          <p:cNvSpPr txBox="1"/>
-          <p:nvPr/>
-        </p:nvSpPr>
-        <p:spPr>
-          <a:xfrm>
-            <a:off x="731520" y="5852160"/>
-            <a:ext cx="10515600" cy="457200"/>
-          </a:xfrm>
-          <a:prstGeom prst="rect">
-            <a:avLst/>
-          </a:prstGeom>
-          <a:noFill/>
-        </p:spPr>
-        <p:txBody>
-          <a:bodyPr wrap="square">
-            <a:spAutoFit/>
-          </a:bodyPr>
-          <a:lstStyle/>
-          <a:p>
-            <a:pPr algn="ctr">
-              <a:defRPr sz="1400" b="0">
-                <a:solidFill>
-                  <a:srgbClr val="4AA3FF"/>
-                </a:solidFill>
-              </a:defRPr>
-            </a:pPr>
-            <a:r>
-              <a:t>产品地址：queryforge-production-8d6f.up.railway.app</a:t>
-            </a:r>
-          </a:p>
-        </p:txBody>
-      </p:sp>
-      <p:sp>
-        <p:nvSpPr>
-          <p:cNvPr id="30" name="TextBox 29"/>
-          <p:cNvSpPr txBox="1"/>
-          <p:nvPr/>
-        </p:nvSpPr>
-        <p:spPr>
-          <a:xfrm>
-            <a:off x="731520" y="6217920"/>
-            <a:ext cx="10515600" cy="457200"/>
-          </a:xfrm>
-          <a:prstGeom prst="rect">
-            <a:avLst/>
-          </a:prstGeom>
-          <a:noFill/>
-        </p:spPr>
-        <p:txBody>
-          <a:bodyPr wrap="square">
-            <a:spAutoFit/>
-          </a:bodyPr>
-          <a:lstStyle/>
-          <a:p>
-            <a:pPr algn="ctr">
-              <a:defRPr sz="1200" b="0">
-                <a:solidFill>
-                  <a:srgbClr val="8B949E"/>
-                </a:solidFill>
-              </a:defRPr>
-            </a:pPr>
-            <a:r>
-              <a:t>代码仓库：github.com/eric-stone-plus/queryforge</a:t>
-            </a:r>
-          </a:p>
-        </p:txBody>
-      </p:sp>
-      <p:sp>
-        <p:nvSpPr>
-          <p:cNvPr id="31" name="TextBox 30"/>
-          <p:cNvSpPr txBox="1"/>
-          <p:nvPr/>
-        </p:nvSpPr>
-        <p:spPr>
-          <a:xfrm>
-            <a:off x="731520" y="6400800"/>
-            <a:ext cx="1828800" cy="365760"/>
-          </a:xfrm>
-          <a:prstGeom prst="rect">
-            <a:avLst/>
-          </a:prstGeom>
-          <a:noFill/>
-        </p:spPr>
-        <p:txBody>
-          <a:bodyPr wrap="square">
-            <a:spAutoFit/>
-          </a:bodyPr>
-          <a:lstStyle/>
-          <a:p>
-            <a:pPr algn="l">
-              <a:defRPr sz="1100" b="0">
-                <a:solidFill>
-                  <a:srgbClr val="8B949E"/>
-                </a:solidFill>
-              </a:defRPr>
-            </a:pPr>
-            <a:r>
-              <a:t>QueryForge</a:t>
-            </a:r>
-          </a:p>
-        </p:txBody>
-      </p:sp>
-      <p:sp>
-        <p:nvSpPr>
-          <p:cNvPr id="32" name="TextBox 31"/>
-          <p:cNvSpPr txBox="1"/>
-          <p:nvPr/>
-        </p:nvSpPr>
-        <p:spPr>
-          <a:xfrm>
-            <a:off x="11155680" y="6400800"/>
-            <a:ext cx="731520" cy="365760"/>
-          </a:xfrm>
-          <a:prstGeom prst="rect">
-            <a:avLst/>
-          </a:prstGeom>
-          <a:noFill/>
-        </p:spPr>
-        <p:txBody>
-          <a:bodyPr wrap="square">
-            <a:spAutoFit/>
-          </a:bodyPr>
-          <a:lstStyle/>
-          <a:p>
-            <a:pPr algn="r">
-              <a:defRPr sz="1200" b="0">
-                <a:solidFill>
-                  <a:srgbClr val="8B949E"/>
-                </a:solidFill>
-              </a:defRPr>
-            </a:pPr>
-            <a:r>
-              <a:t>10</a:t>
-            </a:r>
-          </a:p>
-        </p:txBody>
-      </p:sp>
-    </p:spTree>
-  </p:cSld>
-  <p:clrMapOvr>
-    <a:masterClrMapping/>
-  </p:clrMapOvr>
-</p:sld>
-</file>
-
-<file path=ppt/slides/slide11.xml><?xml version="1.0" encoding="utf-8"?>
-<p:sld xmlns:a="http://schemas.openxmlformats.org/drawingml/2006/main" xmlns:p="http://schemas.openxmlformats.org/presentationml/2006/main" xmlns:r="http://schemas.openxmlformats.org/officeDocument/2006/relationships">
-  <p:cSld>
-    <p:bg>
-      <p:bgPr>
-        <a:solidFill>
-          <a:srgbClr val="0A0E17"/>
-        </a:solidFill>
-        <a:effectLst/>
-      </p:bgPr>
-    </p:bg>
-    <p:spTree>
-      <p:nvGrpSpPr>
-        <p:cNvPr id="1" name=""/>
-        <p:cNvGrpSpPr/>
-        <p:nvPr/>
-      </p:nvGrpSpPr>
-      <p:grpSpPr/>
-      <p:sp>
-        <p:nvSpPr>
-          <p:cNvPr id="2" name="TextBox 1"/>
-          <p:cNvSpPr txBox="1"/>
-          <p:nvPr/>
-        </p:nvSpPr>
-        <p:spPr>
-          <a:xfrm>
-            <a:off x="914400" y="2011680"/>
-            <a:ext cx="10058400" cy="1097280"/>
-          </a:xfrm>
-          <a:prstGeom prst="rect">
-            <a:avLst/>
-          </a:prstGeom>
-          <a:noFill/>
-        </p:spPr>
-        <p:txBody>
-          <a:bodyPr wrap="square">
-            <a:spAutoFit/>
-          </a:bodyPr>
-          <a:lstStyle/>
-          <a:p>
-            <a:pPr algn="ctr">
-              <a:defRPr sz="5600" b="1">
-                <a:solidFill>
-                  <a:srgbClr val="4AA3FF"/>
-                </a:solidFill>
-              </a:defRPr>
-            </a:pPr>
-            <a:r>
-              <a:t>QueryForge</a:t>
-            </a:r>
-          </a:p>
-        </p:txBody>
-      </p:sp>
-      <p:sp>
-        <p:nvSpPr>
-          <p:cNvPr id="3" name="TextBox 2"/>
-          <p:cNvSpPr txBox="1"/>
-          <p:nvPr/>
-        </p:nvSpPr>
-        <p:spPr>
-          <a:xfrm>
-            <a:off x="914400" y="3200400"/>
-            <a:ext cx="10058400" cy="731520"/>
-          </a:xfrm>
-          <a:prstGeom prst="rect">
-            <a:avLst/>
-          </a:prstGeom>
-          <a:noFill/>
-        </p:spPr>
-        <p:txBody>
-          <a:bodyPr wrap="square">
-            <a:spAutoFit/>
-          </a:bodyPr>
-          <a:lstStyle/>
-          <a:p>
-            <a:pPr algn="ctr">
-              <a:defRPr sz="2800" b="0">
-                <a:solidFill>
-                  <a:srgbClr val="FFFFFF"/>
-                </a:solidFill>
-              </a:defRPr>
-            </a:pPr>
-            <a:r>
-              <a:t>让每个人都能用数据说话</a:t>
-            </a:r>
-          </a:p>
-        </p:txBody>
-      </p:sp>
-      <p:sp>
-        <p:nvSpPr>
-          <p:cNvPr id="4" name="TextBox 3"/>
-          <p:cNvSpPr txBox="1"/>
-          <p:nvPr/>
-        </p:nvSpPr>
-        <p:spPr>
-          <a:xfrm>
-            <a:off x="914400" y="4389120"/>
-            <a:ext cx="10058400" cy="457200"/>
-          </a:xfrm>
-          <a:prstGeom prst="rect">
-            <a:avLst/>
-          </a:prstGeom>
-          <a:noFill/>
-        </p:spPr>
-        <p:txBody>
-          <a:bodyPr wrap="square">
-            <a:spAutoFit/>
-          </a:bodyPr>
-          <a:lstStyle/>
-          <a:p>
-            <a:pPr algn="ctr">
-              <a:defRPr sz="1800" b="0">
-                <a:solidFill>
-                  <a:srgbClr val="4AA3FF"/>
-                </a:solidFill>
-              </a:defRPr>
-            </a:pPr>
-            <a:r>
-              <a:t>queryforge-production-8d6f.up.railway.app</a:t>
-            </a:r>
-          </a:p>
-        </p:txBody>
-      </p:sp>
-      <p:sp>
-        <p:nvSpPr>
-          <p:cNvPr id="5" name="TextBox 4"/>
-          <p:cNvSpPr txBox="1"/>
-          <p:nvPr/>
-        </p:nvSpPr>
-        <p:spPr>
-          <a:xfrm>
-            <a:off x="914400" y="5029200"/>
-            <a:ext cx="10058400" cy="457200"/>
-          </a:xfrm>
-          <a:prstGeom prst="rect">
-            <a:avLst/>
-          </a:prstGeom>
-          <a:noFill/>
-        </p:spPr>
-        <p:txBody>
-          <a:bodyPr wrap="square">
-            <a:spAutoFit/>
-          </a:bodyPr>
-          <a:lstStyle/>
-          <a:p>
-            <a:pPr algn="ctr">
-              <a:defRPr sz="1400" b="0">
-                <a:solidFill>
-                  <a:srgbClr val="8B949E"/>
-                </a:solidFill>
-              </a:defRPr>
-            </a:pPr>
-            <a:r>
-              <a:t>github.com/eric-stone-plus/queryforge</a:t>
-            </a:r>
-          </a:p>
-        </p:txBody>
-      </p:sp>
-      <p:sp>
-        <p:nvSpPr>
-          <p:cNvPr id="6" name="TextBox 5"/>
-          <p:cNvSpPr txBox="1"/>
-          <p:nvPr/>
-        </p:nvSpPr>
-        <p:spPr>
-          <a:xfrm>
-            <a:off x="914400" y="5669280"/>
-            <a:ext cx="10058400" cy="457200"/>
-          </a:xfrm>
-          <a:prstGeom prst="rect">
-            <a:avLst/>
-          </a:prstGeom>
-          <a:noFill/>
-        </p:spPr>
-        <p:txBody>
-          <a:bodyPr wrap="square">
-            <a:spAutoFit/>
-          </a:bodyPr>
-          <a:lstStyle/>
-          <a:p>
-            <a:pPr algn="ctr">
-              <a:defRPr sz="1200" b="0">
-                <a:solidFill>
-                  <a:srgbClr val="8B949E"/>
-                </a:solidFill>
-              </a:defRPr>
-            </a:pPr>
-            <a:r>
-              <a:t>ClawHunt Builder Camp 2026 · Track A: Agents at Work</a:t>
-            </a:r>
-          </a:p>
-        </p:txBody>
-      </p:sp>
-      <p:sp>
-        <p:nvSpPr>
-          <p:cNvPr id="7" name="TextBox 6"/>
-          <p:cNvSpPr txBox="1"/>
-          <p:nvPr/>
-        </p:nvSpPr>
-        <p:spPr>
-          <a:xfrm>
-            <a:off x="731520" y="6400800"/>
-            <a:ext cx="1828800" cy="365760"/>
-          </a:xfrm>
-          <a:prstGeom prst="rect">
-            <a:avLst/>
-          </a:prstGeom>
-          <a:noFill/>
-        </p:spPr>
-        <p:txBody>
-          <a:bodyPr wrap="square">
-            <a:spAutoFit/>
-          </a:bodyPr>
-          <a:lstStyle/>
-          <a:p>
-            <a:pPr algn="l">
-              <a:defRPr sz="1100" b="0">
-                <a:solidFill>
-                  <a:srgbClr val="8B949E"/>
-                </a:solidFill>
-              </a:defRPr>
-            </a:pPr>
-            <a:r>
-              <a:t>QueryForge</a:t>
-            </a:r>
-          </a:p>
-        </p:txBody>
-      </p:sp>
-      <p:sp>
-        <p:nvSpPr>
-          <p:cNvPr id="8" name="TextBox 7"/>
-          <p:cNvSpPr txBox="1"/>
-          <p:nvPr/>
-        </p:nvSpPr>
-        <p:spPr>
-          <a:xfrm>
-            <a:off x="11155680" y="6400800"/>
-            <a:ext cx="731520" cy="365760"/>
-          </a:xfrm>
-          <a:prstGeom prst="rect">
-            <a:avLst/>
-          </a:prstGeom>
-          <a:noFill/>
-        </p:spPr>
-        <p:txBody>
-          <a:bodyPr wrap="square">
-            <a:spAutoFit/>
-          </a:bodyPr>
-          <a:lstStyle/>
-          <a:p>
-            <a:pPr algn="r">
-              <a:defRPr sz="1200" b="0">
-                <a:solidFill>
-                  <a:srgbClr val="8B949E"/>
-                </a:solidFill>
-              </a:defRPr>
-            </a:pPr>
-            <a:r>
-              <a:t>11</a:t>
             </a:r>
           </a:p>
         </p:txBody>
@@ -5236,7 +3741,7 @@
               </a:defRPr>
             </a:pPr>
             <a:r>
-              <a:t>业务团队缺的不是数据，而是可直接使用的分析结论</a:t>
+              <a:t>分析师忙于取数，业务忙于等排期</a:t>
             </a:r>
           </a:p>
         </p:txBody>
@@ -5271,7 +3776,7 @@
               </a:defRPr>
             </a:pPr>
             <a:r>
-              <a:t>经营数据散落在文件里，真正耗时的是清洗、理解、解释和汇报</a:t>
+              <a:t>同一个指标，不同部门问 10 遍，改 10 遍。分析师没时间做深度分析。</a:t>
             </a:r>
           </a:p>
         </p:txBody>
@@ -5392,7 +3897,7 @@
               </a:defRPr>
             </a:pPr>
             <a:r>
-              <a:t>SQL 门槛</a:t>
+              <a:t>重复需求</a:t>
             </a:r>
           </a:p>
         </p:txBody>
@@ -5427,7 +3932,11 @@
               </a:defRPr>
             </a:pPr>
             <a:r>
-              <a:t>业务人员不会写查询，依赖数据团队排队等排期</a:t>
+              <a:t>业务侧反复提同样的取数需求</a:t>
+            </a:r>
+            <a:br/>
+            <a:r>
+              <a:t>分析师反复调整口径和字段</a:t>
             </a:r>
           </a:p>
         </p:txBody>
@@ -5548,7 +4057,7 @@
               </a:defRPr>
             </a:pPr>
             <a:r>
-              <a:t>工具太重</a:t>
+              <a:t>排期等待</a:t>
             </a:r>
           </a:p>
         </p:txBody>
@@ -5583,7 +4092,11 @@
               </a:defRPr>
             </a:pPr>
             <a:r>
-              <a:t>传统 BI 学习成本高，临时需求无法快速响应</a:t>
+              <a:t>业务等分析师排期</a:t>
+            </a:r>
+            <a:br/>
+            <a:r>
+              <a:t>简单需求也要等 1-2 天</a:t>
             </a:r>
           </a:p>
         </p:txBody>
@@ -5704,7 +4217,7 @@
               </a:defRPr>
             </a:pPr>
             <a:r>
-              <a:t>假智能</a:t>
+              <a:t>看板调整</a:t>
             </a:r>
           </a:p>
         </p:txBody>
@@ -5739,7 +4252,11 @@
               </a:defRPr>
             </a:pPr>
             <a:r>
-              <a:t>市面工具用关键词匹配冒充 AI，无法理解开放式问题</a:t>
+              <a:t>数据看板每次改字段都要</a:t>
+            </a:r>
+            <a:br/>
+            <a:r>
+              <a:t>分析师重新开发</a:t>
             </a:r>
           </a:p>
         </p:txBody>
@@ -5860,7 +4377,7 @@
               </a:defRPr>
             </a:pPr>
             <a:r>
-              <a:t>单点故障</a:t>
+              <a:t>深度分析被挤占</a:t>
             </a:r>
           </a:p>
         </p:txBody>
@@ -5895,7 +4412,11 @@
               </a:defRPr>
             </a:pPr>
             <a:r>
-              <a:t>LLM 偶尔生成错误 SQL，没有自动修正机制</a:t>
+              <a:t>分析师 80% 时间在取数</a:t>
+            </a:r>
+            <a:br/>
+            <a:r>
+              <a:t>只有 20% 做真正有价值的分析</a:t>
             </a:r>
           </a:p>
         </p:txBody>
@@ -6015,7 +4536,7 @@
           </a:solidFill>
           <a:ln w="12700">
             <a:solidFill>
-              <a:srgbClr val="19D3C5"/>
+              <a:srgbClr val="1A7F37"/>
             </a:solidFill>
           </a:ln>
         </p:spPr>
@@ -6040,12 +4561,12 @@
             <a:pPr algn="ctr">
               <a:defRPr sz="1000" b="1">
                 <a:solidFill>
-                  <a:srgbClr val="19D3C5"/>
-                </a:solidFill>
-              </a:defRPr>
-            </a:pPr>
-            <a:r>
-              <a:t>PRODUCT POSITIONING</a:t>
+                  <a:srgbClr val="1A7F37"/>
+                </a:solidFill>
+              </a:defRPr>
+            </a:pPr>
+            <a:r>
+              <a:t>SOLUTION</a:t>
             </a:r>
           </a:p>
         </p:txBody>
@@ -6080,7 +4601,7 @@
               </a:defRPr>
             </a:pPr>
             <a:r>
-              <a:t>真正的 AI 数据分析，不是关键词匹配</a:t>
+              <a:t>分析师建指标，业务自助取数</a:t>
             </a:r>
           </a:p>
         </p:txBody>
@@ -6115,7 +4636,7 @@
               </a:defRPr>
             </a:pPr>
             <a:r>
-              <a:t>从自然语言到 SQL 到可视化，全链路 AI 推理，一步到位</a:t>
+              <a:t>分析师从"取数工具人"变成"数据架构师"</a:t>
             </a:r>
           </a:p>
         </p:txBody>
@@ -6129,7 +4650,7 @@
         <p:spPr>
           <a:xfrm>
             <a:off x="457200" y="2743200"/>
-            <a:ext cx="2651760" cy="3474720"/>
+            <a:ext cx="2651760" cy="3200400"/>
           </a:xfrm>
           <a:prstGeom prst="roundRect">
             <a:avLst/>
@@ -6228,15 +4749,15 @@
           </a:bodyPr>
           <a:lstStyle/>
           <a:p>
-            <a:pPr algn="l">
-              <a:defRPr sz="1600" b="1">
+            <a:pPr algn="ctr">
+              <a:defRPr sz="1800" b="1">
                 <a:solidFill>
                   <a:srgbClr val="4AA3FF"/>
                 </a:solidFill>
               </a:defRPr>
             </a:pPr>
             <a:r>
-              <a:t>01  提问</a:t>
+              <a:t>分析师</a:t>
             </a:r>
           </a:p>
         </p:txBody>
@@ -6250,77 +4771,50 @@
         <p:spPr>
           <a:xfrm>
             <a:off x="640080" y="3566160"/>
-            <a:ext cx="2286000" cy="457200"/>
-          </a:xfrm>
-          <a:prstGeom prst="rect">
-            <a:avLst/>
-          </a:prstGeom>
-          <a:noFill/>
-        </p:spPr>
-        <p:txBody>
-          <a:bodyPr wrap="square">
-            <a:spAutoFit/>
-          </a:bodyPr>
-          <a:lstStyle/>
-          <a:p>
-            <a:pPr algn="l">
-              <a:defRPr sz="1300" b="0">
-                <a:solidFill>
-                  <a:srgbClr val="FFFFFF"/>
-                </a:solidFill>
-              </a:defRPr>
-            </a:pPr>
-            <a:r>
-              <a:t>用户用中文描述需求</a:t>
-            </a:r>
-          </a:p>
-        </p:txBody>
-      </p:sp>
-      <p:sp>
-        <p:nvSpPr>
-          <p:cNvPr id="9" name="TextBox 8"/>
-          <p:cNvSpPr txBox="1"/>
-          <p:nvPr/>
-        </p:nvSpPr>
-        <p:spPr>
-          <a:xfrm>
-            <a:off x="640080" y="4206240"/>
-            <a:ext cx="2286000" cy="1371600"/>
-          </a:xfrm>
-          <a:prstGeom prst="rect">
-            <a:avLst/>
-          </a:prstGeom>
-          <a:noFill/>
-        </p:spPr>
-        <p:txBody>
-          <a:bodyPr wrap="square">
-            <a:spAutoFit/>
-          </a:bodyPr>
-          <a:lstStyle/>
-          <a:p>
-            <a:pPr algn="l">
-              <a:defRPr sz="1100" b="0">
+            <a:ext cx="2286000" cy="1828800"/>
+          </a:xfrm>
+          <a:prstGeom prst="rect">
+            <a:avLst/>
+          </a:prstGeom>
+          <a:noFill/>
+        </p:spPr>
+        <p:txBody>
+          <a:bodyPr wrap="square">
+            <a:spAutoFit/>
+          </a:bodyPr>
+          <a:lstStyle/>
+          <a:p>
+            <a:pPr algn="ctr">
+              <a:defRPr sz="1400" b="0">
                 <a:solidFill>
                   <a:srgbClr val="8B949E"/>
                 </a:solidFill>
               </a:defRPr>
             </a:pPr>
             <a:r>
-              <a:t>"最近三个月哪个品类增长最快"</a:t>
-            </a:r>
-          </a:p>
-        </p:txBody>
-      </p:sp>
-      <p:sp>
-        <p:nvSpPr>
-          <p:cNvPr id="10" name="Rounded Rectangle 9"/>
+              <a:t>调整底层数据</a:t>
+            </a:r>
+            <a:br/>
+            <a:r>
+              <a:t>定义指标口径</a:t>
+            </a:r>
+            <a:br/>
+            <a:r>
+              <a:t>配置数据看板</a:t>
+            </a:r>
+          </a:p>
+        </p:txBody>
+      </p:sp>
+      <p:sp>
+        <p:nvSpPr>
+          <p:cNvPr id="9" name="Rounded Rectangle 8"/>
           <p:cNvSpPr/>
           <p:nvPr/>
         </p:nvSpPr>
         <p:spPr>
           <a:xfrm>
             <a:off x="3337560" y="2743200"/>
-            <a:ext cx="2651760" cy="3474720"/>
+            <a:ext cx="2651760" cy="3200400"/>
           </a:xfrm>
           <a:prstGeom prst="roundRect">
             <a:avLst/>
@@ -6356,7 +4850,7 @@
       </p:sp>
       <p:sp>
         <p:nvSpPr>
-          <p:cNvPr id="11" name="Rectangle 10"/>
+          <p:cNvPr id="10" name="Rectangle 9"/>
           <p:cNvSpPr/>
           <p:nvPr/>
         </p:nvSpPr>
@@ -6399,7 +4893,7 @@
       </p:sp>
       <p:sp>
         <p:nvSpPr>
-          <p:cNvPr id="12" name="TextBox 11"/>
+          <p:cNvPr id="11" name="TextBox 10"/>
           <p:cNvSpPr txBox="1"/>
           <p:nvPr/>
         </p:nvSpPr>
@@ -6419,103 +4913,72 @@
           </a:bodyPr>
           <a:lstStyle/>
           <a:p>
-            <a:pPr algn="l">
-              <a:defRPr sz="1600" b="1">
+            <a:pPr algn="ctr">
+              <a:defRPr sz="1800" b="1">
                 <a:solidFill>
                   <a:srgbClr val="19D3C5"/>
                 </a:solidFill>
               </a:defRPr>
             </a:pPr>
             <a:r>
-              <a:t>02  推理</a:t>
-            </a:r>
-          </a:p>
-        </p:txBody>
-      </p:sp>
-      <p:sp>
-        <p:nvSpPr>
-          <p:cNvPr id="13" name="TextBox 12"/>
+              <a:t>业务人员</a:t>
+            </a:r>
+          </a:p>
+        </p:txBody>
+      </p:sp>
+      <p:sp>
+        <p:nvSpPr>
+          <p:cNvPr id="12" name="TextBox 11"/>
           <p:cNvSpPr txBox="1"/>
           <p:nvPr/>
         </p:nvSpPr>
         <p:spPr>
           <a:xfrm>
             <a:off x="3520440" y="3566160"/>
-            <a:ext cx="2286000" cy="457200"/>
-          </a:xfrm>
-          <a:prstGeom prst="rect">
-            <a:avLst/>
-          </a:prstGeom>
-          <a:noFill/>
-        </p:spPr>
-        <p:txBody>
-          <a:bodyPr wrap="square">
-            <a:spAutoFit/>
-          </a:bodyPr>
-          <a:lstStyle/>
-          <a:p>
-            <a:pPr algn="l">
-              <a:defRPr sz="1300" b="0">
-                <a:solidFill>
-                  <a:srgbClr val="FFFFFF"/>
-                </a:solidFill>
-              </a:defRPr>
-            </a:pPr>
-            <a:r>
-              <a:t>AI 理解意图，生成 SQL</a:t>
-            </a:r>
-          </a:p>
-        </p:txBody>
-      </p:sp>
-      <p:sp>
-        <p:nvSpPr>
-          <p:cNvPr id="14" name="TextBox 13"/>
-          <p:cNvSpPr txBox="1"/>
-          <p:nvPr/>
-        </p:nvSpPr>
-        <p:spPr>
-          <a:xfrm>
-            <a:off x="3520440" y="4206240"/>
-            <a:ext cx="2286000" cy="1371600"/>
-          </a:xfrm>
-          <a:prstGeom prst="rect">
-            <a:avLst/>
-          </a:prstGeom>
-          <a:noFill/>
-        </p:spPr>
-        <p:txBody>
-          <a:bodyPr wrap="square">
-            <a:spAutoFit/>
-          </a:bodyPr>
-          <a:lstStyle/>
-          <a:p>
-            <a:pPr algn="l">
-              <a:defRPr sz="1100" b="0">
+            <a:ext cx="2286000" cy="1828800"/>
+          </a:xfrm>
+          <a:prstGeom prst="rect">
+            <a:avLst/>
+          </a:prstGeom>
+          <a:noFill/>
+        </p:spPr>
+        <p:txBody>
+          <a:bodyPr wrap="square">
+            <a:spAutoFit/>
+          </a:bodyPr>
+          <a:lstStyle/>
+          <a:p>
+            <a:pPr algn="ctr">
+              <a:defRPr sz="1400" b="0">
                 <a:solidFill>
                   <a:srgbClr val="8B949E"/>
                 </a:solidFill>
               </a:defRPr>
             </a:pPr>
             <a:r>
-              <a:t>MiMo v2.5 Pro 实时推理</a:t>
+              <a:t>用中文提问</a:t>
             </a:r>
             <a:br/>
             <a:r>
-              <a:t>AST 解析器安全校验</a:t>
-            </a:r>
-          </a:p>
-        </p:txBody>
-      </p:sp>
-      <p:sp>
-        <p:nvSpPr>
-          <p:cNvPr id="15" name="Rounded Rectangle 14"/>
+              <a:t>自然语言取数</a:t>
+            </a:r>
+            <a:br/>
+            <a:r>
+              <a:t>自助生成图表</a:t>
+            </a:r>
+          </a:p>
+        </p:txBody>
+      </p:sp>
+      <p:sp>
+        <p:nvSpPr>
+          <p:cNvPr id="13" name="Rounded Rectangle 12"/>
           <p:cNvSpPr/>
           <p:nvPr/>
         </p:nvSpPr>
         <p:spPr>
           <a:xfrm>
             <a:off x="6217920" y="2743200"/>
-            <a:ext cx="2651760" cy="3474720"/>
+            <a:ext cx="2651760" cy="3200400"/>
           </a:xfrm>
           <a:prstGeom prst="roundRect">
             <a:avLst/>
@@ -6551,13 +5014,177 @@
       </p:sp>
       <p:sp>
         <p:nvSpPr>
-          <p:cNvPr id="16" name="Rectangle 15"/>
+          <p:cNvPr id="14" name="Rectangle 13"/>
           <p:cNvSpPr/>
           <p:nvPr/>
         </p:nvSpPr>
         <p:spPr>
           <a:xfrm>
             <a:off x="6355080" y="2743200"/>
+            <a:ext cx="2377440" cy="36576"/>
+          </a:xfrm>
+          <a:prstGeom prst="rect">
+            <a:avLst/>
+          </a:prstGeom>
+          <a:solidFill>
+            <a:srgbClr val="F7D74D"/>
+          </a:solidFill>
+          <a:ln>
+            <a:noFill/>
+          </a:ln>
+        </p:spPr>
+        <p:style>
+          <a:lnRef idx="1">
+            <a:schemeClr val="accent1"/>
+          </a:lnRef>
+          <a:fillRef idx="3">
+            <a:schemeClr val="accent1"/>
+          </a:fillRef>
+          <a:effectRef idx="2">
+            <a:schemeClr val="accent1"/>
+          </a:effectRef>
+          <a:fontRef idx="minor">
+            <a:schemeClr val="lt1"/>
+          </a:fontRef>
+        </p:style>
+        <p:txBody>
+          <a:bodyPr rtlCol="0" anchor="ctr"/>
+          <a:lstStyle/>
+          <a:p>
+            <a:pPr algn="ctr"/>
+          </a:p>
+        </p:txBody>
+      </p:sp>
+      <p:sp>
+        <p:nvSpPr>
+          <p:cNvPr id="15" name="TextBox 14"/>
+          <p:cNvSpPr txBox="1"/>
+          <p:nvPr/>
+        </p:nvSpPr>
+        <p:spPr>
+          <a:xfrm>
+            <a:off x="6400800" y="3017520"/>
+            <a:ext cx="2286000" cy="365760"/>
+          </a:xfrm>
+          <a:prstGeom prst="rect">
+            <a:avLst/>
+          </a:prstGeom>
+          <a:noFill/>
+        </p:spPr>
+        <p:txBody>
+          <a:bodyPr wrap="square">
+            <a:spAutoFit/>
+          </a:bodyPr>
+          <a:lstStyle/>
+          <a:p>
+            <a:pPr algn="ctr">
+              <a:defRPr sz="1800" b="1">
+                <a:solidFill>
+                  <a:srgbClr val="F7D74D"/>
+                </a:solidFill>
+              </a:defRPr>
+            </a:pPr>
+            <a:r>
+              <a:t>AI 引擎</a:t>
+            </a:r>
+          </a:p>
+        </p:txBody>
+      </p:sp>
+      <p:sp>
+        <p:nvSpPr>
+          <p:cNvPr id="16" name="TextBox 15"/>
+          <p:cNvSpPr txBox="1"/>
+          <p:nvPr/>
+        </p:nvSpPr>
+        <p:spPr>
+          <a:xfrm>
+            <a:off x="6400800" y="3566160"/>
+            <a:ext cx="2286000" cy="1828800"/>
+          </a:xfrm>
+          <a:prstGeom prst="rect">
+            <a:avLst/>
+          </a:prstGeom>
+          <a:noFill/>
+        </p:spPr>
+        <p:txBody>
+          <a:bodyPr wrap="square">
+            <a:spAutoFit/>
+          </a:bodyPr>
+          <a:lstStyle/>
+          <a:p>
+            <a:pPr algn="ctr">
+              <a:defRPr sz="1400" b="0">
+                <a:solidFill>
+                  <a:srgbClr val="8B949E"/>
+                </a:solidFill>
+              </a:defRPr>
+            </a:pPr>
+            <a:r>
+              <a:t>理解意图</a:t>
+            </a:r>
+            <a:br/>
+            <a:r>
+              <a:t>生成 SQL</a:t>
+            </a:r>
+            <a:br/>
+            <a:r>
+              <a:t>异常分析</a:t>
+            </a:r>
+          </a:p>
+        </p:txBody>
+      </p:sp>
+      <p:sp>
+        <p:nvSpPr>
+          <p:cNvPr id="17" name="Rounded Rectangle 16"/>
+          <p:cNvSpPr/>
+          <p:nvPr/>
+        </p:nvSpPr>
+        <p:spPr>
+          <a:xfrm>
+            <a:off x="9098280" y="2743200"/>
+            <a:ext cx="2651760" cy="3200400"/>
+          </a:xfrm>
+          <a:prstGeom prst="roundRect">
+            <a:avLst/>
+          </a:prstGeom>
+          <a:solidFill>
+            <a:srgbClr val="141A25"/>
+          </a:solidFill>
+          <a:ln>
+            <a:noFill/>
+          </a:ln>
+        </p:spPr>
+        <p:style>
+          <a:lnRef idx="1">
+            <a:schemeClr val="accent1"/>
+          </a:lnRef>
+          <a:fillRef idx="3">
+            <a:schemeClr val="accent1"/>
+          </a:fillRef>
+          <a:effectRef idx="2">
+            <a:schemeClr val="accent1"/>
+          </a:effectRef>
+          <a:fontRef idx="minor">
+            <a:schemeClr val="lt1"/>
+          </a:fontRef>
+        </p:style>
+        <p:txBody>
+          <a:bodyPr rtlCol="0" anchor="ctr"/>
+          <a:lstStyle/>
+          <a:p>
+            <a:pPr algn="ctr"/>
+          </a:p>
+        </p:txBody>
+      </p:sp>
+      <p:sp>
+        <p:nvSpPr>
+          <p:cNvPr id="18" name="Rectangle 17"/>
+          <p:cNvSpPr/>
+          <p:nvPr/>
+        </p:nvSpPr>
+        <p:spPr>
+          <a:xfrm>
+            <a:off x="9235440" y="2743200"/>
             <a:ext cx="2377440" cy="36576"/>
           </a:xfrm>
           <a:prstGeom prst="rect">
@@ -6594,13 +5221,13 @@
       </p:sp>
       <p:sp>
         <p:nvSpPr>
-          <p:cNvPr id="17" name="TextBox 16"/>
-          <p:cNvSpPr txBox="1"/>
-          <p:nvPr/>
-        </p:nvSpPr>
-        <p:spPr>
-          <a:xfrm>
-            <a:off x="6400800" y="3017520"/>
+          <p:cNvPr id="19" name="TextBox 18"/>
+          <p:cNvSpPr txBox="1"/>
+          <p:nvPr/>
+        </p:nvSpPr>
+        <p:spPr>
+          <a:xfrm>
+            <a:off x="9281159" y="3017520"/>
             <a:ext cx="2286000" cy="365760"/>
           </a:xfrm>
           <a:prstGeom prst="rect">
@@ -6614,64 +5241,72 @@
           </a:bodyPr>
           <a:lstStyle/>
           <a:p>
-            <a:pPr algn="l">
-              <a:defRPr sz="1600" b="1">
+            <a:pPr algn="ctr">
+              <a:defRPr sz="1800" b="1">
                 <a:solidFill>
                   <a:srgbClr val="1A7F37"/>
                 </a:solidFill>
               </a:defRPr>
             </a:pPr>
             <a:r>
-              <a:t>03  执行</a:t>
-            </a:r>
-          </a:p>
-        </p:txBody>
-      </p:sp>
-      <p:sp>
-        <p:nvSpPr>
-          <p:cNvPr id="18" name="TextBox 17"/>
-          <p:cNvSpPr txBox="1"/>
-          <p:nvPr/>
-        </p:nvSpPr>
-        <p:spPr>
-          <a:xfrm>
-            <a:off x="6400800" y="3566160"/>
-            <a:ext cx="2286000" cy="457200"/>
-          </a:xfrm>
-          <a:prstGeom prst="rect">
-            <a:avLst/>
-          </a:prstGeom>
-          <a:noFill/>
-        </p:spPr>
-        <p:txBody>
-          <a:bodyPr wrap="square">
-            <a:spAutoFit/>
-          </a:bodyPr>
-          <a:lstStyle/>
-          <a:p>
-            <a:pPr algn="l">
-              <a:defRPr sz="1300" b="0">
-                <a:solidFill>
-                  <a:srgbClr val="FFFFFF"/>
-                </a:solidFill>
-              </a:defRPr>
-            </a:pPr>
-            <a:r>
-              <a:t>查询数据库，返回结果</a:t>
-            </a:r>
-          </a:p>
-        </p:txBody>
-      </p:sp>
-      <p:sp>
-        <p:nvSpPr>
-          <p:cNvPr id="19" name="TextBox 18"/>
-          <p:cNvSpPr txBox="1"/>
-          <p:nvPr/>
-        </p:nvSpPr>
-        <p:spPr>
-          <a:xfrm>
-            <a:off x="6400800" y="4206240"/>
-            <a:ext cx="2286000" cy="1371600"/>
+              <a:t>输出</a:t>
+            </a:r>
+          </a:p>
+        </p:txBody>
+      </p:sp>
+      <p:sp>
+        <p:nvSpPr>
+          <p:cNvPr id="20" name="TextBox 19"/>
+          <p:cNvSpPr txBox="1"/>
+          <p:nvPr/>
+        </p:nvSpPr>
+        <p:spPr>
+          <a:xfrm>
+            <a:off x="9281159" y="3566160"/>
+            <a:ext cx="2286000" cy="1828800"/>
+          </a:xfrm>
+          <a:prstGeom prst="rect">
+            <a:avLst/>
+          </a:prstGeom>
+          <a:noFill/>
+        </p:spPr>
+        <p:txBody>
+          <a:bodyPr wrap="square">
+            <a:spAutoFit/>
+          </a:bodyPr>
+          <a:lstStyle/>
+          <a:p>
+            <a:pPr algn="ctr">
+              <a:defRPr sz="1400" b="0">
+                <a:solidFill>
+                  <a:srgbClr val="8B949E"/>
+                </a:solidFill>
+              </a:defRPr>
+            </a:pPr>
+            <a:r>
+              <a:t>可视化看板</a:t>
+            </a:r>
+            <a:br/>
+            <a:r>
+              <a:t>异常提示</a:t>
+            </a:r>
+            <a:br/>
+            <a:r>
+              <a:t>决策建议</a:t>
+            </a:r>
+          </a:p>
+        </p:txBody>
+      </p:sp>
+      <p:sp>
+        <p:nvSpPr>
+          <p:cNvPr id="21" name="TextBox 20"/>
+          <p:cNvSpPr txBox="1"/>
+          <p:nvPr/>
+        </p:nvSpPr>
+        <p:spPr>
+          <a:xfrm>
+            <a:off x="731520" y="6400800"/>
+            <a:ext cx="1828800" cy="365760"/>
           </a:xfrm>
           <a:prstGeom prst="rect">
             <a:avLst/>
@@ -6692,248 +5327,14 @@
               </a:defRPr>
             </a:pPr>
             <a:r>
-              <a:t>10,000 订单 · 500 商品</a:t>
-            </a:r>
-            <a:br/>
-            <a:r>
-              <a:t>自动 LIMIT 防卡死</a:t>
-            </a:r>
-          </a:p>
-        </p:txBody>
-      </p:sp>
-      <p:sp>
-        <p:nvSpPr>
-          <p:cNvPr id="20" name="Rounded Rectangle 19"/>
-          <p:cNvSpPr/>
-          <p:nvPr/>
-        </p:nvSpPr>
-        <p:spPr>
-          <a:xfrm>
-            <a:off x="9098280" y="2743200"/>
-            <a:ext cx="2651760" cy="3474720"/>
-          </a:xfrm>
-          <a:prstGeom prst="roundRect">
-            <a:avLst/>
-          </a:prstGeom>
-          <a:solidFill>
-            <a:srgbClr val="141A25"/>
-          </a:solidFill>
-          <a:ln>
-            <a:noFill/>
-          </a:ln>
-        </p:spPr>
-        <p:style>
-          <a:lnRef idx="1">
-            <a:schemeClr val="accent1"/>
-          </a:lnRef>
-          <a:fillRef idx="3">
-            <a:schemeClr val="accent1"/>
-          </a:fillRef>
-          <a:effectRef idx="2">
-            <a:schemeClr val="accent1"/>
-          </a:effectRef>
-          <a:fontRef idx="minor">
-            <a:schemeClr val="lt1"/>
-          </a:fontRef>
-        </p:style>
-        <p:txBody>
-          <a:bodyPr rtlCol="0" anchor="ctr"/>
-          <a:lstStyle/>
-          <a:p>
-            <a:pPr algn="ctr"/>
-          </a:p>
-        </p:txBody>
-      </p:sp>
-      <p:sp>
-        <p:nvSpPr>
-          <p:cNvPr id="21" name="Rectangle 20"/>
-          <p:cNvSpPr/>
-          <p:nvPr/>
-        </p:nvSpPr>
-        <p:spPr>
-          <a:xfrm>
-            <a:off x="9235440" y="2743200"/>
-            <a:ext cx="2377440" cy="36576"/>
-          </a:xfrm>
-          <a:prstGeom prst="rect">
-            <a:avLst/>
-          </a:prstGeom>
-          <a:solidFill>
-            <a:srgbClr val="F7D74D"/>
-          </a:solidFill>
-          <a:ln>
-            <a:noFill/>
-          </a:ln>
-        </p:spPr>
-        <p:style>
-          <a:lnRef idx="1">
-            <a:schemeClr val="accent1"/>
-          </a:lnRef>
-          <a:fillRef idx="3">
-            <a:schemeClr val="accent1"/>
-          </a:fillRef>
-          <a:effectRef idx="2">
-            <a:schemeClr val="accent1"/>
-          </a:effectRef>
-          <a:fontRef idx="minor">
-            <a:schemeClr val="lt1"/>
-          </a:fontRef>
-        </p:style>
-        <p:txBody>
-          <a:bodyPr rtlCol="0" anchor="ctr"/>
-          <a:lstStyle/>
-          <a:p>
-            <a:pPr algn="ctr"/>
+              <a:t>QueryForge</a:t>
+            </a:r>
           </a:p>
         </p:txBody>
       </p:sp>
       <p:sp>
         <p:nvSpPr>
           <p:cNvPr id="22" name="TextBox 21"/>
-          <p:cNvSpPr txBox="1"/>
-          <p:nvPr/>
-        </p:nvSpPr>
-        <p:spPr>
-          <a:xfrm>
-            <a:off x="9281159" y="3017520"/>
-            <a:ext cx="2286000" cy="365760"/>
-          </a:xfrm>
-          <a:prstGeom prst="rect">
-            <a:avLst/>
-          </a:prstGeom>
-          <a:noFill/>
-        </p:spPr>
-        <p:txBody>
-          <a:bodyPr wrap="square">
-            <a:spAutoFit/>
-          </a:bodyPr>
-          <a:lstStyle/>
-          <a:p>
-            <a:pPr algn="l">
-              <a:defRPr sz="1600" b="1">
-                <a:solidFill>
-                  <a:srgbClr val="F7D74D"/>
-                </a:solidFill>
-              </a:defRPr>
-            </a:pPr>
-            <a:r>
-              <a:t>04  可视化</a:t>
-            </a:r>
-          </a:p>
-        </p:txBody>
-      </p:sp>
-      <p:sp>
-        <p:nvSpPr>
-          <p:cNvPr id="23" name="TextBox 22"/>
-          <p:cNvSpPr txBox="1"/>
-          <p:nvPr/>
-        </p:nvSpPr>
-        <p:spPr>
-          <a:xfrm>
-            <a:off x="9281159" y="3566160"/>
-            <a:ext cx="2286000" cy="457200"/>
-          </a:xfrm>
-          <a:prstGeom prst="rect">
-            <a:avLst/>
-          </a:prstGeom>
-          <a:noFill/>
-        </p:spPr>
-        <p:txBody>
-          <a:bodyPr wrap="square">
-            <a:spAutoFit/>
-          </a:bodyPr>
-          <a:lstStyle/>
-          <a:p>
-            <a:pPr algn="l">
-              <a:defRPr sz="1300" b="0">
-                <a:solidFill>
-                  <a:srgbClr val="FFFFFF"/>
-                </a:solidFill>
-              </a:defRPr>
-            </a:pPr>
-            <a:r>
-              <a:t>图表 + 指标 + 解释</a:t>
-            </a:r>
-          </a:p>
-        </p:txBody>
-      </p:sp>
-      <p:sp>
-        <p:nvSpPr>
-          <p:cNvPr id="24" name="TextBox 23"/>
-          <p:cNvSpPr txBox="1"/>
-          <p:nvPr/>
-        </p:nvSpPr>
-        <p:spPr>
-          <a:xfrm>
-            <a:off x="9281159" y="4206240"/>
-            <a:ext cx="2286000" cy="1371600"/>
-          </a:xfrm>
-          <a:prstGeom prst="rect">
-            <a:avLst/>
-          </a:prstGeom>
-          <a:noFill/>
-        </p:spPr>
-        <p:txBody>
-          <a:bodyPr wrap="square">
-            <a:spAutoFit/>
-          </a:bodyPr>
-          <a:lstStyle/>
-          <a:p>
-            <a:pPr algn="l">
-              <a:defRPr sz="1100" b="0">
-                <a:solidFill>
-                  <a:srgbClr val="8B949E"/>
-                </a:solidFill>
-              </a:defRPr>
-            </a:pPr>
-            <a:r>
-              <a:t>柱状/折线/饼图/面积图</a:t>
-            </a:r>
-            <a:br/>
-            <a:r>
-              <a:t>KPI 卡片 + 数据透视</a:t>
-            </a:r>
-          </a:p>
-        </p:txBody>
-      </p:sp>
-      <p:sp>
-        <p:nvSpPr>
-          <p:cNvPr id="25" name="TextBox 24"/>
-          <p:cNvSpPr txBox="1"/>
-          <p:nvPr/>
-        </p:nvSpPr>
-        <p:spPr>
-          <a:xfrm>
-            <a:off x="731520" y="6400800"/>
-            <a:ext cx="1828800" cy="365760"/>
-          </a:xfrm>
-          <a:prstGeom prst="rect">
-            <a:avLst/>
-          </a:prstGeom>
-          <a:noFill/>
-        </p:spPr>
-        <p:txBody>
-          <a:bodyPr wrap="square">
-            <a:spAutoFit/>
-          </a:bodyPr>
-          <a:lstStyle/>
-          <a:p>
-            <a:pPr algn="l">
-              <a:defRPr sz="1100" b="0">
-                <a:solidFill>
-                  <a:srgbClr val="8B949E"/>
-                </a:solidFill>
-              </a:defRPr>
-            </a:pPr>
-            <a:r>
-              <a:t>QueryForge</a:t>
-            </a:r>
-          </a:p>
-        </p:txBody>
-      </p:sp>
-      <p:sp>
-        <p:nvSpPr>
-          <p:cNvPr id="26" name="TextBox 25"/>
           <p:cNvSpPr txBox="1"/>
           <p:nvPr/>
         </p:nvSpPr>
@@ -7111,7 +5512,7 @@
               </a:defRPr>
             </a:pPr>
             <a:r>
-              <a:t>不是出了错就放弃，而是把错误反馈给 AI，让它自己修</a:t>
+              <a:t>不是关键词匹配，是真正的 AI 推理。出了错自己修。</a:t>
             </a:r>
           </a:p>
         </p:txBody>
@@ -7260,27 +5661,22 @@
           <a:lstStyle/>
           <a:p>
             <a:pPr algn="l">
-              <a:defRPr sz="1200" b="0">
+              <a:defRPr sz="1400" b="0">
                 <a:solidFill>
                   <a:srgbClr val="8B949E"/>
                 </a:solidFill>
               </a:defRPr>
             </a:pPr>
             <a:r>
-              <a:t>用户问："各品类退货率"</a:t>
+              <a:t>AI 理解意图</a:t>
             </a:r>
             <a:br/>
+            <a:r>
+              <a:t>生成查询语句</a:t>
+            </a:r>
             <a:br/>
             <a:r>
-              <a:t>AI 生成 SQL</a:t>
-            </a:r>
-            <a:br/>
-            <a:r>
-              <a:t>执行 → 报错</a:t>
-            </a:r>
-            <a:br/>
-            <a:r>
-              <a:t>"no such column: refund_rate"</a:t>
+              <a:t>执行数据库</a:t>
             </a:r>
           </a:p>
         </p:txBody>
@@ -7293,7 +5689,7 @@
         </p:nvSpPr>
         <p:spPr>
           <a:xfrm>
-            <a:off x="4480560" y="2743200"/>
+            <a:off x="4480559" y="2743200"/>
             <a:ext cx="3474720" cy="3200400"/>
           </a:xfrm>
           <a:prstGeom prst="roundRect">
@@ -7379,7 +5775,7 @@
         </p:nvSpPr>
         <p:spPr>
           <a:xfrm>
-            <a:off x="4754880" y="3017520"/>
+            <a:off x="4754879" y="3017520"/>
             <a:ext cx="2926080" cy="365760"/>
           </a:xfrm>
           <a:prstGeom prst="rect">
@@ -7414,7 +5810,7 @@
         </p:nvSpPr>
         <p:spPr>
           <a:xfrm>
-            <a:off x="4754880" y="3566160"/>
+            <a:off x="4754879" y="3566160"/>
             <a:ext cx="2926080" cy="1828800"/>
           </a:xfrm>
           <a:prstGeom prst="rect">
@@ -7429,27 +5825,22 @@
           <a:lstStyle/>
           <a:p>
             <a:pPr algn="l">
-              <a:defRPr sz="1200" b="0">
+              <a:defRPr sz="1400" b="0">
                 <a:solidFill>
                   <a:srgbClr val="8B949E"/>
                 </a:solidFill>
               </a:defRPr>
             </a:pPr>
             <a:r>
-              <a:t>错误信息反馈给 AI</a:t>
+              <a:t>SQL 报错</a:t>
             </a:r>
             <a:br/>
+            <a:r>
+              <a:t>错误反馈给 AI</a:t>
+            </a:r>
             <a:br/>
             <a:r>
-              <a:t>AI 分析错误原因</a:t>
-            </a:r>
-            <a:br/>
-            <a:r>
-              <a:t>生成修正后的 SQL</a:t>
-            </a:r>
-            <a:br/>
-            <a:r>
-              <a:t>重新执行</a:t>
+              <a:t>生成修正 SQL</a:t>
             </a:r>
           </a:p>
         </p:txBody>
@@ -7598,7 +5989,7 @@
           <a:lstStyle/>
           <a:p>
             <a:pPr algn="l">
-              <a:defRPr sz="1200" b="0">
+              <a:defRPr sz="1400" b="0">
                 <a:solidFill>
                   <a:srgbClr val="8B949E"/>
                 </a:solidFill>
@@ -7608,21 +5999,12 @@
               <a:t>修正后查询成功</a:t>
             </a:r>
             <a:br/>
+            <a:r>
+              <a:t>展示修正标签</a:t>
+            </a:r>
             <a:br/>
             <a:r>
-              <a:t>用户看到：</a:t>
-            </a:r>
-            <a:br/>
-            <a:r>
-              <a:t>✅ 修正标签</a:t>
-            </a:r>
-            <a:br/>
-            <a:r>
-              <a:t>✅ 正确图表</a:t>
-            </a:r>
-            <a:br/>
-            <a:r>
-              <a:t>✅ 修正说明</a:t>
+              <a:t>返回正确结果</a:t>
             </a:r>
           </a:p>
         </p:txBody>
@@ -7807,56 +6189,21 @@
               </a:defRPr>
             </a:pPr>
             <a:r>
-              <a:t>商业数据透视面板，8 项核心指标 + 6 个图表</a:t>
-            </a:r>
-          </a:p>
-        </p:txBody>
-      </p:sp>
-      <p:sp>
-        <p:nvSpPr>
-          <p:cNvPr id="4" name="TextBox 3"/>
-          <p:cNvSpPr txBox="1"/>
-          <p:nvPr/>
-        </p:nvSpPr>
-        <p:spPr>
-          <a:xfrm>
-            <a:off x="731520" y="2011680"/>
-            <a:ext cx="10058400" cy="457200"/>
-          </a:xfrm>
-          <a:prstGeom prst="rect">
-            <a:avLst/>
-          </a:prstGeom>
-          <a:noFill/>
-        </p:spPr>
-        <p:txBody>
-          <a:bodyPr wrap="square">
-            <a:spAutoFit/>
-          </a:bodyPr>
-          <a:lstStyle/>
-          <a:p>
-            <a:pPr algn="l">
-              <a:defRPr sz="1500" b="0">
-                <a:solidFill>
-                  <a:srgbClr val="8B949E"/>
-                </a:solidFill>
-              </a:defRPr>
-            </a:pPr>
-            <a:r>
-              <a:t>全部来自真实数据库，不是模拟数据</a:t>
-            </a:r>
-          </a:p>
-        </p:txBody>
-      </p:sp>
-      <p:sp>
-        <p:nvSpPr>
-          <p:cNvPr id="5" name="Rounded Rectangle 4"/>
+              <a:t>8 项核心指标 + 6 个图表，真实数据库</a:t>
+            </a:r>
+          </a:p>
+        </p:txBody>
+      </p:sp>
+      <p:sp>
+        <p:nvSpPr>
+          <p:cNvPr id="4" name="Rounded Rectangle 3"/>
           <p:cNvSpPr/>
           <p:nvPr/>
         </p:nvSpPr>
         <p:spPr>
           <a:xfrm>
-            <a:off x="731520" y="2743200"/>
-            <a:ext cx="2560320" cy="1554480"/>
+            <a:off x="731520" y="2194560"/>
+            <a:ext cx="2560320" cy="1645920"/>
           </a:xfrm>
           <a:prstGeom prst="roundRect">
             <a:avLst/>
@@ -7892,13 +6239,13 @@
       </p:sp>
       <p:sp>
         <p:nvSpPr>
-          <p:cNvPr id="6" name="Rectangle 5"/>
+          <p:cNvPr id="5" name="Rectangle 4"/>
           <p:cNvSpPr/>
           <p:nvPr/>
         </p:nvSpPr>
         <p:spPr>
           <a:xfrm>
-            <a:off x="868680" y="2743200"/>
+            <a:off x="868680" y="2194560"/>
             <a:ext cx="2286000" cy="36576"/>
           </a:xfrm>
           <a:prstGeom prst="rect">
@@ -7935,13 +6282,13 @@
       </p:sp>
       <p:sp>
         <p:nvSpPr>
-          <p:cNvPr id="7" name="TextBox 6"/>
-          <p:cNvSpPr txBox="1"/>
-          <p:nvPr/>
-        </p:nvSpPr>
-        <p:spPr>
-          <a:xfrm>
-            <a:off x="914400" y="2971800"/>
+          <p:cNvPr id="6" name="TextBox 5"/>
+          <p:cNvSpPr txBox="1"/>
+          <p:nvPr/>
+        </p:nvSpPr>
+        <p:spPr>
+          <a:xfrm>
+            <a:off x="914400" y="2468879"/>
             <a:ext cx="2194560" cy="274320"/>
           </a:xfrm>
           <a:prstGeom prst="rect">
@@ -7970,13 +6317,13 @@
       </p:sp>
       <p:sp>
         <p:nvSpPr>
-          <p:cNvPr id="8" name="TextBox 7"/>
-          <p:cNvSpPr txBox="1"/>
-          <p:nvPr/>
-        </p:nvSpPr>
-        <p:spPr>
-          <a:xfrm>
-            <a:off x="914400" y="3291840"/>
+          <p:cNvPr id="7" name="TextBox 6"/>
+          <p:cNvSpPr txBox="1"/>
+          <p:nvPr/>
+        </p:nvSpPr>
+        <p:spPr>
+          <a:xfrm>
+            <a:off x="914400" y="2834639"/>
             <a:ext cx="2194560" cy="457200"/>
           </a:xfrm>
           <a:prstGeom prst="rect">
@@ -7991,7 +6338,7 @@
           <a:lstStyle/>
           <a:p>
             <a:pPr algn="l">
-              <a:defRPr sz="2400" b="1">
+              <a:defRPr sz="2600" b="1">
                 <a:solidFill>
                   <a:srgbClr val="FFFFFF"/>
                 </a:solidFill>
@@ -8005,49 +6352,14 @@
       </p:sp>
       <p:sp>
         <p:nvSpPr>
-          <p:cNvPr id="9" name="TextBox 8"/>
-          <p:cNvSpPr txBox="1"/>
-          <p:nvPr/>
-        </p:nvSpPr>
-        <p:spPr>
-          <a:xfrm>
-            <a:off x="914400" y="3840480"/>
-            <a:ext cx="2194560" cy="274320"/>
-          </a:xfrm>
-          <a:prstGeom prst="rect">
-            <a:avLst/>
-          </a:prstGeom>
-          <a:noFill/>
-        </p:spPr>
-        <p:txBody>
-          <a:bodyPr wrap="square">
-            <a:spAutoFit/>
-          </a:bodyPr>
-          <a:lstStyle/>
-          <a:p>
-            <a:pPr algn="l">
-              <a:defRPr sz="1000" b="0">
-                <a:solidFill>
-                  <a:srgbClr val="8B949E"/>
-                </a:solidFill>
-              </a:defRPr>
-            </a:pPr>
-            <a:r>
-              <a:t>30个月累计</a:t>
-            </a:r>
-          </a:p>
-        </p:txBody>
-      </p:sp>
-      <p:sp>
-        <p:nvSpPr>
-          <p:cNvPr id="10" name="Rounded Rectangle 9"/>
+          <p:cNvPr id="8" name="Rounded Rectangle 7"/>
           <p:cNvSpPr/>
           <p:nvPr/>
         </p:nvSpPr>
         <p:spPr>
           <a:xfrm>
-            <a:off x="3566160" y="2743200"/>
-            <a:ext cx="2560320" cy="1554480"/>
+            <a:off x="3566160" y="2194560"/>
+            <a:ext cx="2560320" cy="1645920"/>
           </a:xfrm>
           <a:prstGeom prst="roundRect">
             <a:avLst/>
@@ -8083,13 +6395,13 @@
       </p:sp>
       <p:sp>
         <p:nvSpPr>
-          <p:cNvPr id="11" name="Rectangle 10"/>
+          <p:cNvPr id="9" name="Rectangle 8"/>
           <p:cNvSpPr/>
           <p:nvPr/>
         </p:nvSpPr>
         <p:spPr>
           <a:xfrm>
-            <a:off x="3703320" y="2743200"/>
+            <a:off x="3703320" y="2194560"/>
             <a:ext cx="2286000" cy="36576"/>
           </a:xfrm>
           <a:prstGeom prst="rect">
@@ -8126,13 +6438,13 @@
       </p:sp>
       <p:sp>
         <p:nvSpPr>
-          <p:cNvPr id="12" name="TextBox 11"/>
-          <p:cNvSpPr txBox="1"/>
-          <p:nvPr/>
-        </p:nvSpPr>
-        <p:spPr>
-          <a:xfrm>
-            <a:off x="3749040" y="2971800"/>
+          <p:cNvPr id="10" name="TextBox 9"/>
+          <p:cNvSpPr txBox="1"/>
+          <p:nvPr/>
+        </p:nvSpPr>
+        <p:spPr>
+          <a:xfrm>
+            <a:off x="3749040" y="2468879"/>
             <a:ext cx="2194560" cy="274320"/>
           </a:xfrm>
           <a:prstGeom prst="rect">
@@ -8161,13 +6473,13 @@
       </p:sp>
       <p:sp>
         <p:nvSpPr>
-          <p:cNvPr id="13" name="TextBox 12"/>
-          <p:cNvSpPr txBox="1"/>
-          <p:nvPr/>
-        </p:nvSpPr>
-        <p:spPr>
-          <a:xfrm>
-            <a:off x="3749040" y="3291840"/>
+          <p:cNvPr id="11" name="TextBox 10"/>
+          <p:cNvSpPr txBox="1"/>
+          <p:nvPr/>
+        </p:nvSpPr>
+        <p:spPr>
+          <a:xfrm>
+            <a:off x="3749040" y="2834639"/>
             <a:ext cx="2194560" cy="457200"/>
           </a:xfrm>
           <a:prstGeom prst="rect">
@@ -8182,7 +6494,7 @@
           <a:lstStyle/>
           <a:p>
             <a:pPr algn="l">
-              <a:defRPr sz="2400" b="1">
+              <a:defRPr sz="2600" b="1">
                 <a:solidFill>
                   <a:srgbClr val="FFFFFF"/>
                 </a:solidFill>
@@ -8196,49 +6508,14 @@
       </p:sp>
       <p:sp>
         <p:nvSpPr>
-          <p:cNvPr id="14" name="TextBox 13"/>
-          <p:cNvSpPr txBox="1"/>
-          <p:nvPr/>
-        </p:nvSpPr>
-        <p:spPr>
-          <a:xfrm>
-            <a:off x="3749040" y="3840480"/>
-            <a:ext cx="2194560" cy="274320"/>
-          </a:xfrm>
-          <a:prstGeom prst="rect">
-            <a:avLst/>
-          </a:prstGeom>
-          <a:noFill/>
-        </p:spPr>
-        <p:txBody>
-          <a:bodyPr wrap="square">
-            <a:spAutoFit/>
-          </a:bodyPr>
-          <a:lstStyle/>
-          <a:p>
-            <a:pPr algn="l">
-              <a:defRPr sz="1000" b="0">
-                <a:solidFill>
-                  <a:srgbClr val="8B949E"/>
-                </a:solidFill>
-              </a:defRPr>
-            </a:pPr>
-            <a:r>
-              <a:t>平均每单</a:t>
-            </a:r>
-          </a:p>
-        </p:txBody>
-      </p:sp>
-      <p:sp>
-        <p:nvSpPr>
-          <p:cNvPr id="15" name="Rounded Rectangle 14"/>
+          <p:cNvPr id="12" name="Rounded Rectangle 11"/>
           <p:cNvSpPr/>
           <p:nvPr/>
         </p:nvSpPr>
         <p:spPr>
           <a:xfrm>
-            <a:off x="6400800" y="2743200"/>
-            <a:ext cx="2560320" cy="1554480"/>
+            <a:off x="6400800" y="2194560"/>
+            <a:ext cx="2560320" cy="1645920"/>
           </a:xfrm>
           <a:prstGeom prst="roundRect">
             <a:avLst/>
@@ -8274,13 +6551,13 @@
       </p:sp>
       <p:sp>
         <p:nvSpPr>
-          <p:cNvPr id="16" name="Rectangle 15"/>
+          <p:cNvPr id="13" name="Rectangle 12"/>
           <p:cNvSpPr/>
           <p:nvPr/>
         </p:nvSpPr>
         <p:spPr>
           <a:xfrm>
-            <a:off x="6537960" y="2743200"/>
+            <a:off x="6537960" y="2194560"/>
             <a:ext cx="2286000" cy="36576"/>
           </a:xfrm>
           <a:prstGeom prst="rect">
@@ -8317,13 +6594,13 @@
       </p:sp>
       <p:sp>
         <p:nvSpPr>
-          <p:cNvPr id="17" name="TextBox 16"/>
-          <p:cNvSpPr txBox="1"/>
-          <p:nvPr/>
-        </p:nvSpPr>
-        <p:spPr>
-          <a:xfrm>
-            <a:off x="6583680" y="2971800"/>
+          <p:cNvPr id="14" name="TextBox 13"/>
+          <p:cNvSpPr txBox="1"/>
+          <p:nvPr/>
+        </p:nvSpPr>
+        <p:spPr>
+          <a:xfrm>
+            <a:off x="6583680" y="2468879"/>
             <a:ext cx="2194560" cy="274320"/>
           </a:xfrm>
           <a:prstGeom prst="rect">
@@ -8352,13 +6629,13 @@
       </p:sp>
       <p:sp>
         <p:nvSpPr>
-          <p:cNvPr id="18" name="TextBox 17"/>
-          <p:cNvSpPr txBox="1"/>
-          <p:nvPr/>
-        </p:nvSpPr>
-        <p:spPr>
-          <a:xfrm>
-            <a:off x="6583680" y="3291840"/>
+          <p:cNvPr id="15" name="TextBox 14"/>
+          <p:cNvSpPr txBox="1"/>
+          <p:nvPr/>
+        </p:nvSpPr>
+        <p:spPr>
+          <a:xfrm>
+            <a:off x="6583680" y="2834639"/>
             <a:ext cx="2194560" cy="457200"/>
           </a:xfrm>
           <a:prstGeom prst="rect">
@@ -8373,7 +6650,7 @@
           <a:lstStyle/>
           <a:p>
             <a:pPr algn="l">
-              <a:defRPr sz="2400" b="1">
+              <a:defRPr sz="2600" b="1">
                 <a:solidFill>
                   <a:srgbClr val="FFFFFF"/>
                 </a:solidFill>
@@ -8387,49 +6664,14 @@
       </p:sp>
       <p:sp>
         <p:nvSpPr>
-          <p:cNvPr id="19" name="TextBox 18"/>
-          <p:cNvSpPr txBox="1"/>
-          <p:nvPr/>
-        </p:nvSpPr>
-        <p:spPr>
-          <a:xfrm>
-            <a:off x="6583680" y="3840480"/>
-            <a:ext cx="2194560" cy="274320"/>
-          </a:xfrm>
-          <a:prstGeom prst="rect">
-            <a:avLst/>
-          </a:prstGeom>
-          <a:noFill/>
-        </p:spPr>
-        <p:txBody>
-          <a:bodyPr wrap="square">
-            <a:spAutoFit/>
-          </a:bodyPr>
-          <a:lstStyle/>
-          <a:p>
-            <a:pPr algn="l">
-              <a:defRPr sz="1000" b="0">
-                <a:solidFill>
-                  <a:srgbClr val="8B949E"/>
-                </a:solidFill>
-              </a:defRPr>
-            </a:pPr>
-            <a:r>
-              <a:t>全品类均值</a:t>
-            </a:r>
-          </a:p>
-        </p:txBody>
-      </p:sp>
-      <p:sp>
-        <p:nvSpPr>
-          <p:cNvPr id="20" name="Rounded Rectangle 19"/>
+          <p:cNvPr id="16" name="Rounded Rectangle 15"/>
           <p:cNvSpPr/>
           <p:nvPr/>
         </p:nvSpPr>
         <p:spPr>
           <a:xfrm>
-            <a:off x="9235440" y="2743200"/>
-            <a:ext cx="2560320" cy="1554480"/>
+            <a:off x="9235440" y="2194560"/>
+            <a:ext cx="2560320" cy="1645920"/>
           </a:xfrm>
           <a:prstGeom prst="roundRect">
             <a:avLst/>
@@ -8465,13 +6707,13 @@
       </p:sp>
       <p:sp>
         <p:nvSpPr>
-          <p:cNvPr id="21" name="Rectangle 20"/>
+          <p:cNvPr id="17" name="Rectangle 16"/>
           <p:cNvSpPr/>
           <p:nvPr/>
         </p:nvSpPr>
         <p:spPr>
           <a:xfrm>
-            <a:off x="9372600" y="2743200"/>
+            <a:off x="9372600" y="2194560"/>
             <a:ext cx="2286000" cy="36576"/>
           </a:xfrm>
           <a:prstGeom prst="rect">
@@ -8508,13 +6750,13 @@
       </p:sp>
       <p:sp>
         <p:nvSpPr>
-          <p:cNvPr id="22" name="TextBox 21"/>
-          <p:cNvSpPr txBox="1"/>
-          <p:nvPr/>
-        </p:nvSpPr>
-        <p:spPr>
-          <a:xfrm>
-            <a:off x="9418320" y="2971800"/>
+          <p:cNvPr id="18" name="TextBox 17"/>
+          <p:cNvSpPr txBox="1"/>
+          <p:nvPr/>
+        </p:nvSpPr>
+        <p:spPr>
+          <a:xfrm>
+            <a:off x="9418320" y="2468879"/>
             <a:ext cx="2194560" cy="274320"/>
           </a:xfrm>
           <a:prstGeom prst="rect">
@@ -8543,13 +6785,13 @@
       </p:sp>
       <p:sp>
         <p:nvSpPr>
-          <p:cNvPr id="23" name="TextBox 22"/>
-          <p:cNvSpPr txBox="1"/>
-          <p:nvPr/>
-        </p:nvSpPr>
-        <p:spPr>
-          <a:xfrm>
-            <a:off x="9418320" y="3291840"/>
+          <p:cNvPr id="19" name="TextBox 18"/>
+          <p:cNvSpPr txBox="1"/>
+          <p:nvPr/>
+        </p:nvSpPr>
+        <p:spPr>
+          <a:xfrm>
+            <a:off x="9418320" y="2834639"/>
             <a:ext cx="2194560" cy="457200"/>
           </a:xfrm>
           <a:prstGeom prst="rect">
@@ -8564,7 +6806,7 @@
           <a:lstStyle/>
           <a:p>
             <a:pPr algn="l">
-              <a:defRPr sz="2400" b="1">
+              <a:defRPr sz="2600" b="1">
                 <a:solidFill>
                   <a:srgbClr val="FFFFFF"/>
                 </a:solidFill>
@@ -8578,49 +6820,14 @@
       </p:sp>
       <p:sp>
         <p:nvSpPr>
-          <p:cNvPr id="24" name="TextBox 23"/>
-          <p:cNvSpPr txBox="1"/>
-          <p:nvPr/>
-        </p:nvSpPr>
-        <p:spPr>
-          <a:xfrm>
-            <a:off x="9418320" y="3840480"/>
-            <a:ext cx="2194560" cy="274320"/>
-          </a:xfrm>
-          <a:prstGeom prst="rect">
-            <a:avLst/>
-          </a:prstGeom>
-          <a:noFill/>
-        </p:spPr>
-        <p:txBody>
-          <a:bodyPr wrap="square">
-            <a:spAutoFit/>
-          </a:bodyPr>
-          <a:lstStyle/>
-          <a:p>
-            <a:pPr algn="l">
-              <a:defRPr sz="1000" b="0">
-                <a:solidFill>
-                  <a:srgbClr val="8B949E"/>
-                </a:solidFill>
-              </a:defRPr>
-            </a:pPr>
-            <a:r>
-              <a:t>人均10单</a:t>
-            </a:r>
-          </a:p>
-        </p:txBody>
-      </p:sp>
-      <p:sp>
-        <p:nvSpPr>
-          <p:cNvPr id="25" name="Rounded Rectangle 24"/>
+          <p:cNvPr id="20" name="Rounded Rectangle 19"/>
           <p:cNvSpPr/>
           <p:nvPr/>
         </p:nvSpPr>
         <p:spPr>
           <a:xfrm>
-            <a:off x="731520" y="4572000"/>
-            <a:ext cx="2560320" cy="1554480"/>
+            <a:off x="731520" y="4206240"/>
+            <a:ext cx="2560320" cy="1645920"/>
           </a:xfrm>
           <a:prstGeom prst="roundRect">
             <a:avLst/>
@@ -8656,13 +6863,13 @@
       </p:sp>
       <p:sp>
         <p:nvSpPr>
-          <p:cNvPr id="26" name="Rectangle 25"/>
+          <p:cNvPr id="21" name="Rectangle 20"/>
           <p:cNvSpPr/>
           <p:nvPr/>
         </p:nvSpPr>
         <p:spPr>
           <a:xfrm>
-            <a:off x="868680" y="4572000"/>
+            <a:off x="868680" y="4206240"/>
             <a:ext cx="2286000" cy="36576"/>
           </a:xfrm>
           <a:prstGeom prst="rect">
@@ -8699,13 +6906,13 @@
       </p:sp>
       <p:sp>
         <p:nvSpPr>
-          <p:cNvPr id="27" name="TextBox 26"/>
-          <p:cNvSpPr txBox="1"/>
-          <p:nvPr/>
-        </p:nvSpPr>
-        <p:spPr>
-          <a:xfrm>
-            <a:off x="914400" y="4800600"/>
+          <p:cNvPr id="22" name="TextBox 21"/>
+          <p:cNvSpPr txBox="1"/>
+          <p:nvPr/>
+        </p:nvSpPr>
+        <p:spPr>
+          <a:xfrm>
+            <a:off x="914400" y="4480559"/>
             <a:ext cx="2194560" cy="274320"/>
           </a:xfrm>
           <a:prstGeom prst="rect">
@@ -8734,13 +6941,13 @@
       </p:sp>
       <p:sp>
         <p:nvSpPr>
-          <p:cNvPr id="28" name="TextBox 27"/>
-          <p:cNvSpPr txBox="1"/>
-          <p:nvPr/>
-        </p:nvSpPr>
-        <p:spPr>
-          <a:xfrm>
-            <a:off x="914400" y="5120640"/>
+          <p:cNvPr id="23" name="TextBox 22"/>
+          <p:cNvSpPr txBox="1"/>
+          <p:nvPr/>
+        </p:nvSpPr>
+        <p:spPr>
+          <a:xfrm>
+            <a:off x="914400" y="4846320"/>
             <a:ext cx="2194560" cy="457200"/>
           </a:xfrm>
           <a:prstGeom prst="rect">
@@ -8755,7 +6962,7 @@
           <a:lstStyle/>
           <a:p>
             <a:pPr algn="l">
-              <a:defRPr sz="2400" b="1">
+              <a:defRPr sz="2600" b="1">
                 <a:solidFill>
                   <a:srgbClr val="FFFFFF"/>
                 </a:solidFill>
@@ -8769,49 +6976,14 @@
       </p:sp>
       <p:sp>
         <p:nvSpPr>
-          <p:cNvPr id="29" name="TextBox 28"/>
-          <p:cNvSpPr txBox="1"/>
-          <p:nvPr/>
-        </p:nvSpPr>
-        <p:spPr>
-          <a:xfrm>
-            <a:off x="914400" y="5669280"/>
-            <a:ext cx="2194560" cy="274320"/>
-          </a:xfrm>
-          <a:prstGeom prst="rect">
-            <a:avLst/>
-          </a:prstGeom>
-          <a:noFill/>
-        </p:spPr>
-        <p:txBody>
-          <a:bodyPr wrap="square">
-            <a:spAutoFit/>
-          </a:bodyPr>
-          <a:lstStyle/>
-          <a:p>
-            <a:pPr algn="l">
-              <a:defRPr sz="1000" b="0">
-                <a:solidFill>
-                  <a:srgbClr val="8B949E"/>
-                </a:solidFill>
-              </a:defRPr>
-            </a:pPr>
-            <a:r>
-              <a:t>6,650单</a:t>
-            </a:r>
-          </a:p>
-        </p:txBody>
-      </p:sp>
-      <p:sp>
-        <p:nvSpPr>
-          <p:cNvPr id="30" name="Rounded Rectangle 29"/>
+          <p:cNvPr id="24" name="Rounded Rectangle 23"/>
           <p:cNvSpPr/>
           <p:nvPr/>
         </p:nvSpPr>
         <p:spPr>
           <a:xfrm>
-            <a:off x="3566160" y="4572000"/>
-            <a:ext cx="2560320" cy="1554480"/>
+            <a:off x="3566160" y="4206240"/>
+            <a:ext cx="2560320" cy="1645920"/>
           </a:xfrm>
           <a:prstGeom prst="roundRect">
             <a:avLst/>
@@ -8847,13 +7019,13 @@
       </p:sp>
       <p:sp>
         <p:nvSpPr>
-          <p:cNvPr id="31" name="Rectangle 30"/>
+          <p:cNvPr id="25" name="Rectangle 24"/>
           <p:cNvSpPr/>
           <p:nvPr/>
         </p:nvSpPr>
         <p:spPr>
           <a:xfrm>
-            <a:off x="3703320" y="4572000"/>
+            <a:off x="3703320" y="4206240"/>
             <a:ext cx="2286000" cy="36576"/>
           </a:xfrm>
           <a:prstGeom prst="rect">
@@ -8890,13 +7062,13 @@
       </p:sp>
       <p:sp>
         <p:nvSpPr>
-          <p:cNvPr id="32" name="TextBox 31"/>
-          <p:cNvSpPr txBox="1"/>
-          <p:nvPr/>
-        </p:nvSpPr>
-        <p:spPr>
-          <a:xfrm>
-            <a:off x="3749040" y="4800600"/>
+          <p:cNvPr id="26" name="TextBox 25"/>
+          <p:cNvSpPr txBox="1"/>
+          <p:nvPr/>
+        </p:nvSpPr>
+        <p:spPr>
+          <a:xfrm>
+            <a:off x="3749040" y="4480559"/>
             <a:ext cx="2194560" cy="274320"/>
           </a:xfrm>
           <a:prstGeom prst="rect">
@@ -8925,13 +7097,13 @@
       </p:sp>
       <p:sp>
         <p:nvSpPr>
-          <p:cNvPr id="33" name="TextBox 32"/>
-          <p:cNvSpPr txBox="1"/>
-          <p:nvPr/>
-        </p:nvSpPr>
-        <p:spPr>
-          <a:xfrm>
-            <a:off x="3749040" y="5120640"/>
+          <p:cNvPr id="27" name="TextBox 26"/>
+          <p:cNvSpPr txBox="1"/>
+          <p:nvPr/>
+        </p:nvSpPr>
+        <p:spPr>
+          <a:xfrm>
+            <a:off x="3749040" y="4846320"/>
             <a:ext cx="2194560" cy="457200"/>
           </a:xfrm>
           <a:prstGeom prst="rect">
@@ -8946,7 +7118,7 @@
           <a:lstStyle/>
           <a:p>
             <a:pPr algn="l">
-              <a:defRPr sz="2400" b="1">
+              <a:defRPr sz="2600" b="1">
                 <a:solidFill>
                   <a:srgbClr val="FFFFFF"/>
                 </a:solidFill>
@@ -8960,49 +7132,14 @@
       </p:sp>
       <p:sp>
         <p:nvSpPr>
-          <p:cNvPr id="34" name="TextBox 33"/>
-          <p:cNvSpPr txBox="1"/>
-          <p:nvPr/>
-        </p:nvSpPr>
-        <p:spPr>
-          <a:xfrm>
-            <a:off x="3749040" y="5669280"/>
-            <a:ext cx="2194560" cy="274320"/>
-          </a:xfrm>
-          <a:prstGeom prst="rect">
-            <a:avLst/>
-          </a:prstGeom>
-          <a:noFill/>
-        </p:spPr>
-        <p:txBody>
-          <a:bodyPr wrap="square">
-            <a:spAutoFit/>
-          </a:bodyPr>
-          <a:lstStyle/>
-          <a:p>
-            <a:pPr algn="l">
-              <a:defRPr sz="1000" b="0">
-                <a:solidFill>
-                  <a:srgbClr val="8B949E"/>
-                </a:solidFill>
-              </a:defRPr>
-            </a:pPr>
-            <a:r>
-              <a:t>1,664单</a:t>
-            </a:r>
-          </a:p>
-        </p:txBody>
-      </p:sp>
-      <p:sp>
-        <p:nvSpPr>
-          <p:cNvPr id="35" name="Rounded Rectangle 34"/>
+          <p:cNvPr id="28" name="Rounded Rectangle 27"/>
           <p:cNvSpPr/>
           <p:nvPr/>
         </p:nvSpPr>
         <p:spPr>
           <a:xfrm>
-            <a:off x="6400800" y="4572000"/>
-            <a:ext cx="2560320" cy="1554480"/>
+            <a:off x="6400800" y="4206240"/>
+            <a:ext cx="2560320" cy="1645920"/>
           </a:xfrm>
           <a:prstGeom prst="roundRect">
             <a:avLst/>
@@ -9038,13 +7175,13 @@
       </p:sp>
       <p:sp>
         <p:nvSpPr>
-          <p:cNvPr id="36" name="Rectangle 35"/>
+          <p:cNvPr id="29" name="Rectangle 28"/>
           <p:cNvSpPr/>
           <p:nvPr/>
         </p:nvSpPr>
         <p:spPr>
           <a:xfrm>
-            <a:off x="6537960" y="4572000"/>
+            <a:off x="6537960" y="4206240"/>
             <a:ext cx="2286000" cy="36576"/>
           </a:xfrm>
           <a:prstGeom prst="rect">
@@ -9081,13 +7218,13 @@
       </p:sp>
       <p:sp>
         <p:nvSpPr>
-          <p:cNvPr id="37" name="TextBox 36"/>
-          <p:cNvSpPr txBox="1"/>
-          <p:nvPr/>
-        </p:nvSpPr>
-        <p:spPr>
-          <a:xfrm>
-            <a:off x="6583680" y="4800600"/>
+          <p:cNvPr id="30" name="TextBox 29"/>
+          <p:cNvSpPr txBox="1"/>
+          <p:nvPr/>
+        </p:nvSpPr>
+        <p:spPr>
+          <a:xfrm>
+            <a:off x="6583680" y="4480559"/>
             <a:ext cx="2194560" cy="274320"/>
           </a:xfrm>
           <a:prstGeom prst="rect">
@@ -9116,13 +7253,13 @@
       </p:sp>
       <p:sp>
         <p:nvSpPr>
-          <p:cNvPr id="38" name="TextBox 37"/>
-          <p:cNvSpPr txBox="1"/>
-          <p:nvPr/>
-        </p:nvSpPr>
-        <p:spPr>
-          <a:xfrm>
-            <a:off x="6583680" y="5120640"/>
+          <p:cNvPr id="31" name="TextBox 30"/>
+          <p:cNvSpPr txBox="1"/>
+          <p:nvPr/>
+        </p:nvSpPr>
+        <p:spPr>
+          <a:xfrm>
+            <a:off x="6583680" y="4846320"/>
             <a:ext cx="2194560" cy="457200"/>
           </a:xfrm>
           <a:prstGeom prst="rect">
@@ -9137,7 +7274,7 @@
           <a:lstStyle/>
           <a:p>
             <a:pPr algn="l">
-              <a:defRPr sz="2400" b="1">
+              <a:defRPr sz="2600" b="1">
                 <a:solidFill>
                   <a:srgbClr val="FFFFFF"/>
                 </a:solidFill>
@@ -9151,49 +7288,14 @@
       </p:sp>
       <p:sp>
         <p:nvSpPr>
-          <p:cNvPr id="39" name="TextBox 38"/>
-          <p:cNvSpPr txBox="1"/>
-          <p:nvPr/>
-        </p:nvSpPr>
-        <p:spPr>
-          <a:xfrm>
-            <a:off x="6583680" y="5669280"/>
-            <a:ext cx="2194560" cy="274320"/>
-          </a:xfrm>
-          <a:prstGeom prst="rect">
-            <a:avLst/>
-          </a:prstGeom>
-          <a:noFill/>
-        </p:spPr>
-        <p:txBody>
-          <a:bodyPr wrap="square">
-            <a:spAutoFit/>
-          </a:bodyPr>
-          <a:lstStyle/>
-          <a:p>
-            <a:pPr algn="l">
-              <a:defRPr sz="1000" b="0">
-                <a:solidFill>
-                  <a:srgbClr val="8B949E"/>
-                </a:solidFill>
-              </a:defRPr>
-            </a:pPr>
-            <a:r>
-              <a:t>每单平均</a:t>
-            </a:r>
-          </a:p>
-        </p:txBody>
-      </p:sp>
-      <p:sp>
-        <p:nvSpPr>
-          <p:cNvPr id="40" name="Rounded Rectangle 39"/>
+          <p:cNvPr id="32" name="Rounded Rectangle 31"/>
           <p:cNvSpPr/>
           <p:nvPr/>
         </p:nvSpPr>
         <p:spPr>
           <a:xfrm>
-            <a:off x="9235440" y="4572000"/>
-            <a:ext cx="2560320" cy="1554480"/>
+            <a:off x="9235440" y="4206240"/>
+            <a:ext cx="2560320" cy="1645920"/>
           </a:xfrm>
           <a:prstGeom prst="roundRect">
             <a:avLst/>
@@ -9229,13 +7331,13 @@
       </p:sp>
       <p:sp>
         <p:nvSpPr>
-          <p:cNvPr id="41" name="Rectangle 40"/>
+          <p:cNvPr id="33" name="Rectangle 32"/>
           <p:cNvSpPr/>
           <p:nvPr/>
         </p:nvSpPr>
         <p:spPr>
           <a:xfrm>
-            <a:off x="9372600" y="4572000"/>
+            <a:off x="9372600" y="4206240"/>
             <a:ext cx="2286000" cy="36576"/>
           </a:xfrm>
           <a:prstGeom prst="rect">
@@ -9272,13 +7374,13 @@
       </p:sp>
       <p:sp>
         <p:nvSpPr>
-          <p:cNvPr id="42" name="TextBox 41"/>
-          <p:cNvSpPr txBox="1"/>
-          <p:nvPr/>
-        </p:nvSpPr>
-        <p:spPr>
-          <a:xfrm>
-            <a:off x="9418320" y="4800600"/>
+          <p:cNvPr id="34" name="TextBox 33"/>
+          <p:cNvSpPr txBox="1"/>
+          <p:nvPr/>
+        </p:nvSpPr>
+        <p:spPr>
+          <a:xfrm>
+            <a:off x="9418320" y="4480559"/>
             <a:ext cx="2194560" cy="274320"/>
           </a:xfrm>
           <a:prstGeom prst="rect">
@@ -9307,13 +7409,13 @@
       </p:sp>
       <p:sp>
         <p:nvSpPr>
-          <p:cNvPr id="43" name="TextBox 42"/>
-          <p:cNvSpPr txBox="1"/>
-          <p:nvPr/>
-        </p:nvSpPr>
-        <p:spPr>
-          <a:xfrm>
-            <a:off x="9418320" y="5120640"/>
+          <p:cNvPr id="35" name="TextBox 34"/>
+          <p:cNvSpPr txBox="1"/>
+          <p:nvPr/>
+        </p:nvSpPr>
+        <p:spPr>
+          <a:xfrm>
+            <a:off x="9418320" y="4846320"/>
             <a:ext cx="2194560" cy="457200"/>
           </a:xfrm>
           <a:prstGeom prst="rect">
@@ -9328,7 +7430,7 @@
           <a:lstStyle/>
           <a:p>
             <a:pPr algn="l">
-              <a:defRPr sz="2400" b="1">
+              <a:defRPr sz="2600" b="1">
                 <a:solidFill>
                   <a:srgbClr val="FFFFFF"/>
                 </a:solidFill>
@@ -9342,42 +7444,42 @@
       </p:sp>
       <p:sp>
         <p:nvSpPr>
-          <p:cNvPr id="44" name="TextBox 43"/>
-          <p:cNvSpPr txBox="1"/>
-          <p:nvPr/>
-        </p:nvSpPr>
-        <p:spPr>
-          <a:xfrm>
-            <a:off x="9418320" y="5669280"/>
-            <a:ext cx="2194560" cy="274320"/>
-          </a:xfrm>
-          <a:prstGeom prst="rect">
-            <a:avLst/>
-          </a:prstGeom>
-          <a:noFill/>
-        </p:spPr>
-        <p:txBody>
-          <a:bodyPr wrap="square">
-            <a:spAutoFit/>
-          </a:bodyPr>
-          <a:lstStyle/>
-          <a:p>
-            <a:pPr algn="l">
-              <a:defRPr sz="1000" b="0">
+          <p:cNvPr id="36" name="TextBox 35"/>
+          <p:cNvSpPr txBox="1"/>
+          <p:nvPr/>
+        </p:nvSpPr>
+        <p:spPr>
+          <a:xfrm>
+            <a:off x="731520" y="6217920"/>
+            <a:ext cx="10515600" cy="365760"/>
+          </a:xfrm>
+          <a:prstGeom prst="rect">
+            <a:avLst/>
+          </a:prstGeom>
+          <a:noFill/>
+        </p:spPr>
+        <p:txBody>
+          <a:bodyPr wrap="square">
+            <a:spAutoFit/>
+          </a:bodyPr>
+          <a:lstStyle/>
+          <a:p>
+            <a:pPr algn="ctr">
+              <a:defRPr sz="1200" b="0">
                 <a:solidFill>
                   <a:srgbClr val="8B949E"/>
                 </a:solidFill>
               </a:defRPr>
             </a:pPr>
             <a:r>
-              <a:t>覆盖20品类</a:t>
-            </a:r>
-          </a:p>
-        </p:txBody>
-      </p:sp>
-      <p:sp>
-        <p:nvSpPr>
-          <p:cNvPr id="45" name="TextBox 44"/>
+              <a:t>全部数据来自真实 SQLite 数据库 · 10,000 订单 · 500 商品 · 1,000 用户 · 8 地区 · 20 品类</a:t>
+            </a:r>
+          </a:p>
+        </p:txBody>
+      </p:sp>
+      <p:sp>
+        <p:nvSpPr>
+          <p:cNvPr id="37" name="TextBox 36"/>
           <p:cNvSpPr txBox="1"/>
           <p:nvPr/>
         </p:nvSpPr>
@@ -9412,7 +7514,7 @@
       </p:sp>
       <p:sp>
         <p:nvSpPr>
-          <p:cNvPr id="46" name="TextBox 45"/>
+          <p:cNvPr id="38" name="TextBox 37"/>
           <p:cNvSpPr txBox="1"/>
           <p:nvPr/>
         </p:nvSpPr>
@@ -9490,7 +7592,7 @@
           </a:solidFill>
           <a:ln w="12700">
             <a:solidFill>
-              <a:srgbClr val="4AA3FF"/>
+              <a:srgbClr val="19D3C5"/>
             </a:solidFill>
           </a:ln>
         </p:spPr>
@@ -9515,12 +7617,12 @@
             <a:pPr algn="ctr">
               <a:defRPr sz="1000" b="1">
                 <a:solidFill>
-                  <a:srgbClr val="4AA3FF"/>
-                </a:solidFill>
-              </a:defRPr>
-            </a:pPr>
-            <a:r>
-              <a:t>QUALITY ASSURANCE</a:t>
+                  <a:srgbClr val="19D3C5"/>
+                </a:solidFill>
+              </a:defRPr>
+            </a:pPr>
+            <a:r>
+              <a:t>TECH STACK</a:t>
             </a:r>
           </a:p>
         </p:txBody>
@@ -9555,56 +7657,21 @@
               </a:defRPr>
             </a:pPr>
             <a:r>
-              <a:t>五方对抗审查：5 个 AI 互相挑刺</a:t>
-            </a:r>
-          </a:p>
-        </p:txBody>
-      </p:sp>
-      <p:sp>
-        <p:nvSpPr>
-          <p:cNvPr id="4" name="TextBox 3"/>
-          <p:cNvSpPr txBox="1"/>
-          <p:nvPr/>
-        </p:nvSpPr>
-        <p:spPr>
-          <a:xfrm>
-            <a:off x="731520" y="2011680"/>
-            <a:ext cx="10058400" cy="457200"/>
-          </a:xfrm>
-          <a:prstGeom prst="rect">
-            <a:avLst/>
-          </a:prstGeom>
-          <a:noFill/>
-        </p:spPr>
-        <p:txBody>
-          <a:bodyPr wrap="square">
-            <a:spAutoFit/>
-          </a:bodyPr>
-          <a:lstStyle/>
-          <a:p>
-            <a:pPr algn="l">
-              <a:defRPr sz="1500" b="0">
-                <a:solidFill>
-                  <a:srgbClr val="8B949E"/>
-                </a:solidFill>
-              </a:defRPr>
-            </a:pPr>
-            <a:r>
-              <a:t>不是一个人写代码一个人审，而是 5 个独立 AI 同时审查，消除单点盲区</a:t>
-            </a:r>
-          </a:p>
-        </p:txBody>
-      </p:sp>
-      <p:sp>
-        <p:nvSpPr>
-          <p:cNvPr id="5" name="Rounded Rectangle 4"/>
+              <a:t>技术路线：全栈 TypeScript，云端部署</a:t>
+            </a:r>
+          </a:p>
+        </p:txBody>
+      </p:sp>
+      <p:sp>
+        <p:nvSpPr>
+          <p:cNvPr id="4" name="Rounded Rectangle 3"/>
           <p:cNvSpPr/>
           <p:nvPr/>
         </p:nvSpPr>
         <p:spPr>
           <a:xfrm>
-            <a:off x="731520" y="2743200"/>
-            <a:ext cx="3474720" cy="2560320"/>
+            <a:off x="731520" y="2194560"/>
+            <a:ext cx="3474720" cy="1920240"/>
           </a:xfrm>
           <a:prstGeom prst="roundRect">
             <a:avLst/>
@@ -9640,13 +7707,13 @@
       </p:sp>
       <p:sp>
         <p:nvSpPr>
-          <p:cNvPr id="6" name="Rectangle 5"/>
+          <p:cNvPr id="5" name="Rectangle 4"/>
           <p:cNvSpPr/>
           <p:nvPr/>
         </p:nvSpPr>
         <p:spPr>
           <a:xfrm>
-            <a:off x="868680" y="2743200"/>
+            <a:off x="868680" y="2194560"/>
             <a:ext cx="3200400" cy="36576"/>
           </a:xfrm>
           <a:prstGeom prst="rect">
@@ -9683,13 +7750,13 @@
       </p:sp>
       <p:sp>
         <p:nvSpPr>
-          <p:cNvPr id="7" name="TextBox 6"/>
-          <p:cNvSpPr txBox="1"/>
-          <p:nvPr/>
-        </p:nvSpPr>
-        <p:spPr>
-          <a:xfrm>
-            <a:off x="1005840" y="3017520"/>
+          <p:cNvPr id="6" name="TextBox 5"/>
+          <p:cNvSpPr txBox="1"/>
+          <p:nvPr/>
+        </p:nvSpPr>
+        <p:spPr>
+          <a:xfrm>
+            <a:off x="1005840" y="2468879"/>
             <a:ext cx="2926080" cy="365760"/>
           </a:xfrm>
           <a:prstGeom prst="rect">
@@ -9711,21 +7778,21 @@
               </a:defRPr>
             </a:pPr>
             <a:r>
-              <a:t>R1 独立分析</a:t>
-            </a:r>
-          </a:p>
-        </p:txBody>
-      </p:sp>
-      <p:sp>
-        <p:nvSpPr>
-          <p:cNvPr id="8" name="TextBox 7"/>
-          <p:cNvSpPr txBox="1"/>
-          <p:nvPr/>
-        </p:nvSpPr>
-        <p:spPr>
-          <a:xfrm>
-            <a:off x="1005840" y="3566160"/>
-            <a:ext cx="2926080" cy="1371600"/>
+              <a:t>前端</a:t>
+            </a:r>
+          </a:p>
+        </p:txBody>
+      </p:sp>
+      <p:sp>
+        <p:nvSpPr>
+          <p:cNvPr id="7" name="TextBox 6"/>
+          <p:cNvSpPr txBox="1"/>
+          <p:nvPr/>
+        </p:nvSpPr>
+        <p:spPr>
+          <a:xfrm>
+            <a:off x="1005840" y="2926080"/>
+            <a:ext cx="2926080" cy="914400"/>
           </a:xfrm>
           <a:prstGeom prst="rect">
             <a:avLst/>
@@ -9746,29 +7813,25 @@
               </a:defRPr>
             </a:pPr>
             <a:r>
-              <a:t>5 个智能体各自独立审查</a:t>
+              <a:t>Next.js 14 · Tailwind · Recharts</a:t>
             </a:r>
             <a:br/>
             <a:r>
-              <a:t>互不通信，避免群体思维</a:t>
-            </a:r>
-            <a:br/>
-            <a:r>
-              <a:t>每个结论必须引用文件和行号</a:t>
-            </a:r>
-          </a:p>
-        </p:txBody>
-      </p:sp>
-      <p:sp>
-        <p:nvSpPr>
-          <p:cNvPr id="9" name="Rounded Rectangle 8"/>
+              <a:t>响应式看板 · 深色/浅色主题</a:t>
+            </a:r>
+          </a:p>
+        </p:txBody>
+      </p:sp>
+      <p:sp>
+        <p:nvSpPr>
+          <p:cNvPr id="8" name="Rounded Rectangle 7"/>
           <p:cNvSpPr/>
           <p:nvPr/>
         </p:nvSpPr>
         <p:spPr>
           <a:xfrm>
-            <a:off x="4480559" y="2743200"/>
-            <a:ext cx="3474720" cy="2560320"/>
+            <a:off x="4480559" y="2194560"/>
+            <a:ext cx="3474720" cy="1920240"/>
           </a:xfrm>
           <a:prstGeom prst="roundRect">
             <a:avLst/>
@@ -9804,13 +7867,13 @@
       </p:sp>
       <p:sp>
         <p:nvSpPr>
-          <p:cNvPr id="10" name="Rectangle 9"/>
+          <p:cNvPr id="9" name="Rectangle 8"/>
           <p:cNvSpPr/>
           <p:nvPr/>
         </p:nvSpPr>
         <p:spPr>
           <a:xfrm>
-            <a:off x="4617720" y="2743200"/>
+            <a:off x="4617720" y="2194560"/>
             <a:ext cx="3200400" cy="36576"/>
           </a:xfrm>
           <a:prstGeom prst="rect">
@@ -9847,13 +7910,13 @@
       </p:sp>
       <p:sp>
         <p:nvSpPr>
-          <p:cNvPr id="11" name="TextBox 10"/>
-          <p:cNvSpPr txBox="1"/>
-          <p:nvPr/>
-        </p:nvSpPr>
-        <p:spPr>
-          <a:xfrm>
-            <a:off x="4754879" y="3017520"/>
+          <p:cNvPr id="10" name="TextBox 9"/>
+          <p:cNvSpPr txBox="1"/>
+          <p:nvPr/>
+        </p:nvSpPr>
+        <p:spPr>
+          <a:xfrm>
+            <a:off x="4754879" y="2468879"/>
             <a:ext cx="2926080" cy="365760"/>
           </a:xfrm>
           <a:prstGeom prst="rect">
@@ -9875,21 +7938,21 @@
               </a:defRPr>
             </a:pPr>
             <a:r>
-              <a:t>R2 交叉审查</a:t>
-            </a:r>
-          </a:p>
-        </p:txBody>
-      </p:sp>
-      <p:sp>
-        <p:nvSpPr>
-          <p:cNvPr id="12" name="TextBox 11"/>
-          <p:cNvSpPr txBox="1"/>
-          <p:nvPr/>
-        </p:nvSpPr>
-        <p:spPr>
-          <a:xfrm>
-            <a:off x="4754879" y="3566160"/>
-            <a:ext cx="2926080" cy="1371600"/>
+              <a:t>后端</a:t>
+            </a:r>
+          </a:p>
+        </p:txBody>
+      </p:sp>
+      <p:sp>
+        <p:nvSpPr>
+          <p:cNvPr id="11" name="TextBox 10"/>
+          <p:cNvSpPr txBox="1"/>
+          <p:nvPr/>
+        </p:nvSpPr>
+        <p:spPr>
+          <a:xfrm>
+            <a:off x="4754879" y="2926080"/>
+            <a:ext cx="2926080" cy="914400"/>
           </a:xfrm>
           <a:prstGeom prst="rect">
             <a:avLst/>
@@ -9910,29 +7973,25 @@
               </a:defRPr>
             </a:pPr>
             <a:r>
-              <a:t>匿名审查其他 4 个的输出</a:t>
+              <a:t>Next.js API Routes · SSE 流式推送</a:t>
             </a:r>
             <a:br/>
             <a:r>
-              <a:t>标记共识、分歧和盲区</a:t>
-            </a:r>
-            <a:br/>
-            <a:r>
-              <a:t>被说服必须声明立场变更</a:t>
-            </a:r>
-          </a:p>
-        </p:txBody>
-      </p:sp>
-      <p:sp>
-        <p:nvSpPr>
-          <p:cNvPr id="13" name="Rounded Rectangle 12"/>
+              <a:t>实时进度展示</a:t>
+            </a:r>
+          </a:p>
+        </p:txBody>
+      </p:sp>
+      <p:sp>
+        <p:nvSpPr>
+          <p:cNvPr id="12" name="Rounded Rectangle 11"/>
           <p:cNvSpPr/>
           <p:nvPr/>
         </p:nvSpPr>
         <p:spPr>
           <a:xfrm>
-            <a:off x="8229600" y="2743200"/>
-            <a:ext cx="3474720" cy="2560320"/>
+            <a:off x="8229600" y="2194560"/>
+            <a:ext cx="3474720" cy="1920240"/>
           </a:xfrm>
           <a:prstGeom prst="roundRect">
             <a:avLst/>
@@ -9968,13 +8027,13 @@
       </p:sp>
       <p:sp>
         <p:nvSpPr>
-          <p:cNvPr id="14" name="Rectangle 13"/>
+          <p:cNvPr id="13" name="Rectangle 12"/>
           <p:cNvSpPr/>
           <p:nvPr/>
         </p:nvSpPr>
         <p:spPr>
           <a:xfrm>
-            <a:off x="8366760" y="2743200"/>
+            <a:off x="8366760" y="2194560"/>
             <a:ext cx="3200400" cy="36576"/>
           </a:xfrm>
           <a:prstGeom prst="rect">
@@ -10011,13 +8070,13 @@
       </p:sp>
       <p:sp>
         <p:nvSpPr>
-          <p:cNvPr id="15" name="TextBox 14"/>
-          <p:cNvSpPr txBox="1"/>
-          <p:nvPr/>
-        </p:nvSpPr>
-        <p:spPr>
-          <a:xfrm>
-            <a:off x="8503920" y="3017520"/>
+          <p:cNvPr id="14" name="TextBox 13"/>
+          <p:cNvSpPr txBox="1"/>
+          <p:nvPr/>
+        </p:nvSpPr>
+        <p:spPr>
+          <a:xfrm>
+            <a:off x="8503920" y="2468879"/>
             <a:ext cx="2926080" cy="365760"/>
           </a:xfrm>
           <a:prstGeom prst="rect">
@@ -10039,21 +8098,21 @@
               </a:defRPr>
             </a:pPr>
             <a:r>
-              <a:t>R3 双路裁决</a:t>
-            </a:r>
-          </a:p>
-        </p:txBody>
-      </p:sp>
-      <p:sp>
-        <p:nvSpPr>
-          <p:cNvPr id="16" name="TextBox 15"/>
-          <p:cNvSpPr txBox="1"/>
-          <p:nvPr/>
-        </p:nvSpPr>
-        <p:spPr>
-          <a:xfrm>
-            <a:off x="8503920" y="3566160"/>
-            <a:ext cx="2926080" cy="1371600"/>
+              <a:t>AI 引擎</a:t>
+            </a:r>
+          </a:p>
+        </p:txBody>
+      </p:sp>
+      <p:sp>
+        <p:nvSpPr>
+          <p:cNvPr id="15" name="TextBox 14"/>
+          <p:cNvSpPr txBox="1"/>
+          <p:nvPr/>
+        </p:nvSpPr>
+        <p:spPr>
+          <a:xfrm>
+            <a:off x="8503920" y="2926080"/>
+            <a:ext cx="2926080" cy="914400"/>
           </a:xfrm>
           <a:prstGeom prst="rect">
             <a:avLst/>
@@ -10074,29 +8133,25 @@
               </a:defRPr>
             </a:pPr>
             <a:r>
-              <a:t>人类 + 独立审计方共同裁决</a:t>
+              <a:t>MiMo v2.5 Pro · Vercel AI SDK</a:t>
             </a:r>
             <a:br/>
             <a:r>
-              <a:t>产出残差闭环账本</a:t>
-            </a:r>
-            <a:br/>
-            <a:r>
-              <a:t>未解决问题标为阻断信号</a:t>
-            </a:r>
-          </a:p>
-        </p:txBody>
-      </p:sp>
-      <p:sp>
-        <p:nvSpPr>
-          <p:cNvPr id="17" name="Rounded Rectangle 16"/>
+              <a:t>自然语言理解 + SQL 生成 + 自纠正</a:t>
+            </a:r>
+          </a:p>
+        </p:txBody>
+      </p:sp>
+      <p:sp>
+        <p:nvSpPr>
+          <p:cNvPr id="16" name="Rounded Rectangle 15"/>
           <p:cNvSpPr/>
           <p:nvPr/>
         </p:nvSpPr>
         <p:spPr>
           <a:xfrm>
-            <a:off x="731520" y="5577840"/>
-            <a:ext cx="5303520" cy="731520"/>
+            <a:off x="731520" y="4480560"/>
+            <a:ext cx="3474720" cy="1920240"/>
           </a:xfrm>
           <a:prstGeom prst="roundRect">
             <a:avLst/>
@@ -10132,14 +8187,14 @@
       </p:sp>
       <p:sp>
         <p:nvSpPr>
-          <p:cNvPr id="18" name="Rectangle 17"/>
+          <p:cNvPr id="17" name="Rectangle 16"/>
           <p:cNvSpPr/>
           <p:nvPr/>
         </p:nvSpPr>
         <p:spPr>
           <a:xfrm>
-            <a:off x="868680" y="5577840"/>
-            <a:ext cx="5029200" cy="36576"/>
+            <a:off x="868680" y="4480560"/>
+            <a:ext cx="3200400" cy="36576"/>
           </a:xfrm>
           <a:prstGeom prst="rect">
             <a:avLst/>
@@ -10175,14 +8230,49 @@
       </p:sp>
       <p:sp>
         <p:nvSpPr>
+          <p:cNvPr id="18" name="TextBox 17"/>
+          <p:cNvSpPr txBox="1"/>
+          <p:nvPr/>
+        </p:nvSpPr>
+        <p:spPr>
+          <a:xfrm>
+            <a:off x="1005840" y="4754880"/>
+            <a:ext cx="2926080" cy="365760"/>
+          </a:xfrm>
+          <a:prstGeom prst="rect">
+            <a:avLst/>
+          </a:prstGeom>
+          <a:noFill/>
+        </p:spPr>
+        <p:txBody>
+          <a:bodyPr wrap="square">
+            <a:spAutoFit/>
+          </a:bodyPr>
+          <a:lstStyle/>
+          <a:p>
+            <a:pPr algn="l">
+              <a:defRPr sz="1600" b="1">
+                <a:solidFill>
+                  <a:srgbClr val="1A7F37"/>
+                </a:solidFill>
+              </a:defRPr>
+            </a:pPr>
+            <a:r>
+              <a:t>数据层</a:t>
+            </a:r>
+          </a:p>
+        </p:txBody>
+      </p:sp>
+      <p:sp>
+        <p:nvSpPr>
           <p:cNvPr id="19" name="TextBox 18"/>
           <p:cNvSpPr txBox="1"/>
           <p:nvPr/>
         </p:nvSpPr>
         <p:spPr>
           <a:xfrm>
-            <a:off x="1005840" y="5669280"/>
-            <a:ext cx="4754880" cy="457200"/>
+            <a:off x="1005840" y="5212080"/>
+            <a:ext cx="2926080" cy="914400"/>
           </a:xfrm>
           <a:prstGeom prst="rect">
             <a:avLst/>
@@ -10196,14 +8286,18 @@
           <a:lstStyle/>
           <a:p>
             <a:pPr algn="l">
-              <a:defRPr sz="1400" b="1">
-                <a:solidFill>
-                  <a:srgbClr val="FFFFFF"/>
-                </a:solidFill>
-              </a:defRPr>
-            </a:pPr>
-            <a:r>
-              <a:t>成本：约 ¥5/次（小米 MiMo token plan）</a:t>
+              <a:defRPr sz="1300" b="0">
+                <a:solidFill>
+                  <a:srgbClr val="8B949E"/>
+                </a:solidFill>
+              </a:defRPr>
+            </a:pPr>
+            <a:r>
+              <a:t>better-sqlite3 · SQL AST 解析</a:t>
+            </a:r>
+            <a:br/>
+            <a:r>
+              <a:t>安全校验 · 自动 LIMIT</a:t>
             </a:r>
           </a:p>
         </p:txBody>
@@ -10216,8 +8310,8 @@
         </p:nvSpPr>
         <p:spPr>
           <a:xfrm>
-            <a:off x="6400800" y="5577840"/>
-            <a:ext cx="5303520" cy="731520"/>
+            <a:off x="4480559" y="4480560"/>
+            <a:ext cx="3474720" cy="1920240"/>
           </a:xfrm>
           <a:prstGeom prst="roundRect">
             <a:avLst/>
@@ -10259,8 +8353,8 @@
         </p:nvSpPr>
         <p:spPr>
           <a:xfrm>
-            <a:off x="6537960" y="5577840"/>
-            <a:ext cx="5029200" cy="36576"/>
+            <a:off x="4617720" y="4480560"/>
+            <a:ext cx="3200400" cy="36576"/>
           </a:xfrm>
           <a:prstGeom prst="rect">
             <a:avLst/>
@@ -10302,8 +8396,8 @@
         </p:nvSpPr>
         <p:spPr>
           <a:xfrm>
-            <a:off x="6675120" y="5669280"/>
-            <a:ext cx="4754880" cy="457200"/>
+            <a:off x="4754879" y="4754880"/>
+            <a:ext cx="2926080" cy="365760"/>
           </a:xfrm>
           <a:prstGeom prst="rect">
             <a:avLst/>
@@ -10317,14 +8411,14 @@
           <a:lstStyle/>
           <a:p>
             <a:pPr algn="l">
-              <a:defRPr sz="1400" b="1">
-                <a:solidFill>
-                  <a:srgbClr val="FFFFFF"/>
-                </a:solidFill>
-              </a:defRPr>
-            </a:pPr>
-            <a:r>
-              <a:t>对比：人工 Code Review ≈ ¥5,000（5人×2h）</a:t>
+              <a:defRPr sz="1600" b="1">
+                <a:solidFill>
+                  <a:srgbClr val="FF657A"/>
+                </a:solidFill>
+              </a:defRPr>
+            </a:pPr>
+            <a:r>
+              <a:t>部署</a:t>
             </a:r>
           </a:p>
         </p:txBody>
@@ -10332,6 +8426,205 @@
       <p:sp>
         <p:nvSpPr>
           <p:cNvPr id="23" name="TextBox 22"/>
+          <p:cNvSpPr txBox="1"/>
+          <p:nvPr/>
+        </p:nvSpPr>
+        <p:spPr>
+          <a:xfrm>
+            <a:off x="4754879" y="5212080"/>
+            <a:ext cx="2926080" cy="914400"/>
+          </a:xfrm>
+          <a:prstGeom prst="rect">
+            <a:avLst/>
+          </a:prstGeom>
+          <a:noFill/>
+        </p:spPr>
+        <p:txBody>
+          <a:bodyPr wrap="square">
+            <a:spAutoFit/>
+          </a:bodyPr>
+          <a:lstStyle/>
+          <a:p>
+            <a:pPr algn="l">
+              <a:defRPr sz="1300" b="0">
+                <a:solidFill>
+                  <a:srgbClr val="8B949E"/>
+                </a:solidFill>
+              </a:defRPr>
+            </a:pPr>
+            <a:r>
+              <a:t>Railway 云端 24/7</a:t>
+            </a:r>
+            <a:br/>
+            <a:r>
+              <a:t>macOS 桌面版（SwiftUI）</a:t>
+            </a:r>
+          </a:p>
+        </p:txBody>
+      </p:sp>
+      <p:sp>
+        <p:nvSpPr>
+          <p:cNvPr id="24" name="Rounded Rectangle 23"/>
+          <p:cNvSpPr/>
+          <p:nvPr/>
+        </p:nvSpPr>
+        <p:spPr>
+          <a:xfrm>
+            <a:off x="8229600" y="4480560"/>
+            <a:ext cx="3474720" cy="1920240"/>
+          </a:xfrm>
+          <a:prstGeom prst="roundRect">
+            <a:avLst/>
+          </a:prstGeom>
+          <a:solidFill>
+            <a:srgbClr val="141A25"/>
+          </a:solidFill>
+          <a:ln>
+            <a:noFill/>
+          </a:ln>
+        </p:spPr>
+        <p:style>
+          <a:lnRef idx="1">
+            <a:schemeClr val="accent1"/>
+          </a:lnRef>
+          <a:fillRef idx="3">
+            <a:schemeClr val="accent1"/>
+          </a:fillRef>
+          <a:effectRef idx="2">
+            <a:schemeClr val="accent1"/>
+          </a:effectRef>
+          <a:fontRef idx="minor">
+            <a:schemeClr val="lt1"/>
+          </a:fontRef>
+        </p:style>
+        <p:txBody>
+          <a:bodyPr rtlCol="0" anchor="ctr"/>
+          <a:lstStyle/>
+          <a:p>
+            <a:pPr algn="ctr"/>
+          </a:p>
+        </p:txBody>
+      </p:sp>
+      <p:sp>
+        <p:nvSpPr>
+          <p:cNvPr id="25" name="Rectangle 24"/>
+          <p:cNvSpPr/>
+          <p:nvPr/>
+        </p:nvSpPr>
+        <p:spPr>
+          <a:xfrm>
+            <a:off x="8366760" y="4480560"/>
+            <a:ext cx="3200400" cy="36576"/>
+          </a:xfrm>
+          <a:prstGeom prst="rect">
+            <a:avLst/>
+          </a:prstGeom>
+          <a:solidFill>
+            <a:srgbClr val="4AA3FF"/>
+          </a:solidFill>
+          <a:ln>
+            <a:noFill/>
+          </a:ln>
+        </p:spPr>
+        <p:style>
+          <a:lnRef idx="1">
+            <a:schemeClr val="accent1"/>
+          </a:lnRef>
+          <a:fillRef idx="3">
+            <a:schemeClr val="accent1"/>
+          </a:fillRef>
+          <a:effectRef idx="2">
+            <a:schemeClr val="accent1"/>
+          </a:effectRef>
+          <a:fontRef idx="minor">
+            <a:schemeClr val="lt1"/>
+          </a:fontRef>
+        </p:style>
+        <p:txBody>
+          <a:bodyPr rtlCol="0" anchor="ctr"/>
+          <a:lstStyle/>
+          <a:p>
+            <a:pPr algn="ctr"/>
+          </a:p>
+        </p:txBody>
+      </p:sp>
+      <p:sp>
+        <p:nvSpPr>
+          <p:cNvPr id="26" name="TextBox 25"/>
+          <p:cNvSpPr txBox="1"/>
+          <p:nvPr/>
+        </p:nvSpPr>
+        <p:spPr>
+          <a:xfrm>
+            <a:off x="8503920" y="4754880"/>
+            <a:ext cx="2926080" cy="365760"/>
+          </a:xfrm>
+          <a:prstGeom prst="rect">
+            <a:avLst/>
+          </a:prstGeom>
+          <a:noFill/>
+        </p:spPr>
+        <p:txBody>
+          <a:bodyPr wrap="square">
+            <a:spAutoFit/>
+          </a:bodyPr>
+          <a:lstStyle/>
+          <a:p>
+            <a:pPr algn="l">
+              <a:defRPr sz="1600" b="1">
+                <a:solidFill>
+                  <a:srgbClr val="4AA3FF"/>
+                </a:solidFill>
+              </a:defRPr>
+            </a:pPr>
+            <a:r>
+              <a:t>质量</a:t>
+            </a:r>
+          </a:p>
+        </p:txBody>
+      </p:sp>
+      <p:sp>
+        <p:nvSpPr>
+          <p:cNvPr id="27" name="TextBox 26"/>
+          <p:cNvSpPr txBox="1"/>
+          <p:nvPr/>
+        </p:nvSpPr>
+        <p:spPr>
+          <a:xfrm>
+            <a:off x="8503920" y="5212080"/>
+            <a:ext cx="2926080" cy="914400"/>
+          </a:xfrm>
+          <a:prstGeom prst="rect">
+            <a:avLst/>
+          </a:prstGeom>
+          <a:noFill/>
+        </p:spPr>
+        <p:txBody>
+          <a:bodyPr wrap="square">
+            <a:spAutoFit/>
+          </a:bodyPr>
+          <a:lstStyle/>
+          <a:p>
+            <a:pPr algn="l">
+              <a:defRPr sz="1300" b="0">
+                <a:solidFill>
+                  <a:srgbClr val="8B949E"/>
+                </a:solidFill>
+              </a:defRPr>
+            </a:pPr>
+            <a:r>
+              <a:t>QUINTE 五方对抗审查</a:t>
+            </a:r>
+            <a:br/>
+            <a:r>
+              <a:t>5 个 AI 互相挑刺，消除盲区</a:t>
+            </a:r>
+          </a:p>
+        </p:txBody>
+      </p:sp>
+      <p:sp>
+        <p:nvSpPr>
+          <p:cNvPr id="28" name="TextBox 27"/>
           <p:cNvSpPr txBox="1"/>
           <p:nvPr/>
         </p:nvSpPr>
@@ -10366,7 +8659,7 @@
       </p:sp>
       <p:sp>
         <p:nvSpPr>
-          <p:cNvPr id="24" name="TextBox 23"/>
+          <p:cNvPr id="29" name="TextBox 28"/>
           <p:cNvSpPr txBox="1"/>
           <p:nvPr/>
         </p:nvSpPr>
@@ -10444,7 +8737,7 @@
           </a:solidFill>
           <a:ln w="12700">
             <a:solidFill>
-              <a:srgbClr val="19D3C5"/>
+              <a:srgbClr val="F7D74D"/>
             </a:solidFill>
           </a:ln>
         </p:spPr>
@@ -10469,12 +8762,12 @@
             <a:pPr algn="ctr">
               <a:defRPr sz="1000" b="1">
                 <a:solidFill>
-                  <a:srgbClr val="19D3C5"/>
-                </a:solidFill>
-              </a:defRPr>
-            </a:pPr>
-            <a:r>
-              <a:t>TECH STACK</a:t>
+                  <a:srgbClr val="F7D74D"/>
+                </a:solidFill>
+              </a:defRPr>
+            </a:pPr>
+            <a:r>
+              <a:t>SCORE</a:t>
             </a:r>
           </a:p>
         </p:txBody>
@@ -10509,7 +8802,7 @@
               </a:defRPr>
             </a:pPr>
             <a:r>
-              <a:t>技术架构：全栈 TypeScript，云端部署</a:t>
+              <a:t>评分预估：88-96 / 105 + 3 加分</a:t>
             </a:r>
           </a:p>
         </p:txBody>
@@ -10523,7 +8816,7 @@
         <p:spPr>
           <a:xfrm>
             <a:off x="731520" y="2194560"/>
-            <a:ext cx="3474720" cy="1920240"/>
+            <a:ext cx="10698480" cy="457200"/>
           </a:xfrm>
           <a:prstGeom prst="roundRect">
             <a:avLst/>
@@ -10566,13 +8859,13 @@
         <p:spPr>
           <a:xfrm>
             <a:off x="868680" y="2194560"/>
-            <a:ext cx="3200400" cy="36576"/>
+            <a:ext cx="10424159" cy="36576"/>
           </a:xfrm>
           <a:prstGeom prst="rect">
             <a:avLst/>
           </a:prstGeom>
           <a:solidFill>
-            <a:srgbClr val="4AA3FF"/>
+            <a:srgbClr val="8B949E"/>
           </a:solidFill>
           <a:ln>
             <a:noFill/>
@@ -10608,8 +8901,8 @@
         </p:nvSpPr>
         <p:spPr>
           <a:xfrm>
-            <a:off x="1005840" y="2468879"/>
-            <a:ext cx="2926080" cy="365760"/>
+            <a:off x="1005840" y="2240280"/>
+            <a:ext cx="3200400" cy="365760"/>
           </a:xfrm>
           <a:prstGeom prst="rect">
             <a:avLst/>
@@ -10623,14 +8916,14 @@
           <a:lstStyle/>
           <a:p>
             <a:pPr algn="l">
-              <a:defRPr sz="1600" b="1">
-                <a:solidFill>
-                  <a:srgbClr val="4AA3FF"/>
-                </a:solidFill>
-              </a:defRPr>
-            </a:pPr>
-            <a:r>
-              <a:t>前端</a:t>
+              <a:defRPr sz="1200" b="1">
+                <a:solidFill>
+                  <a:srgbClr val="8B949E"/>
+                </a:solidFill>
+              </a:defRPr>
+            </a:pPr>
+            <a:r>
+              <a:t>维度</a:t>
             </a:r>
           </a:p>
         </p:txBody>
@@ -10643,8 +8936,78 @@
         </p:nvSpPr>
         <p:spPr>
           <a:xfrm>
-            <a:off x="1005840" y="2926080"/>
-            <a:ext cx="2926080" cy="914400"/>
+            <a:off x="4572000" y="2240280"/>
+            <a:ext cx="1371600" cy="365760"/>
+          </a:xfrm>
+          <a:prstGeom prst="rect">
+            <a:avLst/>
+          </a:prstGeom>
+          <a:noFill/>
+        </p:spPr>
+        <p:txBody>
+          <a:bodyPr wrap="square">
+            <a:spAutoFit/>
+          </a:bodyPr>
+          <a:lstStyle/>
+          <a:p>
+            <a:pPr algn="ctr">
+              <a:defRPr sz="1200" b="1">
+                <a:solidFill>
+                  <a:srgbClr val="8B949E"/>
+                </a:solidFill>
+              </a:defRPr>
+            </a:pPr>
+            <a:r>
+              <a:t>满分</a:t>
+            </a:r>
+          </a:p>
+        </p:txBody>
+      </p:sp>
+      <p:sp>
+        <p:nvSpPr>
+          <p:cNvPr id="8" name="TextBox 7"/>
+          <p:cNvSpPr txBox="1"/>
+          <p:nvPr/>
+        </p:nvSpPr>
+        <p:spPr>
+          <a:xfrm>
+            <a:off x="6400800" y="2240280"/>
+            <a:ext cx="1371600" cy="365760"/>
+          </a:xfrm>
+          <a:prstGeom prst="rect">
+            <a:avLst/>
+          </a:prstGeom>
+          <a:noFill/>
+        </p:spPr>
+        <p:txBody>
+          <a:bodyPr wrap="square">
+            <a:spAutoFit/>
+          </a:bodyPr>
+          <a:lstStyle/>
+          <a:p>
+            <a:pPr algn="ctr">
+              <a:defRPr sz="1200" b="1">
+                <a:solidFill>
+                  <a:srgbClr val="8B949E"/>
+                </a:solidFill>
+              </a:defRPr>
+            </a:pPr>
+            <a:r>
+              <a:t>预估</a:t>
+            </a:r>
+          </a:p>
+        </p:txBody>
+      </p:sp>
+      <p:sp>
+        <p:nvSpPr>
+          <p:cNvPr id="9" name="TextBox 8"/>
+          <p:cNvSpPr txBox="1"/>
+          <p:nvPr/>
+        </p:nvSpPr>
+        <p:spPr>
+          <a:xfrm>
+            <a:off x="8229600" y="2240280"/>
+            <a:ext cx="3200400" cy="365760"/>
           </a:xfrm>
           <a:prstGeom prst="rect">
             <a:avLst/>
@@ -10658,32 +9021,28 @@
           <a:lstStyle/>
           <a:p>
             <a:pPr algn="l">
-              <a:defRPr sz="1300" b="0">
+              <a:defRPr sz="1200" b="1">
                 <a:solidFill>
                   <a:srgbClr val="8B949E"/>
                 </a:solidFill>
               </a:defRPr>
             </a:pPr>
             <a:r>
-              <a:t>Next.js 14 · Tailwind CSS · Recharts</a:t>
-            </a:r>
-            <a:br/>
-            <a:r>
-              <a:t>响应式设计 · 深色主题 · KPI 仪表盘</a:t>
-            </a:r>
-          </a:p>
-        </p:txBody>
-      </p:sp>
-      <p:sp>
-        <p:nvSpPr>
-          <p:cNvPr id="8" name="Rounded Rectangle 7"/>
+              <a:t>依据</a:t>
+            </a:r>
+          </a:p>
+        </p:txBody>
+      </p:sp>
+      <p:sp>
+        <p:nvSpPr>
+          <p:cNvPr id="10" name="Rounded Rectangle 9"/>
           <p:cNvSpPr/>
           <p:nvPr/>
         </p:nvSpPr>
         <p:spPr>
           <a:xfrm>
-            <a:off x="4480559" y="2194560"/>
-            <a:ext cx="3474720" cy="1920240"/>
+            <a:off x="731520" y="2788920"/>
+            <a:ext cx="10698480" cy="502920"/>
           </a:xfrm>
           <a:prstGeom prst="roundRect">
             <a:avLst/>
@@ -10719,20 +9078,20 @@
       </p:sp>
       <p:sp>
         <p:nvSpPr>
-          <p:cNvPr id="9" name="Rectangle 8"/>
+          <p:cNvPr id="11" name="Rectangle 10"/>
           <p:cNvSpPr/>
           <p:nvPr/>
         </p:nvSpPr>
         <p:spPr>
           <a:xfrm>
-            <a:off x="4617720" y="2194560"/>
-            <a:ext cx="3200400" cy="36576"/>
+            <a:off x="868680" y="2788920"/>
+            <a:ext cx="10424159" cy="36576"/>
           </a:xfrm>
           <a:prstGeom prst="rect">
             <a:avLst/>
           </a:prstGeom>
           <a:solidFill>
-            <a:srgbClr val="19D3C5"/>
+            <a:srgbClr val="8B949E"/>
           </a:solidFill>
           <a:ln>
             <a:noFill/>
@@ -10762,49 +9121,14 @@
       </p:sp>
       <p:sp>
         <p:nvSpPr>
-          <p:cNvPr id="10" name="TextBox 9"/>
-          <p:cNvSpPr txBox="1"/>
-          <p:nvPr/>
-        </p:nvSpPr>
-        <p:spPr>
-          <a:xfrm>
-            <a:off x="4754879" y="2468879"/>
-            <a:ext cx="2926080" cy="365760"/>
-          </a:xfrm>
-          <a:prstGeom prst="rect">
-            <a:avLst/>
-          </a:prstGeom>
-          <a:noFill/>
-        </p:spPr>
-        <p:txBody>
-          <a:bodyPr wrap="square">
-            <a:spAutoFit/>
-          </a:bodyPr>
-          <a:lstStyle/>
-          <a:p>
-            <a:pPr algn="l">
-              <a:defRPr sz="1600" b="1">
-                <a:solidFill>
-                  <a:srgbClr val="19D3C5"/>
-                </a:solidFill>
-              </a:defRPr>
-            </a:pPr>
-            <a:r>
-              <a:t>后端</a:t>
-            </a:r>
-          </a:p>
-        </p:txBody>
-      </p:sp>
-      <p:sp>
-        <p:nvSpPr>
-          <p:cNvPr id="11" name="TextBox 10"/>
-          <p:cNvSpPr txBox="1"/>
-          <p:nvPr/>
-        </p:nvSpPr>
-        <p:spPr>
-          <a:xfrm>
-            <a:off x="4754879" y="2926080"/>
-            <a:ext cx="2926080" cy="914400"/>
+          <p:cNvPr id="12" name="TextBox 11"/>
+          <p:cNvSpPr txBox="1"/>
+          <p:nvPr/>
+        </p:nvSpPr>
+        <p:spPr>
+          <a:xfrm>
+            <a:off x="1005840" y="2834640"/>
+            <a:ext cx="3200400" cy="365760"/>
           </a:xfrm>
           <a:prstGeom prst="rect">
             <a:avLst/>
@@ -10820,30 +9144,271 @@
             <a:pPr algn="l">
               <a:defRPr sz="1300" b="0">
                 <a:solidFill>
+                  <a:srgbClr val="FFFFFF"/>
+                </a:solidFill>
+              </a:defRPr>
+            </a:pPr>
+            <a:r>
+              <a:t>Demo 现场可用</a:t>
+            </a:r>
+          </a:p>
+        </p:txBody>
+      </p:sp>
+      <p:sp>
+        <p:nvSpPr>
+          <p:cNvPr id="13" name="TextBox 12"/>
+          <p:cNvSpPr txBox="1"/>
+          <p:nvPr/>
+        </p:nvSpPr>
+        <p:spPr>
+          <a:xfrm>
+            <a:off x="4572000" y="2834640"/>
+            <a:ext cx="1371600" cy="365760"/>
+          </a:xfrm>
+          <a:prstGeom prst="rect">
+            <a:avLst/>
+          </a:prstGeom>
+          <a:noFill/>
+        </p:spPr>
+        <p:txBody>
+          <a:bodyPr wrap="square">
+            <a:spAutoFit/>
+          </a:bodyPr>
+          <a:lstStyle/>
+          <a:p>
+            <a:pPr algn="ctr">
+              <a:defRPr sz="1300" b="0">
+                <a:solidFill>
                   <a:srgbClr val="8B949E"/>
                 </a:solidFill>
               </a:defRPr>
             </a:pPr>
             <a:r>
-              <a:t>Next.js API Routes · better-sqlite3</a:t>
-            </a:r>
-            <a:br/>
-            <a:r>
-              <a:t>SQL AST 解析安全校验 · 自动 LIMIT</a:t>
-            </a:r>
-          </a:p>
-        </p:txBody>
-      </p:sp>
-      <p:sp>
-        <p:nvSpPr>
-          <p:cNvPr id="12" name="Rounded Rectangle 11"/>
+              <a:t>25</a:t>
+            </a:r>
+          </a:p>
+        </p:txBody>
+      </p:sp>
+      <p:sp>
+        <p:nvSpPr>
+          <p:cNvPr id="14" name="TextBox 13"/>
+          <p:cNvSpPr txBox="1"/>
+          <p:nvPr/>
+        </p:nvSpPr>
+        <p:spPr>
+          <a:xfrm>
+            <a:off x="6400800" y="2834640"/>
+            <a:ext cx="1371600" cy="365760"/>
+          </a:xfrm>
+          <a:prstGeom prst="rect">
+            <a:avLst/>
+          </a:prstGeom>
+          <a:noFill/>
+        </p:spPr>
+        <p:txBody>
+          <a:bodyPr wrap="square">
+            <a:spAutoFit/>
+          </a:bodyPr>
+          <a:lstStyle/>
+          <a:p>
+            <a:pPr algn="ctr">
+              <a:defRPr sz="1400" b="1">
+                <a:solidFill>
+                  <a:srgbClr val="4AA3FF"/>
+                </a:solidFill>
+              </a:defRPr>
+            </a:pPr>
+            <a:r>
+              <a:t>20-22</a:t>
+            </a:r>
+          </a:p>
+        </p:txBody>
+      </p:sp>
+      <p:sp>
+        <p:nvSpPr>
+          <p:cNvPr id="15" name="TextBox 14"/>
+          <p:cNvSpPr txBox="1"/>
+          <p:nvPr/>
+        </p:nvSpPr>
+        <p:spPr>
+          <a:xfrm>
+            <a:off x="8229600" y="2834640"/>
+            <a:ext cx="3200400" cy="365760"/>
+          </a:xfrm>
+          <a:prstGeom prst="rect">
+            <a:avLst/>
+          </a:prstGeom>
+          <a:noFill/>
+        </p:spPr>
+        <p:txBody>
+          <a:bodyPr wrap="square">
+            <a:spAutoFit/>
+          </a:bodyPr>
+          <a:lstStyle/>
+          <a:p>
+            <a:pPr algn="l">
+              <a:defRPr sz="1100" b="0">
+                <a:solidFill>
+                  <a:srgbClr val="8B949E"/>
+                </a:solidFill>
+              </a:defRPr>
+            </a:pPr>
+            <a:r>
+              <a:t>公网部署 + 缓存 + 流式进度</a:t>
+            </a:r>
+          </a:p>
+        </p:txBody>
+      </p:sp>
+      <p:sp>
+        <p:nvSpPr>
+          <p:cNvPr id="16" name="TextBox 15"/>
+          <p:cNvSpPr txBox="1"/>
+          <p:nvPr/>
+        </p:nvSpPr>
+        <p:spPr>
+          <a:xfrm>
+            <a:off x="1005840" y="3383280"/>
+            <a:ext cx="3200400" cy="365760"/>
+          </a:xfrm>
+          <a:prstGeom prst="rect">
+            <a:avLst/>
+          </a:prstGeom>
+          <a:noFill/>
+        </p:spPr>
+        <p:txBody>
+          <a:bodyPr wrap="square">
+            <a:spAutoFit/>
+          </a:bodyPr>
+          <a:lstStyle/>
+          <a:p>
+            <a:pPr algn="l">
+              <a:defRPr sz="1300" b="0">
+                <a:solidFill>
+                  <a:srgbClr val="FFFFFF"/>
+                </a:solidFill>
+              </a:defRPr>
+            </a:pPr>
+            <a:r>
+              <a:t>用户价值/PMF</a:t>
+            </a:r>
+          </a:p>
+        </p:txBody>
+      </p:sp>
+      <p:sp>
+        <p:nvSpPr>
+          <p:cNvPr id="17" name="TextBox 16"/>
+          <p:cNvSpPr txBox="1"/>
+          <p:nvPr/>
+        </p:nvSpPr>
+        <p:spPr>
+          <a:xfrm>
+            <a:off x="4572000" y="3383280"/>
+            <a:ext cx="1371600" cy="365760"/>
+          </a:xfrm>
+          <a:prstGeom prst="rect">
+            <a:avLst/>
+          </a:prstGeom>
+          <a:noFill/>
+        </p:spPr>
+        <p:txBody>
+          <a:bodyPr wrap="square">
+            <a:spAutoFit/>
+          </a:bodyPr>
+          <a:lstStyle/>
+          <a:p>
+            <a:pPr algn="ctr">
+              <a:defRPr sz="1300" b="0">
+                <a:solidFill>
+                  <a:srgbClr val="8B949E"/>
+                </a:solidFill>
+              </a:defRPr>
+            </a:pPr>
+            <a:r>
+              <a:t>20</a:t>
+            </a:r>
+          </a:p>
+        </p:txBody>
+      </p:sp>
+      <p:sp>
+        <p:nvSpPr>
+          <p:cNvPr id="18" name="TextBox 17"/>
+          <p:cNvSpPr txBox="1"/>
+          <p:nvPr/>
+        </p:nvSpPr>
+        <p:spPr>
+          <a:xfrm>
+            <a:off x="6400800" y="3383280"/>
+            <a:ext cx="1371600" cy="365760"/>
+          </a:xfrm>
+          <a:prstGeom prst="rect">
+            <a:avLst/>
+          </a:prstGeom>
+          <a:noFill/>
+        </p:spPr>
+        <p:txBody>
+          <a:bodyPr wrap="square">
+            <a:spAutoFit/>
+          </a:bodyPr>
+          <a:lstStyle/>
+          <a:p>
+            <a:pPr algn="ctr">
+              <a:defRPr sz="1400" b="1">
+                <a:solidFill>
+                  <a:srgbClr val="19D3C5"/>
+                </a:solidFill>
+              </a:defRPr>
+            </a:pPr>
+            <a:r>
+              <a:t>16-18</a:t>
+            </a:r>
+          </a:p>
+        </p:txBody>
+      </p:sp>
+      <p:sp>
+        <p:nvSpPr>
+          <p:cNvPr id="19" name="TextBox 18"/>
+          <p:cNvSpPr txBox="1"/>
+          <p:nvPr/>
+        </p:nvSpPr>
+        <p:spPr>
+          <a:xfrm>
+            <a:off x="8229600" y="3383280"/>
+            <a:ext cx="3200400" cy="365760"/>
+          </a:xfrm>
+          <a:prstGeom prst="rect">
+            <a:avLst/>
+          </a:prstGeom>
+          <a:noFill/>
+        </p:spPr>
+        <p:txBody>
+          <a:bodyPr wrap="square">
+            <a:spAutoFit/>
+          </a:bodyPr>
+          <a:lstStyle/>
+          <a:p>
+            <a:pPr algn="l">
+              <a:defRPr sz="1100" b="0">
+                <a:solidFill>
+                  <a:srgbClr val="8B949E"/>
+                </a:solidFill>
+              </a:defRPr>
+            </a:pPr>
+            <a:r>
+              <a:t>分析师 → 业务自助取数</a:t>
+            </a:r>
+          </a:p>
+        </p:txBody>
+      </p:sp>
+      <p:sp>
+        <p:nvSpPr>
+          <p:cNvPr id="20" name="Rounded Rectangle 19"/>
           <p:cNvSpPr/>
           <p:nvPr/>
         </p:nvSpPr>
         <p:spPr>
           <a:xfrm>
-            <a:off x="8229600" y="2194560"/>
-            <a:ext cx="3474720" cy="1920240"/>
+            <a:off x="731520" y="3886200"/>
+            <a:ext cx="10698480" cy="502920"/>
           </a:xfrm>
           <a:prstGeom prst="roundRect">
             <a:avLst/>
@@ -10879,14 +9444,746 @@
       </p:sp>
       <p:sp>
         <p:nvSpPr>
-          <p:cNvPr id="13" name="Rectangle 12"/>
+          <p:cNvPr id="21" name="Rectangle 20"/>
           <p:cNvSpPr/>
           <p:nvPr/>
         </p:nvSpPr>
         <p:spPr>
           <a:xfrm>
-            <a:off x="8366760" y="2194560"/>
-            <a:ext cx="3200400" cy="36576"/>
+            <a:off x="868680" y="3886200"/>
+            <a:ext cx="10424159" cy="36576"/>
+          </a:xfrm>
+          <a:prstGeom prst="rect">
+            <a:avLst/>
+          </a:prstGeom>
+          <a:solidFill>
+            <a:srgbClr val="8B949E"/>
+          </a:solidFill>
+          <a:ln>
+            <a:noFill/>
+          </a:ln>
+        </p:spPr>
+        <p:style>
+          <a:lnRef idx="1">
+            <a:schemeClr val="accent1"/>
+          </a:lnRef>
+          <a:fillRef idx="3">
+            <a:schemeClr val="accent1"/>
+          </a:fillRef>
+          <a:effectRef idx="2">
+            <a:schemeClr val="accent1"/>
+          </a:effectRef>
+          <a:fontRef idx="minor">
+            <a:schemeClr val="lt1"/>
+          </a:fontRef>
+        </p:style>
+        <p:txBody>
+          <a:bodyPr rtlCol="0" anchor="ctr"/>
+          <a:lstStyle/>
+          <a:p>
+            <a:pPr algn="ctr"/>
+          </a:p>
+        </p:txBody>
+      </p:sp>
+      <p:sp>
+        <p:nvSpPr>
+          <p:cNvPr id="22" name="TextBox 21"/>
+          <p:cNvSpPr txBox="1"/>
+          <p:nvPr/>
+        </p:nvSpPr>
+        <p:spPr>
+          <a:xfrm>
+            <a:off x="1005840" y="3931920"/>
+            <a:ext cx="3200400" cy="365760"/>
+          </a:xfrm>
+          <a:prstGeom prst="rect">
+            <a:avLst/>
+          </a:prstGeom>
+          <a:noFill/>
+        </p:spPr>
+        <p:txBody>
+          <a:bodyPr wrap="square">
+            <a:spAutoFit/>
+          </a:bodyPr>
+          <a:lstStyle/>
+          <a:p>
+            <a:pPr algn="l">
+              <a:defRPr sz="1300" b="0">
+                <a:solidFill>
+                  <a:srgbClr val="FFFFFF"/>
+                </a:solidFill>
+              </a:defRPr>
+            </a:pPr>
+            <a:r>
+              <a:t>技术实现</a:t>
+            </a:r>
+          </a:p>
+        </p:txBody>
+      </p:sp>
+      <p:sp>
+        <p:nvSpPr>
+          <p:cNvPr id="23" name="TextBox 22"/>
+          <p:cNvSpPr txBox="1"/>
+          <p:nvPr/>
+        </p:nvSpPr>
+        <p:spPr>
+          <a:xfrm>
+            <a:off x="4572000" y="3931920"/>
+            <a:ext cx="1371600" cy="365760"/>
+          </a:xfrm>
+          <a:prstGeom prst="rect">
+            <a:avLst/>
+          </a:prstGeom>
+          <a:noFill/>
+        </p:spPr>
+        <p:txBody>
+          <a:bodyPr wrap="square">
+            <a:spAutoFit/>
+          </a:bodyPr>
+          <a:lstStyle/>
+          <a:p>
+            <a:pPr algn="ctr">
+              <a:defRPr sz="1300" b="0">
+                <a:solidFill>
+                  <a:srgbClr val="8B949E"/>
+                </a:solidFill>
+              </a:defRPr>
+            </a:pPr>
+            <a:r>
+              <a:t>20</a:t>
+            </a:r>
+          </a:p>
+        </p:txBody>
+      </p:sp>
+      <p:sp>
+        <p:nvSpPr>
+          <p:cNvPr id="24" name="TextBox 23"/>
+          <p:cNvSpPr txBox="1"/>
+          <p:nvPr/>
+        </p:nvSpPr>
+        <p:spPr>
+          <a:xfrm>
+            <a:off x="6400800" y="3931920"/>
+            <a:ext cx="1371600" cy="365760"/>
+          </a:xfrm>
+          <a:prstGeom prst="rect">
+            <a:avLst/>
+          </a:prstGeom>
+          <a:noFill/>
+        </p:spPr>
+        <p:txBody>
+          <a:bodyPr wrap="square">
+            <a:spAutoFit/>
+          </a:bodyPr>
+          <a:lstStyle/>
+          <a:p>
+            <a:pPr algn="ctr">
+              <a:defRPr sz="1400" b="1">
+                <a:solidFill>
+                  <a:srgbClr val="1A7F37"/>
+                </a:solidFill>
+              </a:defRPr>
+            </a:pPr>
+            <a:r>
+              <a:t>16-18</a:t>
+            </a:r>
+          </a:p>
+        </p:txBody>
+      </p:sp>
+      <p:sp>
+        <p:nvSpPr>
+          <p:cNvPr id="25" name="TextBox 24"/>
+          <p:cNvSpPr txBox="1"/>
+          <p:nvPr/>
+        </p:nvSpPr>
+        <p:spPr>
+          <a:xfrm>
+            <a:off x="8229600" y="3931920"/>
+            <a:ext cx="3200400" cy="365760"/>
+          </a:xfrm>
+          <a:prstGeom prst="rect">
+            <a:avLst/>
+          </a:prstGeom>
+          <a:noFill/>
+        </p:spPr>
+        <p:txBody>
+          <a:bodyPr wrap="square">
+            <a:spAutoFit/>
+          </a:bodyPr>
+          <a:lstStyle/>
+          <a:p>
+            <a:pPr algn="l">
+              <a:defRPr sz="1100" b="0">
+                <a:solidFill>
+                  <a:srgbClr val="8B949E"/>
+                </a:solidFill>
+              </a:defRPr>
+            </a:pPr>
+            <a:r>
+              <a:t>AI SDK + AST 校验 + 自纠正</a:t>
+            </a:r>
+          </a:p>
+        </p:txBody>
+      </p:sp>
+      <p:sp>
+        <p:nvSpPr>
+          <p:cNvPr id="26" name="TextBox 25"/>
+          <p:cNvSpPr txBox="1"/>
+          <p:nvPr/>
+        </p:nvSpPr>
+        <p:spPr>
+          <a:xfrm>
+            <a:off x="1005840" y="4480560"/>
+            <a:ext cx="3200400" cy="365760"/>
+          </a:xfrm>
+          <a:prstGeom prst="rect">
+            <a:avLst/>
+          </a:prstGeom>
+          <a:noFill/>
+        </p:spPr>
+        <p:txBody>
+          <a:bodyPr wrap="square">
+            <a:spAutoFit/>
+          </a:bodyPr>
+          <a:lstStyle/>
+          <a:p>
+            <a:pPr algn="l">
+              <a:defRPr sz="1300" b="0">
+                <a:solidFill>
+                  <a:srgbClr val="FFFFFF"/>
+                </a:solidFill>
+              </a:defRPr>
+            </a:pPr>
+            <a:r>
+              <a:t>创新性</a:t>
+            </a:r>
+          </a:p>
+        </p:txBody>
+      </p:sp>
+      <p:sp>
+        <p:nvSpPr>
+          <p:cNvPr id="27" name="TextBox 26"/>
+          <p:cNvSpPr txBox="1"/>
+          <p:nvPr/>
+        </p:nvSpPr>
+        <p:spPr>
+          <a:xfrm>
+            <a:off x="4572000" y="4480560"/>
+            <a:ext cx="1371600" cy="365760"/>
+          </a:xfrm>
+          <a:prstGeom prst="rect">
+            <a:avLst/>
+          </a:prstGeom>
+          <a:noFill/>
+        </p:spPr>
+        <p:txBody>
+          <a:bodyPr wrap="square">
+            <a:spAutoFit/>
+          </a:bodyPr>
+          <a:lstStyle/>
+          <a:p>
+            <a:pPr algn="ctr">
+              <a:defRPr sz="1300" b="0">
+                <a:solidFill>
+                  <a:srgbClr val="8B949E"/>
+                </a:solidFill>
+              </a:defRPr>
+            </a:pPr>
+            <a:r>
+              <a:t>15</a:t>
+            </a:r>
+          </a:p>
+        </p:txBody>
+      </p:sp>
+      <p:sp>
+        <p:nvSpPr>
+          <p:cNvPr id="28" name="TextBox 27"/>
+          <p:cNvSpPr txBox="1"/>
+          <p:nvPr/>
+        </p:nvSpPr>
+        <p:spPr>
+          <a:xfrm>
+            <a:off x="6400800" y="4480560"/>
+            <a:ext cx="1371600" cy="365760"/>
+          </a:xfrm>
+          <a:prstGeom prst="rect">
+            <a:avLst/>
+          </a:prstGeom>
+          <a:noFill/>
+        </p:spPr>
+        <p:txBody>
+          <a:bodyPr wrap="square">
+            <a:spAutoFit/>
+          </a:bodyPr>
+          <a:lstStyle/>
+          <a:p>
+            <a:pPr algn="ctr">
+              <a:defRPr sz="1400" b="1">
+                <a:solidFill>
+                  <a:srgbClr val="F7D74D"/>
+                </a:solidFill>
+              </a:defRPr>
+            </a:pPr>
+            <a:r>
+              <a:t>11-13</a:t>
+            </a:r>
+          </a:p>
+        </p:txBody>
+      </p:sp>
+      <p:sp>
+        <p:nvSpPr>
+          <p:cNvPr id="29" name="TextBox 28"/>
+          <p:cNvSpPr txBox="1"/>
+          <p:nvPr/>
+        </p:nvSpPr>
+        <p:spPr>
+          <a:xfrm>
+            <a:off x="8229600" y="4480560"/>
+            <a:ext cx="3200400" cy="365760"/>
+          </a:xfrm>
+          <a:prstGeom prst="rect">
+            <a:avLst/>
+          </a:prstGeom>
+          <a:noFill/>
+        </p:spPr>
+        <p:txBody>
+          <a:bodyPr wrap="square">
+            <a:spAutoFit/>
+          </a:bodyPr>
+          <a:lstStyle/>
+          <a:p>
+            <a:pPr algn="l">
+              <a:defRPr sz="1100" b="0">
+                <a:solidFill>
+                  <a:srgbClr val="8B949E"/>
+                </a:solidFill>
+              </a:defRPr>
+            </a:pPr>
+            <a:r>
+              <a:t>自纠正循环 + 对抗审查</a:t>
+            </a:r>
+          </a:p>
+        </p:txBody>
+      </p:sp>
+      <p:sp>
+        <p:nvSpPr>
+          <p:cNvPr id="30" name="Rounded Rectangle 29"/>
+          <p:cNvSpPr/>
+          <p:nvPr/>
+        </p:nvSpPr>
+        <p:spPr>
+          <a:xfrm>
+            <a:off x="731520" y="4983480"/>
+            <a:ext cx="10698480" cy="502920"/>
+          </a:xfrm>
+          <a:prstGeom prst="roundRect">
+            <a:avLst/>
+          </a:prstGeom>
+          <a:solidFill>
+            <a:srgbClr val="141A25"/>
+          </a:solidFill>
+          <a:ln>
+            <a:noFill/>
+          </a:ln>
+        </p:spPr>
+        <p:style>
+          <a:lnRef idx="1">
+            <a:schemeClr val="accent1"/>
+          </a:lnRef>
+          <a:fillRef idx="3">
+            <a:schemeClr val="accent1"/>
+          </a:fillRef>
+          <a:effectRef idx="2">
+            <a:schemeClr val="accent1"/>
+          </a:effectRef>
+          <a:fontRef idx="minor">
+            <a:schemeClr val="lt1"/>
+          </a:fontRef>
+        </p:style>
+        <p:txBody>
+          <a:bodyPr rtlCol="0" anchor="ctr"/>
+          <a:lstStyle/>
+          <a:p>
+            <a:pPr algn="ctr"/>
+          </a:p>
+        </p:txBody>
+      </p:sp>
+      <p:sp>
+        <p:nvSpPr>
+          <p:cNvPr id="31" name="Rectangle 30"/>
+          <p:cNvSpPr/>
+          <p:nvPr/>
+        </p:nvSpPr>
+        <p:spPr>
+          <a:xfrm>
+            <a:off x="868680" y="4983480"/>
+            <a:ext cx="10424159" cy="36576"/>
+          </a:xfrm>
+          <a:prstGeom prst="rect">
+            <a:avLst/>
+          </a:prstGeom>
+          <a:solidFill>
+            <a:srgbClr val="8B949E"/>
+          </a:solidFill>
+          <a:ln>
+            <a:noFill/>
+          </a:ln>
+        </p:spPr>
+        <p:style>
+          <a:lnRef idx="1">
+            <a:schemeClr val="accent1"/>
+          </a:lnRef>
+          <a:fillRef idx="3">
+            <a:schemeClr val="accent1"/>
+          </a:fillRef>
+          <a:effectRef idx="2">
+            <a:schemeClr val="accent1"/>
+          </a:effectRef>
+          <a:fontRef idx="minor">
+            <a:schemeClr val="lt1"/>
+          </a:fontRef>
+        </p:style>
+        <p:txBody>
+          <a:bodyPr rtlCol="0" anchor="ctr"/>
+          <a:lstStyle/>
+          <a:p>
+            <a:pPr algn="ctr"/>
+          </a:p>
+        </p:txBody>
+      </p:sp>
+      <p:sp>
+        <p:nvSpPr>
+          <p:cNvPr id="32" name="TextBox 31"/>
+          <p:cNvSpPr txBox="1"/>
+          <p:nvPr/>
+        </p:nvSpPr>
+        <p:spPr>
+          <a:xfrm>
+            <a:off x="1005840" y="5029200"/>
+            <a:ext cx="3200400" cy="365760"/>
+          </a:xfrm>
+          <a:prstGeom prst="rect">
+            <a:avLst/>
+          </a:prstGeom>
+          <a:noFill/>
+        </p:spPr>
+        <p:txBody>
+          <a:bodyPr wrap="square">
+            <a:spAutoFit/>
+          </a:bodyPr>
+          <a:lstStyle/>
+          <a:p>
+            <a:pPr algn="l">
+              <a:defRPr sz="1300" b="0">
+                <a:solidFill>
+                  <a:srgbClr val="FFFFFF"/>
+                </a:solidFill>
+              </a:defRPr>
+            </a:pPr>
+            <a:r>
+              <a:t>商业潜力</a:t>
+            </a:r>
+          </a:p>
+        </p:txBody>
+      </p:sp>
+      <p:sp>
+        <p:nvSpPr>
+          <p:cNvPr id="33" name="TextBox 32"/>
+          <p:cNvSpPr txBox="1"/>
+          <p:nvPr/>
+        </p:nvSpPr>
+        <p:spPr>
+          <a:xfrm>
+            <a:off x="4572000" y="5029200"/>
+            <a:ext cx="1371600" cy="365760"/>
+          </a:xfrm>
+          <a:prstGeom prst="rect">
+            <a:avLst/>
+          </a:prstGeom>
+          <a:noFill/>
+        </p:spPr>
+        <p:txBody>
+          <a:bodyPr wrap="square">
+            <a:spAutoFit/>
+          </a:bodyPr>
+          <a:lstStyle/>
+          <a:p>
+            <a:pPr algn="ctr">
+              <a:defRPr sz="1300" b="0">
+                <a:solidFill>
+                  <a:srgbClr val="8B949E"/>
+                </a:solidFill>
+              </a:defRPr>
+            </a:pPr>
+            <a:r>
+              <a:t>10</a:t>
+            </a:r>
+          </a:p>
+        </p:txBody>
+      </p:sp>
+      <p:sp>
+        <p:nvSpPr>
+          <p:cNvPr id="34" name="TextBox 33"/>
+          <p:cNvSpPr txBox="1"/>
+          <p:nvPr/>
+        </p:nvSpPr>
+        <p:spPr>
+          <a:xfrm>
+            <a:off x="6400800" y="5029200"/>
+            <a:ext cx="1371600" cy="365760"/>
+          </a:xfrm>
+          <a:prstGeom prst="rect">
+            <a:avLst/>
+          </a:prstGeom>
+          <a:noFill/>
+        </p:spPr>
+        <p:txBody>
+          <a:bodyPr wrap="square">
+            <a:spAutoFit/>
+          </a:bodyPr>
+          <a:lstStyle/>
+          <a:p>
+            <a:pPr algn="ctr">
+              <a:defRPr sz="1400" b="1">
+                <a:solidFill>
+                  <a:srgbClr val="FF657A"/>
+                </a:solidFill>
+              </a:defRPr>
+            </a:pPr>
+            <a:r>
+              <a:t>7-8</a:t>
+            </a:r>
+          </a:p>
+        </p:txBody>
+      </p:sp>
+      <p:sp>
+        <p:nvSpPr>
+          <p:cNvPr id="35" name="TextBox 34"/>
+          <p:cNvSpPr txBox="1"/>
+          <p:nvPr/>
+        </p:nvSpPr>
+        <p:spPr>
+          <a:xfrm>
+            <a:off x="8229600" y="5029200"/>
+            <a:ext cx="3200400" cy="365760"/>
+          </a:xfrm>
+          <a:prstGeom prst="rect">
+            <a:avLst/>
+          </a:prstGeom>
+          <a:noFill/>
+        </p:spPr>
+        <p:txBody>
+          <a:bodyPr wrap="square">
+            <a:spAutoFit/>
+          </a:bodyPr>
+          <a:lstStyle/>
+          <a:p>
+            <a:pPr algn="l">
+              <a:defRPr sz="1100" b="0">
+                <a:solidFill>
+                  <a:srgbClr val="8B949E"/>
+                </a:solidFill>
+              </a:defRPr>
+            </a:pPr>
+            <a:r>
+              <a:t>SaaS 模式 + 真实数据</a:t>
+            </a:r>
+          </a:p>
+        </p:txBody>
+      </p:sp>
+      <p:sp>
+        <p:nvSpPr>
+          <p:cNvPr id="36" name="TextBox 35"/>
+          <p:cNvSpPr txBox="1"/>
+          <p:nvPr/>
+        </p:nvSpPr>
+        <p:spPr>
+          <a:xfrm>
+            <a:off x="1005840" y="5577840"/>
+            <a:ext cx="3200400" cy="365760"/>
+          </a:xfrm>
+          <a:prstGeom prst="rect">
+            <a:avLst/>
+          </a:prstGeom>
+          <a:noFill/>
+        </p:spPr>
+        <p:txBody>
+          <a:bodyPr wrap="square">
+            <a:spAutoFit/>
+          </a:bodyPr>
+          <a:lstStyle/>
+          <a:p>
+            <a:pPr algn="l">
+              <a:defRPr sz="1300" b="0">
+                <a:solidFill>
+                  <a:srgbClr val="FFFFFF"/>
+                </a:solidFill>
+              </a:defRPr>
+            </a:pPr>
+            <a:r>
+              <a:t>路演表达</a:t>
+            </a:r>
+          </a:p>
+        </p:txBody>
+      </p:sp>
+      <p:sp>
+        <p:nvSpPr>
+          <p:cNvPr id="37" name="TextBox 36"/>
+          <p:cNvSpPr txBox="1"/>
+          <p:nvPr/>
+        </p:nvSpPr>
+        <p:spPr>
+          <a:xfrm>
+            <a:off x="4572000" y="5577840"/>
+            <a:ext cx="1371600" cy="365760"/>
+          </a:xfrm>
+          <a:prstGeom prst="rect">
+            <a:avLst/>
+          </a:prstGeom>
+          <a:noFill/>
+        </p:spPr>
+        <p:txBody>
+          <a:bodyPr wrap="square">
+            <a:spAutoFit/>
+          </a:bodyPr>
+          <a:lstStyle/>
+          <a:p>
+            <a:pPr algn="ctr">
+              <a:defRPr sz="1300" b="0">
+                <a:solidFill>
+                  <a:srgbClr val="8B949E"/>
+                </a:solidFill>
+              </a:defRPr>
+            </a:pPr>
+            <a:r>
+              <a:t>10</a:t>
+            </a:r>
+          </a:p>
+        </p:txBody>
+      </p:sp>
+      <p:sp>
+        <p:nvSpPr>
+          <p:cNvPr id="38" name="TextBox 37"/>
+          <p:cNvSpPr txBox="1"/>
+          <p:nvPr/>
+        </p:nvSpPr>
+        <p:spPr>
+          <a:xfrm>
+            <a:off x="6400800" y="5577840"/>
+            <a:ext cx="1371600" cy="365760"/>
+          </a:xfrm>
+          <a:prstGeom prst="rect">
+            <a:avLst/>
+          </a:prstGeom>
+          <a:noFill/>
+        </p:spPr>
+        <p:txBody>
+          <a:bodyPr wrap="square">
+            <a:spAutoFit/>
+          </a:bodyPr>
+          <a:lstStyle/>
+          <a:p>
+            <a:pPr algn="ctr">
+              <a:defRPr sz="1400" b="1">
+                <a:solidFill>
+                  <a:srgbClr val="4AA3FF"/>
+                </a:solidFill>
+              </a:defRPr>
+            </a:pPr>
+            <a:r>
+              <a:t>8-9</a:t>
+            </a:r>
+          </a:p>
+        </p:txBody>
+      </p:sp>
+      <p:sp>
+        <p:nvSpPr>
+          <p:cNvPr id="39" name="TextBox 38"/>
+          <p:cNvSpPr txBox="1"/>
+          <p:nvPr/>
+        </p:nvSpPr>
+        <p:spPr>
+          <a:xfrm>
+            <a:off x="8229600" y="5577840"/>
+            <a:ext cx="3200400" cy="365760"/>
+          </a:xfrm>
+          <a:prstGeom prst="rect">
+            <a:avLst/>
+          </a:prstGeom>
+          <a:noFill/>
+        </p:spPr>
+        <p:txBody>
+          <a:bodyPr wrap="square">
+            <a:spAutoFit/>
+          </a:bodyPr>
+          <a:lstStyle/>
+          <a:p>
+            <a:pPr algn="l">
+              <a:defRPr sz="1100" b="0">
+                <a:solidFill>
+                  <a:srgbClr val="8B949E"/>
+                </a:solidFill>
+              </a:defRPr>
+            </a:pPr>
+            <a:r>
+              <a:t>故事线 + 排练</a:t>
+            </a:r>
+          </a:p>
+        </p:txBody>
+      </p:sp>
+      <p:sp>
+        <p:nvSpPr>
+          <p:cNvPr id="40" name="Rounded Rectangle 39"/>
+          <p:cNvSpPr/>
+          <p:nvPr/>
+        </p:nvSpPr>
+        <p:spPr>
+          <a:xfrm>
+            <a:off x="731520" y="6217920"/>
+            <a:ext cx="10698480" cy="365760"/>
+          </a:xfrm>
+          <a:prstGeom prst="roundRect">
+            <a:avLst/>
+          </a:prstGeom>
+          <a:solidFill>
+            <a:srgbClr val="141A25"/>
+          </a:solidFill>
+          <a:ln>
+            <a:noFill/>
+          </a:ln>
+        </p:spPr>
+        <p:style>
+          <a:lnRef idx="1">
+            <a:schemeClr val="accent1"/>
+          </a:lnRef>
+          <a:fillRef idx="3">
+            <a:schemeClr val="accent1"/>
+          </a:fillRef>
+          <a:effectRef idx="2">
+            <a:schemeClr val="accent1"/>
+          </a:effectRef>
+          <a:fontRef idx="minor">
+            <a:schemeClr val="lt1"/>
+          </a:fontRef>
+        </p:style>
+        <p:txBody>
+          <a:bodyPr rtlCol="0" anchor="ctr"/>
+          <a:lstStyle/>
+          <a:p>
+            <a:pPr algn="ctr"/>
+          </a:p>
+        </p:txBody>
+      </p:sp>
+      <p:sp>
+        <p:nvSpPr>
+          <p:cNvPr id="41" name="Rectangle 40"/>
+          <p:cNvSpPr/>
+          <p:nvPr/>
+        </p:nvSpPr>
+        <p:spPr>
+          <a:xfrm>
+            <a:off x="868680" y="6217920"/>
+            <a:ext cx="10424159" cy="36576"/>
           </a:xfrm>
           <a:prstGeom prst="rect">
             <a:avLst/>
@@ -10922,561 +10219,42 @@
       </p:sp>
       <p:sp>
         <p:nvSpPr>
-          <p:cNvPr id="14" name="TextBox 13"/>
-          <p:cNvSpPr txBox="1"/>
-          <p:nvPr/>
-        </p:nvSpPr>
-        <p:spPr>
-          <a:xfrm>
-            <a:off x="8503920" y="2468879"/>
-            <a:ext cx="2926080" cy="365760"/>
-          </a:xfrm>
-          <a:prstGeom prst="rect">
-            <a:avLst/>
-          </a:prstGeom>
-          <a:noFill/>
-        </p:spPr>
-        <p:txBody>
-          <a:bodyPr wrap="square">
-            <a:spAutoFit/>
-          </a:bodyPr>
-          <a:lstStyle/>
-          <a:p>
-            <a:pPr algn="l">
-              <a:defRPr sz="1600" b="1">
-                <a:solidFill>
-                  <a:srgbClr val="F7D74D"/>
-                </a:solidFill>
-              </a:defRPr>
-            </a:pPr>
-            <a:r>
-              <a:t>AI 引擎</a:t>
-            </a:r>
-          </a:p>
-        </p:txBody>
-      </p:sp>
-      <p:sp>
-        <p:nvSpPr>
-          <p:cNvPr id="15" name="TextBox 14"/>
-          <p:cNvSpPr txBox="1"/>
-          <p:nvPr/>
-        </p:nvSpPr>
-        <p:spPr>
-          <a:xfrm>
-            <a:off x="8503920" y="2926080"/>
-            <a:ext cx="2926080" cy="914400"/>
-          </a:xfrm>
-          <a:prstGeom prst="rect">
-            <a:avLst/>
-          </a:prstGeom>
-          <a:noFill/>
-        </p:spPr>
-        <p:txBody>
-          <a:bodyPr wrap="square">
-            <a:spAutoFit/>
-          </a:bodyPr>
-          <a:lstStyle/>
-          <a:p>
-            <a:pPr algn="l">
-              <a:defRPr sz="1300" b="0">
-                <a:solidFill>
-                  <a:srgbClr val="8B949E"/>
-                </a:solidFill>
-              </a:defRPr>
-            </a:pPr>
-            <a:r>
-              <a:t>MiMo v2.5 Pro（小米自研）</a:t>
-            </a:r>
-            <a:br/>
-            <a:r>
-              <a:t>Vercel AI SDK · 自纠正循环</a:t>
-            </a:r>
-          </a:p>
-        </p:txBody>
-      </p:sp>
-      <p:sp>
-        <p:nvSpPr>
-          <p:cNvPr id="16" name="Rounded Rectangle 15"/>
-          <p:cNvSpPr/>
-          <p:nvPr/>
-        </p:nvSpPr>
-        <p:spPr>
-          <a:xfrm>
-            <a:off x="731520" y="4480560"/>
-            <a:ext cx="3474720" cy="1920240"/>
-          </a:xfrm>
-          <a:prstGeom prst="roundRect">
-            <a:avLst/>
-          </a:prstGeom>
-          <a:solidFill>
-            <a:srgbClr val="141A25"/>
-          </a:solidFill>
-          <a:ln>
-            <a:noFill/>
-          </a:ln>
-        </p:spPr>
-        <p:style>
-          <a:lnRef idx="1">
-            <a:schemeClr val="accent1"/>
-          </a:lnRef>
-          <a:fillRef idx="3">
-            <a:schemeClr val="accent1"/>
-          </a:fillRef>
-          <a:effectRef idx="2">
-            <a:schemeClr val="accent1"/>
-          </a:effectRef>
-          <a:fontRef idx="minor">
-            <a:schemeClr val="lt1"/>
-          </a:fontRef>
-        </p:style>
-        <p:txBody>
-          <a:bodyPr rtlCol="0" anchor="ctr"/>
-          <a:lstStyle/>
-          <a:p>
-            <a:pPr algn="ctr"/>
-          </a:p>
-        </p:txBody>
-      </p:sp>
-      <p:sp>
-        <p:nvSpPr>
-          <p:cNvPr id="17" name="Rectangle 16"/>
-          <p:cNvSpPr/>
-          <p:nvPr/>
-        </p:nvSpPr>
-        <p:spPr>
-          <a:xfrm>
-            <a:off x="868680" y="4480560"/>
-            <a:ext cx="3200400" cy="36576"/>
-          </a:xfrm>
-          <a:prstGeom prst="rect">
-            <a:avLst/>
-          </a:prstGeom>
-          <a:solidFill>
-            <a:srgbClr val="1A7F37"/>
-          </a:solidFill>
-          <a:ln>
-            <a:noFill/>
-          </a:ln>
-        </p:spPr>
-        <p:style>
-          <a:lnRef idx="1">
-            <a:schemeClr val="accent1"/>
-          </a:lnRef>
-          <a:fillRef idx="3">
-            <a:schemeClr val="accent1"/>
-          </a:fillRef>
-          <a:effectRef idx="2">
-            <a:schemeClr val="accent1"/>
-          </a:effectRef>
-          <a:fontRef idx="minor">
-            <a:schemeClr val="lt1"/>
-          </a:fontRef>
-        </p:style>
-        <p:txBody>
-          <a:bodyPr rtlCol="0" anchor="ctr"/>
-          <a:lstStyle/>
-          <a:p>
-            <a:pPr algn="ctr"/>
-          </a:p>
-        </p:txBody>
-      </p:sp>
-      <p:sp>
-        <p:nvSpPr>
-          <p:cNvPr id="18" name="TextBox 17"/>
-          <p:cNvSpPr txBox="1"/>
-          <p:nvPr/>
-        </p:nvSpPr>
-        <p:spPr>
-          <a:xfrm>
-            <a:off x="1005840" y="4754880"/>
-            <a:ext cx="2926080" cy="365760"/>
-          </a:xfrm>
-          <a:prstGeom prst="rect">
-            <a:avLst/>
-          </a:prstGeom>
-          <a:noFill/>
-        </p:spPr>
-        <p:txBody>
-          <a:bodyPr wrap="square">
-            <a:spAutoFit/>
-          </a:bodyPr>
-          <a:lstStyle/>
-          <a:p>
-            <a:pPr algn="l">
-              <a:defRPr sz="1600" b="1">
-                <a:solidFill>
-                  <a:srgbClr val="1A7F37"/>
-                </a:solidFill>
-              </a:defRPr>
-            </a:pPr>
-            <a:r>
-              <a:t>数据层</a:t>
-            </a:r>
-          </a:p>
-        </p:txBody>
-      </p:sp>
-      <p:sp>
-        <p:nvSpPr>
-          <p:cNvPr id="19" name="TextBox 18"/>
-          <p:cNvSpPr txBox="1"/>
-          <p:nvPr/>
-        </p:nvSpPr>
-        <p:spPr>
-          <a:xfrm>
-            <a:off x="1005840" y="5212080"/>
-            <a:ext cx="2926080" cy="914400"/>
-          </a:xfrm>
-          <a:prstGeom prst="rect">
-            <a:avLst/>
-          </a:prstGeom>
-          <a:noFill/>
-        </p:spPr>
-        <p:txBody>
-          <a:bodyPr wrap="square">
-            <a:spAutoFit/>
-          </a:bodyPr>
-          <a:lstStyle/>
-          <a:p>
-            <a:pPr algn="l">
-              <a:defRPr sz="1300" b="0">
-                <a:solidFill>
-                  <a:srgbClr val="8B949E"/>
-                </a:solidFill>
-              </a:defRPr>
-            </a:pPr>
-            <a:r>
-              <a:t>SQLite · 10K 订单 · 500 商品</a:t>
-            </a:r>
-            <a:br/>
-            <a:r>
-              <a:t>8 地区 · 20 品类 · 6 渠道</a:t>
-            </a:r>
-          </a:p>
-        </p:txBody>
-      </p:sp>
-      <p:sp>
-        <p:nvSpPr>
-          <p:cNvPr id="20" name="Rounded Rectangle 19"/>
-          <p:cNvSpPr/>
-          <p:nvPr/>
-        </p:nvSpPr>
-        <p:spPr>
-          <a:xfrm>
-            <a:off x="4480559" y="4480560"/>
-            <a:ext cx="3474720" cy="1920240"/>
-          </a:xfrm>
-          <a:prstGeom prst="roundRect">
-            <a:avLst/>
-          </a:prstGeom>
-          <a:solidFill>
-            <a:srgbClr val="141A25"/>
-          </a:solidFill>
-          <a:ln>
-            <a:noFill/>
-          </a:ln>
-        </p:spPr>
-        <p:style>
-          <a:lnRef idx="1">
-            <a:schemeClr val="accent1"/>
-          </a:lnRef>
-          <a:fillRef idx="3">
-            <a:schemeClr val="accent1"/>
-          </a:fillRef>
-          <a:effectRef idx="2">
-            <a:schemeClr val="accent1"/>
-          </a:effectRef>
-          <a:fontRef idx="minor">
-            <a:schemeClr val="lt1"/>
-          </a:fontRef>
-        </p:style>
-        <p:txBody>
-          <a:bodyPr rtlCol="0" anchor="ctr"/>
-          <a:lstStyle/>
-          <a:p>
-            <a:pPr algn="ctr"/>
-          </a:p>
-        </p:txBody>
-      </p:sp>
-      <p:sp>
-        <p:nvSpPr>
-          <p:cNvPr id="21" name="Rectangle 20"/>
-          <p:cNvSpPr/>
-          <p:nvPr/>
-        </p:nvSpPr>
-        <p:spPr>
-          <a:xfrm>
-            <a:off x="4617720" y="4480560"/>
-            <a:ext cx="3200400" cy="36576"/>
-          </a:xfrm>
-          <a:prstGeom prst="rect">
-            <a:avLst/>
-          </a:prstGeom>
-          <a:solidFill>
-            <a:srgbClr val="FF657A"/>
-          </a:solidFill>
-          <a:ln>
-            <a:noFill/>
-          </a:ln>
-        </p:spPr>
-        <p:style>
-          <a:lnRef idx="1">
-            <a:schemeClr val="accent1"/>
-          </a:lnRef>
-          <a:fillRef idx="3">
-            <a:schemeClr val="accent1"/>
-          </a:fillRef>
-          <a:effectRef idx="2">
-            <a:schemeClr val="accent1"/>
-          </a:effectRef>
-          <a:fontRef idx="minor">
-            <a:schemeClr val="lt1"/>
-          </a:fontRef>
-        </p:style>
-        <p:txBody>
-          <a:bodyPr rtlCol="0" anchor="ctr"/>
-          <a:lstStyle/>
-          <a:p>
-            <a:pPr algn="ctr"/>
-          </a:p>
-        </p:txBody>
-      </p:sp>
-      <p:sp>
-        <p:nvSpPr>
-          <p:cNvPr id="22" name="TextBox 21"/>
-          <p:cNvSpPr txBox="1"/>
-          <p:nvPr/>
-        </p:nvSpPr>
-        <p:spPr>
-          <a:xfrm>
-            <a:off x="4754879" y="4754880"/>
-            <a:ext cx="2926080" cy="365760"/>
-          </a:xfrm>
-          <a:prstGeom prst="rect">
-            <a:avLst/>
-          </a:prstGeom>
-          <a:noFill/>
-        </p:spPr>
-        <p:txBody>
-          <a:bodyPr wrap="square">
-            <a:spAutoFit/>
-          </a:bodyPr>
-          <a:lstStyle/>
-          <a:p>
-            <a:pPr algn="l">
-              <a:defRPr sz="1600" b="1">
-                <a:solidFill>
-                  <a:srgbClr val="FF657A"/>
-                </a:solidFill>
-              </a:defRPr>
-            </a:pPr>
-            <a:r>
-              <a:t>部署</a:t>
-            </a:r>
-          </a:p>
-        </p:txBody>
-      </p:sp>
-      <p:sp>
-        <p:nvSpPr>
-          <p:cNvPr id="23" name="TextBox 22"/>
-          <p:cNvSpPr txBox="1"/>
-          <p:nvPr/>
-        </p:nvSpPr>
-        <p:spPr>
-          <a:xfrm>
-            <a:off x="4754879" y="5212080"/>
-            <a:ext cx="2926080" cy="914400"/>
-          </a:xfrm>
-          <a:prstGeom prst="rect">
-            <a:avLst/>
-          </a:prstGeom>
-          <a:noFill/>
-        </p:spPr>
-        <p:txBody>
-          <a:bodyPr wrap="square">
-            <a:spAutoFit/>
-          </a:bodyPr>
-          <a:lstStyle/>
-          <a:p>
-            <a:pPr algn="l">
-              <a:defRPr sz="1300" b="0">
-                <a:solidFill>
-                  <a:srgbClr val="8B949E"/>
-                </a:solidFill>
-              </a:defRPr>
-            </a:pPr>
-            <a:r>
-              <a:t>Railway 云端 24/7 在线</a:t>
-            </a:r>
-            <a:br/>
-            <a:r>
-              <a:t>GitHub 代码评审 · 不依赖本机</a:t>
-            </a:r>
-          </a:p>
-        </p:txBody>
-      </p:sp>
-      <p:sp>
-        <p:nvSpPr>
-          <p:cNvPr id="24" name="Rounded Rectangle 23"/>
-          <p:cNvSpPr/>
-          <p:nvPr/>
-        </p:nvSpPr>
-        <p:spPr>
-          <a:xfrm>
-            <a:off x="8229600" y="4480560"/>
-            <a:ext cx="3474720" cy="1920240"/>
-          </a:xfrm>
-          <a:prstGeom prst="roundRect">
-            <a:avLst/>
-          </a:prstGeom>
-          <a:solidFill>
-            <a:srgbClr val="141A25"/>
-          </a:solidFill>
-          <a:ln>
-            <a:noFill/>
-          </a:ln>
-        </p:spPr>
-        <p:style>
-          <a:lnRef idx="1">
-            <a:schemeClr val="accent1"/>
-          </a:lnRef>
-          <a:fillRef idx="3">
-            <a:schemeClr val="accent1"/>
-          </a:fillRef>
-          <a:effectRef idx="2">
-            <a:schemeClr val="accent1"/>
-          </a:effectRef>
-          <a:fontRef idx="minor">
-            <a:schemeClr val="lt1"/>
-          </a:fontRef>
-        </p:style>
-        <p:txBody>
-          <a:bodyPr rtlCol="0" anchor="ctr"/>
-          <a:lstStyle/>
-          <a:p>
-            <a:pPr algn="ctr"/>
-          </a:p>
-        </p:txBody>
-      </p:sp>
-      <p:sp>
-        <p:nvSpPr>
-          <p:cNvPr id="25" name="Rectangle 24"/>
-          <p:cNvSpPr/>
-          <p:nvPr/>
-        </p:nvSpPr>
-        <p:spPr>
-          <a:xfrm>
-            <a:off x="8366760" y="4480560"/>
-            <a:ext cx="3200400" cy="36576"/>
-          </a:xfrm>
-          <a:prstGeom prst="rect">
-            <a:avLst/>
-          </a:prstGeom>
-          <a:solidFill>
-            <a:srgbClr val="4AA3FF"/>
-          </a:solidFill>
-          <a:ln>
-            <a:noFill/>
-          </a:ln>
-        </p:spPr>
-        <p:style>
-          <a:lnRef idx="1">
-            <a:schemeClr val="accent1"/>
-          </a:lnRef>
-          <a:fillRef idx="3">
-            <a:schemeClr val="accent1"/>
-          </a:fillRef>
-          <a:effectRef idx="2">
-            <a:schemeClr val="accent1"/>
-          </a:effectRef>
-          <a:fontRef idx="minor">
-            <a:schemeClr val="lt1"/>
-          </a:fontRef>
-        </p:style>
-        <p:txBody>
-          <a:bodyPr rtlCol="0" anchor="ctr"/>
-          <a:lstStyle/>
-          <a:p>
-            <a:pPr algn="ctr"/>
-          </a:p>
-        </p:txBody>
-      </p:sp>
-      <p:sp>
-        <p:nvSpPr>
-          <p:cNvPr id="26" name="TextBox 25"/>
-          <p:cNvSpPr txBox="1"/>
-          <p:nvPr/>
-        </p:nvSpPr>
-        <p:spPr>
-          <a:xfrm>
-            <a:off x="8503920" y="4754880"/>
-            <a:ext cx="2926080" cy="365760"/>
-          </a:xfrm>
-          <a:prstGeom prst="rect">
-            <a:avLst/>
-          </a:prstGeom>
-          <a:noFill/>
-        </p:spPr>
-        <p:txBody>
-          <a:bodyPr wrap="square">
-            <a:spAutoFit/>
-          </a:bodyPr>
-          <a:lstStyle/>
-          <a:p>
-            <a:pPr algn="l">
-              <a:defRPr sz="1600" b="1">
-                <a:solidFill>
-                  <a:srgbClr val="4AA3FF"/>
-                </a:solidFill>
-              </a:defRPr>
-            </a:pPr>
-            <a:r>
-              <a:t>审查</a:t>
-            </a:r>
-          </a:p>
-        </p:txBody>
-      </p:sp>
-      <p:sp>
-        <p:nvSpPr>
-          <p:cNvPr id="27" name="TextBox 26"/>
-          <p:cNvSpPr txBox="1"/>
-          <p:nvPr/>
-        </p:nvSpPr>
-        <p:spPr>
-          <a:xfrm>
-            <a:off x="8503920" y="5212080"/>
-            <a:ext cx="2926080" cy="914400"/>
-          </a:xfrm>
-          <a:prstGeom prst="rect">
-            <a:avLst/>
-          </a:prstGeom>
-          <a:noFill/>
-        </p:spPr>
-        <p:txBody>
-          <a:bodyPr wrap="square">
-            <a:spAutoFit/>
-          </a:bodyPr>
-          <a:lstStyle/>
-          <a:p>
-            <a:pPr algn="l">
-              <a:defRPr sz="1300" b="0">
-                <a:solidFill>
-                  <a:srgbClr val="8B949E"/>
-                </a:solidFill>
-              </a:defRPr>
-            </a:pPr>
-            <a:r>
-              <a:t>QUINTE 五方对抗协议</a:t>
-            </a:r>
-            <a:br/>
-            <a:r>
-              <a:t>3 轮 × 5 方 = 39 份独立审计报告</a:t>
-            </a:r>
-          </a:p>
-        </p:txBody>
-      </p:sp>
-      <p:sp>
-        <p:nvSpPr>
-          <p:cNvPr id="28" name="TextBox 27"/>
+          <p:cNvPr id="42" name="TextBox 41"/>
+          <p:cNvSpPr txBox="1"/>
+          <p:nvPr/>
+        </p:nvSpPr>
+        <p:spPr>
+          <a:xfrm>
+            <a:off x="1005840" y="6236208"/>
+            <a:ext cx="10058400" cy="320040"/>
+          </a:xfrm>
+          <a:prstGeom prst="rect">
+            <a:avLst/>
+          </a:prstGeom>
+          <a:noFill/>
+        </p:spPr>
+        <p:txBody>
+          <a:bodyPr wrap="square">
+            <a:spAutoFit/>
+          </a:bodyPr>
+          <a:lstStyle/>
+          <a:p>
+            <a:pPr algn="ctr">
+              <a:defRPr sz="1300" b="1">
+                <a:solidFill>
+                  <a:srgbClr val="FFFFFF"/>
+                </a:solidFill>
+              </a:defRPr>
+            </a:pPr>
+            <a:r>
+              <a:t>加分：ClawHunt 上架 +3    总计预估：91-101 / 105</a:t>
+            </a:r>
+          </a:p>
+        </p:txBody>
+      </p:sp>
+      <p:sp>
+        <p:nvSpPr>
+          <p:cNvPr id="43" name="TextBox 42"/>
           <p:cNvSpPr txBox="1"/>
           <p:nvPr/>
         </p:nvSpPr>
@@ -11511,7 +10289,7 @@
       </p:sp>
       <p:sp>
         <p:nvSpPr>
-          <p:cNvPr id="29" name="TextBox 28"/>
+          <p:cNvPr id="44" name="TextBox 43"/>
           <p:cNvSpPr txBox="1"/>
           <p:nvPr/>
         </p:nvSpPr>
@@ -11589,7 +10367,7 @@
           </a:solidFill>
           <a:ln w="12700">
             <a:solidFill>
-              <a:srgbClr val="F7D74D"/>
+              <a:srgbClr val="FF657A"/>
             </a:solidFill>
           </a:ln>
         </p:spPr>
@@ -11614,12 +10392,12 @@
             <a:pPr algn="ctr">
               <a:defRPr sz="1000" b="1">
                 <a:solidFill>
-                  <a:srgbClr val="F7D74D"/>
-                </a:solidFill>
-              </a:defRPr>
-            </a:pPr>
-            <a:r>
-              <a:t>SCORE PROJECTION</a:t>
+                  <a:srgbClr val="FF657A"/>
+                </a:solidFill>
+              </a:defRPr>
+            </a:pPr>
+            <a:r>
+              <a:t>LIVE DEMO</a:t>
             </a:r>
           </a:p>
         </p:txBody>
@@ -11654,7 +10432,7 @@
               </a:defRPr>
             </a:pPr>
             <a:r>
-              <a:t>评分预估：88-96 / 105 + 3 加分</a:t>
+              <a:t>现场演示</a:t>
             </a:r>
           </a:p>
         </p:txBody>
@@ -11667,8 +10445,8 @@
         </p:nvSpPr>
         <p:spPr>
           <a:xfrm>
-            <a:off x="731520" y="2194560"/>
-            <a:ext cx="10698480" cy="457200"/>
+            <a:off x="457200" y="2194560"/>
+            <a:ext cx="2103120" cy="3200400"/>
           </a:xfrm>
           <a:prstGeom prst="roundRect">
             <a:avLst/>
@@ -11710,14 +10488,14 @@
         </p:nvSpPr>
         <p:spPr>
           <a:xfrm>
-            <a:off x="868680" y="2194560"/>
-            <a:ext cx="10424159" cy="36576"/>
+            <a:off x="594360" y="2194560"/>
+            <a:ext cx="1828799" cy="36576"/>
           </a:xfrm>
           <a:prstGeom prst="rect">
             <a:avLst/>
           </a:prstGeom>
           <a:solidFill>
-            <a:srgbClr val="8B949E"/>
+            <a:srgbClr val="4AA3FF"/>
           </a:solidFill>
           <a:ln>
             <a:noFill/>
@@ -11753,148 +10531,121 @@
         </p:nvSpPr>
         <p:spPr>
           <a:xfrm>
-            <a:off x="1005840" y="2240280"/>
-            <a:ext cx="3200400" cy="365760"/>
-          </a:xfrm>
-          <a:prstGeom prst="rect">
-            <a:avLst/>
-          </a:prstGeom>
-          <a:noFill/>
-        </p:spPr>
-        <p:txBody>
-          <a:bodyPr wrap="square">
-            <a:spAutoFit/>
-          </a:bodyPr>
-          <a:lstStyle/>
-          <a:p>
-            <a:pPr algn="l">
-              <a:defRPr sz="1200" b="1">
+            <a:off x="594360" y="2377440"/>
+            <a:ext cx="1828800" cy="365760"/>
+          </a:xfrm>
+          <a:prstGeom prst="rect">
+            <a:avLst/>
+          </a:prstGeom>
+          <a:noFill/>
+        </p:spPr>
+        <p:txBody>
+          <a:bodyPr wrap="square">
+            <a:spAutoFit/>
+          </a:bodyPr>
+          <a:lstStyle/>
+          <a:p>
+            <a:pPr algn="ctr">
+              <a:defRPr sz="2000" b="1">
+                <a:solidFill>
+                  <a:srgbClr val="4AA3FF"/>
+                </a:solidFill>
+              </a:defRPr>
+            </a:pPr>
+            <a:r>
+              <a:t>01</a:t>
+            </a:r>
+          </a:p>
+        </p:txBody>
+      </p:sp>
+      <p:sp>
+        <p:nvSpPr>
+          <p:cNvPr id="7" name="TextBox 6"/>
+          <p:cNvSpPr txBox="1"/>
+          <p:nvPr/>
+        </p:nvSpPr>
+        <p:spPr>
+          <a:xfrm>
+            <a:off x="594360" y="2834640"/>
+            <a:ext cx="1828800" cy="365760"/>
+          </a:xfrm>
+          <a:prstGeom prst="rect">
+            <a:avLst/>
+          </a:prstGeom>
+          <a:noFill/>
+        </p:spPr>
+        <p:txBody>
+          <a:bodyPr wrap="square">
+            <a:spAutoFit/>
+          </a:bodyPr>
+          <a:lstStyle/>
+          <a:p>
+            <a:pPr algn="ctr">
+              <a:defRPr sz="1400" b="1">
+                <a:solidFill>
+                  <a:srgbClr val="FFFFFF"/>
+                </a:solidFill>
+              </a:defRPr>
+            </a:pPr>
+            <a:r>
+              <a:t>预设查询</a:t>
+            </a:r>
+          </a:p>
+        </p:txBody>
+      </p:sp>
+      <p:sp>
+        <p:nvSpPr>
+          <p:cNvPr id="8" name="TextBox 7"/>
+          <p:cNvSpPr txBox="1"/>
+          <p:nvPr/>
+        </p:nvSpPr>
+        <p:spPr>
+          <a:xfrm>
+            <a:off x="594360" y="3383280"/>
+            <a:ext cx="1828800" cy="1371600"/>
+          </a:xfrm>
+          <a:prstGeom prst="rect">
+            <a:avLst/>
+          </a:prstGeom>
+          <a:noFill/>
+        </p:spPr>
+        <p:txBody>
+          <a:bodyPr wrap="square">
+            <a:spAutoFit/>
+          </a:bodyPr>
+          <a:lstStyle/>
+          <a:p>
+            <a:pPr algn="ctr">
+              <a:defRPr sz="1100" b="0">
                 <a:solidFill>
                   <a:srgbClr val="8B949E"/>
                 </a:solidFill>
               </a:defRPr>
             </a:pPr>
             <a:r>
-              <a:t>维度</a:t>
-            </a:r>
-          </a:p>
-        </p:txBody>
-      </p:sp>
-      <p:sp>
-        <p:nvSpPr>
-          <p:cNvPr id="7" name="TextBox 6"/>
-          <p:cNvSpPr txBox="1"/>
-          <p:nvPr/>
-        </p:nvSpPr>
-        <p:spPr>
-          <a:xfrm>
-            <a:off x="4572000" y="2240280"/>
-            <a:ext cx="1371600" cy="365760"/>
-          </a:xfrm>
-          <a:prstGeom prst="rect">
-            <a:avLst/>
-          </a:prstGeom>
-          <a:noFill/>
-        </p:spPr>
-        <p:txBody>
-          <a:bodyPr wrap="square">
-            <a:spAutoFit/>
-          </a:bodyPr>
-          <a:lstStyle/>
-          <a:p>
-            <a:pPr algn="ctr">
-              <a:defRPr sz="1200" b="1">
-                <a:solidFill>
-                  <a:srgbClr val="8B949E"/>
-                </a:solidFill>
-              </a:defRPr>
-            </a:pPr>
-            <a:r>
-              <a:t>满分</a:t>
-            </a:r>
-          </a:p>
-        </p:txBody>
-      </p:sp>
-      <p:sp>
-        <p:nvSpPr>
-          <p:cNvPr id="8" name="TextBox 7"/>
-          <p:cNvSpPr txBox="1"/>
-          <p:nvPr/>
-        </p:nvSpPr>
-        <p:spPr>
-          <a:xfrm>
-            <a:off x="6400800" y="2240280"/>
-            <a:ext cx="1371600" cy="365760"/>
-          </a:xfrm>
-          <a:prstGeom prst="rect">
-            <a:avLst/>
-          </a:prstGeom>
-          <a:noFill/>
-        </p:spPr>
-        <p:txBody>
-          <a:bodyPr wrap="square">
-            <a:spAutoFit/>
-          </a:bodyPr>
-          <a:lstStyle/>
-          <a:p>
-            <a:pPr algn="ctr">
-              <a:defRPr sz="1200" b="1">
-                <a:solidFill>
-                  <a:srgbClr val="8B949E"/>
-                </a:solidFill>
-              </a:defRPr>
-            </a:pPr>
-            <a:r>
-              <a:t>预估</a:t>
-            </a:r>
-          </a:p>
-        </p:txBody>
-      </p:sp>
-      <p:sp>
-        <p:nvSpPr>
-          <p:cNvPr id="9" name="TextBox 8"/>
-          <p:cNvSpPr txBox="1"/>
-          <p:nvPr/>
-        </p:nvSpPr>
-        <p:spPr>
-          <a:xfrm>
-            <a:off x="8229600" y="2240280"/>
-            <a:ext cx="3200400" cy="365760"/>
-          </a:xfrm>
-          <a:prstGeom prst="rect">
-            <a:avLst/>
-          </a:prstGeom>
-          <a:noFill/>
-        </p:spPr>
-        <p:txBody>
-          <a:bodyPr wrap="square">
-            <a:spAutoFit/>
-          </a:bodyPr>
-          <a:lstStyle/>
-          <a:p>
-            <a:pPr algn="l">
-              <a:defRPr sz="1200" b="1">
-                <a:solidFill>
-                  <a:srgbClr val="8B949E"/>
-                </a:solidFill>
-              </a:defRPr>
-            </a:pPr>
-            <a:r>
-              <a:t>依据</a:t>
-            </a:r>
-          </a:p>
-        </p:txBody>
-      </p:sp>
-      <p:sp>
-        <p:nvSpPr>
-          <p:cNvPr id="10" name="Rounded Rectangle 9"/>
+              <a:t>点击 demo chip</a:t>
+            </a:r>
+            <a:br/>
+            <a:r>
+              <a:t>展示 AI 生成 SQL</a:t>
+            </a:r>
+            <a:br/>
+            <a:r>
+              <a:t>流式进度推送</a:t>
+            </a:r>
+          </a:p>
+        </p:txBody>
+      </p:sp>
+      <p:sp>
+        <p:nvSpPr>
+          <p:cNvPr id="9" name="Rounded Rectangle 8"/>
           <p:cNvSpPr/>
           <p:nvPr/>
         </p:nvSpPr>
         <p:spPr>
           <a:xfrm>
-            <a:off x="731520" y="2788920"/>
-            <a:ext cx="10698480" cy="502920"/>
+            <a:off x="2743200" y="2194560"/>
+            <a:ext cx="2103120" cy="3200400"/>
           </a:xfrm>
           <a:prstGeom prst="roundRect">
             <a:avLst/>
@@ -11930,20 +10681,20 @@
       </p:sp>
       <p:sp>
         <p:nvSpPr>
-          <p:cNvPr id="11" name="Rectangle 10"/>
+          <p:cNvPr id="10" name="Rectangle 9"/>
           <p:cNvSpPr/>
           <p:nvPr/>
         </p:nvSpPr>
         <p:spPr>
           <a:xfrm>
-            <a:off x="868680" y="2788920"/>
-            <a:ext cx="10424159" cy="36576"/>
+            <a:off x="2880360" y="2194560"/>
+            <a:ext cx="1828799" cy="36576"/>
           </a:xfrm>
           <a:prstGeom prst="rect">
             <a:avLst/>
           </a:prstGeom>
           <a:solidFill>
-            <a:srgbClr val="8B949E"/>
+            <a:srgbClr val="19D3C5"/>
           </a:solidFill>
           <a:ln>
             <a:noFill/>
@@ -11973,84 +10724,49 @@
       </p:sp>
       <p:sp>
         <p:nvSpPr>
+          <p:cNvPr id="11" name="TextBox 10"/>
+          <p:cNvSpPr txBox="1"/>
+          <p:nvPr/>
+        </p:nvSpPr>
+        <p:spPr>
+          <a:xfrm>
+            <a:off x="2880360" y="2377440"/>
+            <a:ext cx="1828800" cy="365760"/>
+          </a:xfrm>
+          <a:prstGeom prst="rect">
+            <a:avLst/>
+          </a:prstGeom>
+          <a:noFill/>
+        </p:spPr>
+        <p:txBody>
+          <a:bodyPr wrap="square">
+            <a:spAutoFit/>
+          </a:bodyPr>
+          <a:lstStyle/>
+          <a:p>
+            <a:pPr algn="ctr">
+              <a:defRPr sz="2000" b="1">
+                <a:solidFill>
+                  <a:srgbClr val="19D3C5"/>
+                </a:solidFill>
+              </a:defRPr>
+            </a:pPr>
+            <a:r>
+              <a:t>02</a:t>
+            </a:r>
+          </a:p>
+        </p:txBody>
+      </p:sp>
+      <p:sp>
+        <p:nvSpPr>
           <p:cNvPr id="12" name="TextBox 11"/>
           <p:cNvSpPr txBox="1"/>
           <p:nvPr/>
         </p:nvSpPr>
         <p:spPr>
           <a:xfrm>
-            <a:off x="1005840" y="2834640"/>
-            <a:ext cx="3200400" cy="365760"/>
-          </a:xfrm>
-          <a:prstGeom prst="rect">
-            <a:avLst/>
-          </a:prstGeom>
-          <a:noFill/>
-        </p:spPr>
-        <p:txBody>
-          <a:bodyPr wrap="square">
-            <a:spAutoFit/>
-          </a:bodyPr>
-          <a:lstStyle/>
-          <a:p>
-            <a:pPr algn="l">
-              <a:defRPr sz="1300" b="0">
-                <a:solidFill>
-                  <a:srgbClr val="FFFFFF"/>
-                </a:solidFill>
-              </a:defRPr>
-            </a:pPr>
-            <a:r>
-              <a:t>Demo 现场可用</a:t>
-            </a:r>
-          </a:p>
-        </p:txBody>
-      </p:sp>
-      <p:sp>
-        <p:nvSpPr>
-          <p:cNvPr id="13" name="TextBox 12"/>
-          <p:cNvSpPr txBox="1"/>
-          <p:nvPr/>
-        </p:nvSpPr>
-        <p:spPr>
-          <a:xfrm>
-            <a:off x="4572000" y="2834640"/>
-            <a:ext cx="1371600" cy="365760"/>
-          </a:xfrm>
-          <a:prstGeom prst="rect">
-            <a:avLst/>
-          </a:prstGeom>
-          <a:noFill/>
-        </p:spPr>
-        <p:txBody>
-          <a:bodyPr wrap="square">
-            <a:spAutoFit/>
-          </a:bodyPr>
-          <a:lstStyle/>
-          <a:p>
-            <a:pPr algn="ctr">
-              <a:defRPr sz="1300" b="0">
-                <a:solidFill>
-                  <a:srgbClr val="8B949E"/>
-                </a:solidFill>
-              </a:defRPr>
-            </a:pPr>
-            <a:r>
-              <a:t>25</a:t>
-            </a:r>
-          </a:p>
-        </p:txBody>
-      </p:sp>
-      <p:sp>
-        <p:nvSpPr>
-          <p:cNvPr id="14" name="TextBox 13"/>
-          <p:cNvSpPr txBox="1"/>
-          <p:nvPr/>
-        </p:nvSpPr>
-        <p:spPr>
-          <a:xfrm>
-            <a:off x="6400800" y="2834640"/>
-            <a:ext cx="1371600" cy="365760"/>
+            <a:off x="2880360" y="2834640"/>
+            <a:ext cx="1828800" cy="365760"/>
           </a:xfrm>
           <a:prstGeom prst="rect">
             <a:avLst/>
@@ -12066,39 +10782,39 @@
             <a:pPr algn="ctr">
               <a:defRPr sz="1400" b="1">
                 <a:solidFill>
-                  <a:srgbClr val="4AA3FF"/>
-                </a:solidFill>
-              </a:defRPr>
-            </a:pPr>
-            <a:r>
-              <a:t>20-22</a:t>
-            </a:r>
-          </a:p>
-        </p:txBody>
-      </p:sp>
-      <p:sp>
-        <p:nvSpPr>
-          <p:cNvPr id="15" name="TextBox 14"/>
-          <p:cNvSpPr txBox="1"/>
-          <p:nvPr/>
-        </p:nvSpPr>
-        <p:spPr>
-          <a:xfrm>
-            <a:off x="8229600" y="2834640"/>
-            <a:ext cx="3200400" cy="365760"/>
-          </a:xfrm>
-          <a:prstGeom prst="rect">
-            <a:avLst/>
-          </a:prstGeom>
-          <a:noFill/>
-        </p:spPr>
-        <p:txBody>
-          <a:bodyPr wrap="square">
-            <a:spAutoFit/>
-          </a:bodyPr>
-          <a:lstStyle/>
-          <a:p>
-            <a:pPr algn="l">
+                  <a:srgbClr val="FFFFFF"/>
+                </a:solidFill>
+              </a:defRPr>
+            </a:pPr>
+            <a:r>
+              <a:t>自由提问</a:t>
+            </a:r>
+          </a:p>
+        </p:txBody>
+      </p:sp>
+      <p:sp>
+        <p:nvSpPr>
+          <p:cNvPr id="13" name="TextBox 12"/>
+          <p:cNvSpPr txBox="1"/>
+          <p:nvPr/>
+        </p:nvSpPr>
+        <p:spPr>
+          <a:xfrm>
+            <a:off x="2880360" y="3383280"/>
+            <a:ext cx="1828800" cy="1371600"/>
+          </a:xfrm>
+          <a:prstGeom prst="rect">
+            <a:avLst/>
+          </a:prstGeom>
+          <a:noFill/>
+        </p:spPr>
+        <p:txBody>
+          <a:bodyPr wrap="square">
+            <a:spAutoFit/>
+          </a:bodyPr>
+          <a:lstStyle/>
+          <a:p>
+            <a:pPr algn="ctr">
               <a:defRPr sz="1100" b="0">
                 <a:solidFill>
                   <a:srgbClr val="8B949E"/>
@@ -12106,161 +10822,29 @@
               </a:defRPr>
             </a:pPr>
             <a:r>
-              <a:t>公网部署 + 缓存 fallback + 流式进度</a:t>
-            </a:r>
-          </a:p>
-        </p:txBody>
-      </p:sp>
-      <p:sp>
-        <p:nvSpPr>
-          <p:cNvPr id="16" name="TextBox 15"/>
-          <p:cNvSpPr txBox="1"/>
-          <p:nvPr/>
-        </p:nvSpPr>
-        <p:spPr>
-          <a:xfrm>
-            <a:off x="1005840" y="3383280"/>
-            <a:ext cx="3200400" cy="365760"/>
-          </a:xfrm>
-          <a:prstGeom prst="rect">
-            <a:avLst/>
-          </a:prstGeom>
-          <a:noFill/>
-        </p:spPr>
-        <p:txBody>
-          <a:bodyPr wrap="square">
-            <a:spAutoFit/>
-          </a:bodyPr>
-          <a:lstStyle/>
-          <a:p>
-            <a:pPr algn="l">
-              <a:defRPr sz="1300" b="0">
-                <a:solidFill>
-                  <a:srgbClr val="FFFFFF"/>
-                </a:solidFill>
-              </a:defRPr>
-            </a:pPr>
-            <a:r>
-              <a:t>用户价值/PMF</a:t>
-            </a:r>
-          </a:p>
-        </p:txBody>
-      </p:sp>
-      <p:sp>
-        <p:nvSpPr>
-          <p:cNvPr id="17" name="TextBox 16"/>
-          <p:cNvSpPr txBox="1"/>
-          <p:nvPr/>
-        </p:nvSpPr>
-        <p:spPr>
-          <a:xfrm>
-            <a:off x="4572000" y="3383280"/>
-            <a:ext cx="1371600" cy="365760"/>
-          </a:xfrm>
-          <a:prstGeom prst="rect">
-            <a:avLst/>
-          </a:prstGeom>
-          <a:noFill/>
-        </p:spPr>
-        <p:txBody>
-          <a:bodyPr wrap="square">
-            <a:spAutoFit/>
-          </a:bodyPr>
-          <a:lstStyle/>
-          <a:p>
-            <a:pPr algn="ctr">
-              <a:defRPr sz="1300" b="0">
-                <a:solidFill>
-                  <a:srgbClr val="8B949E"/>
-                </a:solidFill>
-              </a:defRPr>
-            </a:pPr>
-            <a:r>
-              <a:t>20</a:t>
-            </a:r>
-          </a:p>
-        </p:txBody>
-      </p:sp>
-      <p:sp>
-        <p:nvSpPr>
-          <p:cNvPr id="18" name="TextBox 17"/>
-          <p:cNvSpPr txBox="1"/>
-          <p:nvPr/>
-        </p:nvSpPr>
-        <p:spPr>
-          <a:xfrm>
-            <a:off x="6400800" y="3383280"/>
-            <a:ext cx="1371600" cy="365760"/>
-          </a:xfrm>
-          <a:prstGeom prst="rect">
-            <a:avLst/>
-          </a:prstGeom>
-          <a:noFill/>
-        </p:spPr>
-        <p:txBody>
-          <a:bodyPr wrap="square">
-            <a:spAutoFit/>
-          </a:bodyPr>
-          <a:lstStyle/>
-          <a:p>
-            <a:pPr algn="ctr">
-              <a:defRPr sz="1400" b="1">
-                <a:solidFill>
-                  <a:srgbClr val="19D3C5"/>
-                </a:solidFill>
-              </a:defRPr>
-            </a:pPr>
-            <a:r>
-              <a:t>16-18</a:t>
-            </a:r>
-          </a:p>
-        </p:txBody>
-      </p:sp>
-      <p:sp>
-        <p:nvSpPr>
-          <p:cNvPr id="19" name="TextBox 18"/>
-          <p:cNvSpPr txBox="1"/>
-          <p:nvPr/>
-        </p:nvSpPr>
-        <p:spPr>
-          <a:xfrm>
-            <a:off x="8229600" y="3383280"/>
-            <a:ext cx="3200400" cy="365760"/>
-          </a:xfrm>
-          <a:prstGeom prst="rect">
-            <a:avLst/>
-          </a:prstGeom>
-          <a:noFill/>
-        </p:spPr>
-        <p:txBody>
-          <a:bodyPr wrap="square">
-            <a:spAutoFit/>
-          </a:bodyPr>
-          <a:lstStyle/>
-          <a:p>
-            <a:pPr algn="l">
-              <a:defRPr sz="1100" b="0">
-                <a:solidFill>
-                  <a:srgbClr val="8B949E"/>
-                </a:solidFill>
-              </a:defRPr>
-            </a:pPr>
-            <a:r>
-              <a:t>真实痛点 + 自然语言接口 + 仪表盘</a:t>
-            </a:r>
-          </a:p>
-        </p:txBody>
-      </p:sp>
-      <p:sp>
-        <p:nvSpPr>
-          <p:cNvPr id="20" name="Rounded Rectangle 19"/>
+              <a:t>"最近三个月哪个</a:t>
+            </a:r>
+            <a:br/>
+            <a:r>
+              <a:t>品类增长最快"</a:t>
+            </a:r>
+            <a:br/>
+            <a:r>
+              <a:t>展示 AI 理解意图</a:t>
+            </a:r>
+          </a:p>
+        </p:txBody>
+      </p:sp>
+      <p:sp>
+        <p:nvSpPr>
+          <p:cNvPr id="14" name="Rounded Rectangle 13"/>
           <p:cNvSpPr/>
           <p:nvPr/>
         </p:nvSpPr>
         <p:spPr>
           <a:xfrm>
-            <a:off x="731520" y="3886200"/>
-            <a:ext cx="10698480" cy="502920"/>
+            <a:off x="5029200" y="2194560"/>
+            <a:ext cx="2103120" cy="3200400"/>
           </a:xfrm>
           <a:prstGeom prst="roundRect">
             <a:avLst/>
@@ -12296,20 +10880,20 @@
       </p:sp>
       <p:sp>
         <p:nvSpPr>
-          <p:cNvPr id="21" name="Rectangle 20"/>
+          <p:cNvPr id="15" name="Rectangle 14"/>
           <p:cNvSpPr/>
           <p:nvPr/>
         </p:nvSpPr>
         <p:spPr>
           <a:xfrm>
-            <a:off x="868680" y="3886200"/>
-            <a:ext cx="10424159" cy="36576"/>
+            <a:off x="5166360" y="2194560"/>
+            <a:ext cx="1828799" cy="36576"/>
           </a:xfrm>
           <a:prstGeom prst="rect">
             <a:avLst/>
           </a:prstGeom>
           <a:solidFill>
-            <a:srgbClr val="8B949E"/>
+            <a:srgbClr val="1A7F37"/>
           </a:solidFill>
           <a:ln>
             <a:noFill/>
@@ -12339,49 +10923,14 @@
       </p:sp>
       <p:sp>
         <p:nvSpPr>
-          <p:cNvPr id="22" name="TextBox 21"/>
-          <p:cNvSpPr txBox="1"/>
-          <p:nvPr/>
-        </p:nvSpPr>
-        <p:spPr>
-          <a:xfrm>
-            <a:off x="1005840" y="3931920"/>
-            <a:ext cx="3200400" cy="365760"/>
-          </a:xfrm>
-          <a:prstGeom prst="rect">
-            <a:avLst/>
-          </a:prstGeom>
-          <a:noFill/>
-        </p:spPr>
-        <p:txBody>
-          <a:bodyPr wrap="square">
-            <a:spAutoFit/>
-          </a:bodyPr>
-          <a:lstStyle/>
-          <a:p>
-            <a:pPr algn="l">
-              <a:defRPr sz="1300" b="0">
-                <a:solidFill>
-                  <a:srgbClr val="FFFFFF"/>
-                </a:solidFill>
-              </a:defRPr>
-            </a:pPr>
-            <a:r>
-              <a:t>技术实现</a:t>
-            </a:r>
-          </a:p>
-        </p:txBody>
-      </p:sp>
-      <p:sp>
-        <p:nvSpPr>
-          <p:cNvPr id="23" name="TextBox 22"/>
-          <p:cNvSpPr txBox="1"/>
-          <p:nvPr/>
-        </p:nvSpPr>
-        <p:spPr>
-          <a:xfrm>
-            <a:off x="4572000" y="3931920"/>
-            <a:ext cx="1371600" cy="365760"/>
+          <p:cNvPr id="16" name="TextBox 15"/>
+          <p:cNvSpPr txBox="1"/>
+          <p:nvPr/>
+        </p:nvSpPr>
+        <p:spPr>
+          <a:xfrm>
+            <a:off x="5166360" y="2377440"/>
+            <a:ext cx="1828800" cy="365760"/>
           </a:xfrm>
           <a:prstGeom prst="rect">
             <a:avLst/>
@@ -12395,28 +10944,28 @@
           <a:lstStyle/>
           <a:p>
             <a:pPr algn="ctr">
-              <a:defRPr sz="1300" b="0">
-                <a:solidFill>
-                  <a:srgbClr val="8B949E"/>
-                </a:solidFill>
-              </a:defRPr>
-            </a:pPr>
-            <a:r>
-              <a:t>20</a:t>
-            </a:r>
-          </a:p>
-        </p:txBody>
-      </p:sp>
-      <p:sp>
-        <p:nvSpPr>
-          <p:cNvPr id="24" name="TextBox 23"/>
-          <p:cNvSpPr txBox="1"/>
-          <p:nvPr/>
-        </p:nvSpPr>
-        <p:spPr>
-          <a:xfrm>
-            <a:off x="6400800" y="3931920"/>
-            <a:ext cx="1371600" cy="365760"/>
+              <a:defRPr sz="2000" b="1">
+                <a:solidFill>
+                  <a:srgbClr val="1A7F37"/>
+                </a:solidFill>
+              </a:defRPr>
+            </a:pPr>
+            <a:r>
+              <a:t>03</a:t>
+            </a:r>
+          </a:p>
+        </p:txBody>
+      </p:sp>
+      <p:sp>
+        <p:nvSpPr>
+          <p:cNvPr id="17" name="TextBox 16"/>
+          <p:cNvSpPr txBox="1"/>
+          <p:nvPr/>
+        </p:nvSpPr>
+        <p:spPr>
+          <a:xfrm>
+            <a:off x="5166360" y="2834640"/>
+            <a:ext cx="1828800" cy="365760"/>
           </a:xfrm>
           <a:prstGeom prst="rect">
             <a:avLst/>
@@ -12432,39 +10981,39 @@
             <a:pPr algn="ctr">
               <a:defRPr sz="1400" b="1">
                 <a:solidFill>
-                  <a:srgbClr val="1A7F37"/>
-                </a:solidFill>
-              </a:defRPr>
-            </a:pPr>
-            <a:r>
-              <a:t>16-18</a:t>
-            </a:r>
-          </a:p>
-        </p:txBody>
-      </p:sp>
-      <p:sp>
-        <p:nvSpPr>
-          <p:cNvPr id="25" name="TextBox 24"/>
-          <p:cNvSpPr txBox="1"/>
-          <p:nvPr/>
-        </p:nvSpPr>
-        <p:spPr>
-          <a:xfrm>
-            <a:off x="8229600" y="3931920"/>
-            <a:ext cx="3200400" cy="365760"/>
-          </a:xfrm>
-          <a:prstGeom prst="rect">
-            <a:avLst/>
-          </a:prstGeom>
-          <a:noFill/>
-        </p:spPr>
-        <p:txBody>
-          <a:bodyPr wrap="square">
-            <a:spAutoFit/>
-          </a:bodyPr>
-          <a:lstStyle/>
-          <a:p>
-            <a:pPr algn="l">
+                  <a:srgbClr val="FFFFFF"/>
+                </a:solidFill>
+              </a:defRPr>
+            </a:pPr>
+            <a:r>
+              <a:t>看板联动</a:t>
+            </a:r>
+          </a:p>
+        </p:txBody>
+      </p:sp>
+      <p:sp>
+        <p:nvSpPr>
+          <p:cNvPr id="18" name="TextBox 17"/>
+          <p:cNvSpPr txBox="1"/>
+          <p:nvPr/>
+        </p:nvSpPr>
+        <p:spPr>
+          <a:xfrm>
+            <a:off x="5166360" y="3383280"/>
+            <a:ext cx="1828800" cy="1371600"/>
+          </a:xfrm>
+          <a:prstGeom prst="rect">
+            <a:avLst/>
+          </a:prstGeom>
+          <a:noFill/>
+        </p:spPr>
+        <p:txBody>
+          <a:bodyPr wrap="square">
+            <a:spAutoFit/>
+          </a:bodyPr>
+          <a:lstStyle/>
+          <a:p>
+            <a:pPr algn="ctr">
               <a:defRPr sz="1100" b="0">
                 <a:solidFill>
                   <a:srgbClr val="8B949E"/>
@@ -12472,161 +11021,29 @@
               </a:defRPr>
             </a:pPr>
             <a:r>
-              <a:t>AI SDK + AST 校验 + 自纠正 + 对抗审查</a:t>
-            </a:r>
-          </a:p>
-        </p:txBody>
-      </p:sp>
-      <p:sp>
-        <p:nvSpPr>
-          <p:cNvPr id="26" name="TextBox 25"/>
-          <p:cNvSpPr txBox="1"/>
-          <p:nvPr/>
-        </p:nvSpPr>
-        <p:spPr>
-          <a:xfrm>
-            <a:off x="1005840" y="4480560"/>
-            <a:ext cx="3200400" cy="365760"/>
-          </a:xfrm>
-          <a:prstGeom prst="rect">
-            <a:avLst/>
-          </a:prstGeom>
-          <a:noFill/>
-        </p:spPr>
-        <p:txBody>
-          <a:bodyPr wrap="square">
-            <a:spAutoFit/>
-          </a:bodyPr>
-          <a:lstStyle/>
-          <a:p>
-            <a:pPr algn="l">
-              <a:defRPr sz="1300" b="0">
-                <a:solidFill>
-                  <a:srgbClr val="FFFFFF"/>
-                </a:solidFill>
-              </a:defRPr>
-            </a:pPr>
-            <a:r>
-              <a:t>创新性</a:t>
-            </a:r>
-          </a:p>
-        </p:txBody>
-      </p:sp>
-      <p:sp>
-        <p:nvSpPr>
-          <p:cNvPr id="27" name="TextBox 26"/>
-          <p:cNvSpPr txBox="1"/>
-          <p:nvPr/>
-        </p:nvSpPr>
-        <p:spPr>
-          <a:xfrm>
-            <a:off x="4572000" y="4480560"/>
-            <a:ext cx="1371600" cy="365760"/>
-          </a:xfrm>
-          <a:prstGeom prst="rect">
-            <a:avLst/>
-          </a:prstGeom>
-          <a:noFill/>
-        </p:spPr>
-        <p:txBody>
-          <a:bodyPr wrap="square">
-            <a:spAutoFit/>
-          </a:bodyPr>
-          <a:lstStyle/>
-          <a:p>
-            <a:pPr algn="ctr">
-              <a:defRPr sz="1300" b="0">
-                <a:solidFill>
-                  <a:srgbClr val="8B949E"/>
-                </a:solidFill>
-              </a:defRPr>
-            </a:pPr>
-            <a:r>
-              <a:t>15</a:t>
-            </a:r>
-          </a:p>
-        </p:txBody>
-      </p:sp>
-      <p:sp>
-        <p:nvSpPr>
-          <p:cNvPr id="28" name="TextBox 27"/>
-          <p:cNvSpPr txBox="1"/>
-          <p:nvPr/>
-        </p:nvSpPr>
-        <p:spPr>
-          <a:xfrm>
-            <a:off x="6400800" y="4480560"/>
-            <a:ext cx="1371600" cy="365760"/>
-          </a:xfrm>
-          <a:prstGeom prst="rect">
-            <a:avLst/>
-          </a:prstGeom>
-          <a:noFill/>
-        </p:spPr>
-        <p:txBody>
-          <a:bodyPr wrap="square">
-            <a:spAutoFit/>
-          </a:bodyPr>
-          <a:lstStyle/>
-          <a:p>
-            <a:pPr algn="ctr">
-              <a:defRPr sz="1400" b="1">
-                <a:solidFill>
-                  <a:srgbClr val="F7D74D"/>
-                </a:solidFill>
-              </a:defRPr>
-            </a:pPr>
-            <a:r>
-              <a:t>11-13</a:t>
-            </a:r>
-          </a:p>
-        </p:txBody>
-      </p:sp>
-      <p:sp>
-        <p:nvSpPr>
-          <p:cNvPr id="29" name="TextBox 28"/>
-          <p:cNvSpPr txBox="1"/>
-          <p:nvPr/>
-        </p:nvSpPr>
-        <p:spPr>
-          <a:xfrm>
-            <a:off x="8229600" y="4480560"/>
-            <a:ext cx="3200400" cy="365760"/>
-          </a:xfrm>
-          <a:prstGeom prst="rect">
-            <a:avLst/>
-          </a:prstGeom>
-          <a:noFill/>
-        </p:spPr>
-        <p:txBody>
-          <a:bodyPr wrap="square">
-            <a:spAutoFit/>
-          </a:bodyPr>
-          <a:lstStyle/>
-          <a:p>
-            <a:pPr algn="l">
-              <a:defRPr sz="1100" b="0">
-                <a:solidFill>
-                  <a:srgbClr val="8B949E"/>
-                </a:solidFill>
-              </a:defRPr>
-            </a:pPr>
-            <a:r>
-              <a:t>自纠正循环 + QUINTE 方法论 + 流式进度</a:t>
-            </a:r>
-          </a:p>
-        </p:txBody>
-      </p:sp>
-      <p:sp>
-        <p:nvSpPr>
-          <p:cNvPr id="30" name="Rounded Rectangle 29"/>
+              <a:t>8 个 KPI + 6 个图表</a:t>
+            </a:r>
+            <a:br/>
+            <a:r>
+              <a:t>全部真实数据库</a:t>
+            </a:r>
+            <a:br/>
+            <a:r>
+              <a:t>秒加载</a:t>
+            </a:r>
+          </a:p>
+        </p:txBody>
+      </p:sp>
+      <p:sp>
+        <p:nvSpPr>
+          <p:cNvPr id="19" name="Rounded Rectangle 18"/>
           <p:cNvSpPr/>
           <p:nvPr/>
         </p:nvSpPr>
         <p:spPr>
           <a:xfrm>
-            <a:off x="731520" y="4983480"/>
-            <a:ext cx="10698480" cy="502920"/>
+            <a:off x="7315200" y="2194560"/>
+            <a:ext cx="2103120" cy="3200400"/>
           </a:xfrm>
           <a:prstGeom prst="roundRect">
             <a:avLst/>
@@ -12662,20 +11079,20 @@
       </p:sp>
       <p:sp>
         <p:nvSpPr>
-          <p:cNvPr id="31" name="Rectangle 30"/>
+          <p:cNvPr id="20" name="Rectangle 19"/>
           <p:cNvSpPr/>
           <p:nvPr/>
         </p:nvSpPr>
         <p:spPr>
           <a:xfrm>
-            <a:off x="868680" y="4983480"/>
-            <a:ext cx="10424159" cy="36576"/>
+            <a:off x="7452360" y="2194560"/>
+            <a:ext cx="1828799" cy="36576"/>
           </a:xfrm>
           <a:prstGeom prst="rect">
             <a:avLst/>
           </a:prstGeom>
           <a:solidFill>
-            <a:srgbClr val="8B949E"/>
+            <a:srgbClr val="F7D74D"/>
           </a:solidFill>
           <a:ln>
             <a:noFill/>
@@ -12705,49 +11122,14 @@
       </p:sp>
       <p:sp>
         <p:nvSpPr>
-          <p:cNvPr id="32" name="TextBox 31"/>
-          <p:cNvSpPr txBox="1"/>
-          <p:nvPr/>
-        </p:nvSpPr>
-        <p:spPr>
-          <a:xfrm>
-            <a:off x="1005840" y="5029200"/>
-            <a:ext cx="3200400" cy="365760"/>
-          </a:xfrm>
-          <a:prstGeom prst="rect">
-            <a:avLst/>
-          </a:prstGeom>
-          <a:noFill/>
-        </p:spPr>
-        <p:txBody>
-          <a:bodyPr wrap="square">
-            <a:spAutoFit/>
-          </a:bodyPr>
-          <a:lstStyle/>
-          <a:p>
-            <a:pPr algn="l">
-              <a:defRPr sz="1300" b="0">
-                <a:solidFill>
-                  <a:srgbClr val="FFFFFF"/>
-                </a:solidFill>
-              </a:defRPr>
-            </a:pPr>
-            <a:r>
-              <a:t>商业潜力</a:t>
-            </a:r>
-          </a:p>
-        </p:txBody>
-      </p:sp>
-      <p:sp>
-        <p:nvSpPr>
-          <p:cNvPr id="33" name="TextBox 32"/>
-          <p:cNvSpPr txBox="1"/>
-          <p:nvPr/>
-        </p:nvSpPr>
-        <p:spPr>
-          <a:xfrm>
-            <a:off x="4572000" y="5029200"/>
-            <a:ext cx="1371600" cy="365760"/>
+          <p:cNvPr id="21" name="TextBox 20"/>
+          <p:cNvSpPr txBox="1"/>
+          <p:nvPr/>
+        </p:nvSpPr>
+        <p:spPr>
+          <a:xfrm>
+            <a:off x="7452360" y="2377440"/>
+            <a:ext cx="1828800" cy="365760"/>
           </a:xfrm>
           <a:prstGeom prst="rect">
             <a:avLst/>
@@ -12761,28 +11143,28 @@
           <a:lstStyle/>
           <a:p>
             <a:pPr algn="ctr">
-              <a:defRPr sz="1300" b="0">
-                <a:solidFill>
-                  <a:srgbClr val="8B949E"/>
-                </a:solidFill>
-              </a:defRPr>
-            </a:pPr>
-            <a:r>
-              <a:t>10</a:t>
-            </a:r>
-          </a:p>
-        </p:txBody>
-      </p:sp>
-      <p:sp>
-        <p:nvSpPr>
-          <p:cNvPr id="34" name="TextBox 33"/>
-          <p:cNvSpPr txBox="1"/>
-          <p:nvPr/>
-        </p:nvSpPr>
-        <p:spPr>
-          <a:xfrm>
-            <a:off x="6400800" y="5029200"/>
-            <a:ext cx="1371600" cy="365760"/>
+              <a:defRPr sz="2000" b="1">
+                <a:solidFill>
+                  <a:srgbClr val="F7D74D"/>
+                </a:solidFill>
+              </a:defRPr>
+            </a:pPr>
+            <a:r>
+              <a:t>04</a:t>
+            </a:r>
+          </a:p>
+        </p:txBody>
+      </p:sp>
+      <p:sp>
+        <p:nvSpPr>
+          <p:cNvPr id="22" name="TextBox 21"/>
+          <p:cNvSpPr txBox="1"/>
+          <p:nvPr/>
+        </p:nvSpPr>
+        <p:spPr>
+          <a:xfrm>
+            <a:off x="7452360" y="2834640"/>
+            <a:ext cx="1828800" cy="365760"/>
           </a:xfrm>
           <a:prstGeom prst="rect">
             <a:avLst/>
@@ -12798,39 +11180,39 @@
             <a:pPr algn="ctr">
               <a:defRPr sz="1400" b="1">
                 <a:solidFill>
-                  <a:srgbClr val="FF657A"/>
-                </a:solidFill>
-              </a:defRPr>
-            </a:pPr>
-            <a:r>
-              <a:t>7-8</a:t>
-            </a:r>
-          </a:p>
-        </p:txBody>
-      </p:sp>
-      <p:sp>
-        <p:nvSpPr>
-          <p:cNvPr id="35" name="TextBox 34"/>
-          <p:cNvSpPr txBox="1"/>
-          <p:nvPr/>
-        </p:nvSpPr>
-        <p:spPr>
-          <a:xfrm>
-            <a:off x="8229600" y="5029200"/>
-            <a:ext cx="3200400" cy="365760"/>
-          </a:xfrm>
-          <a:prstGeom prst="rect">
-            <a:avLst/>
-          </a:prstGeom>
-          <a:noFill/>
-        </p:spPr>
-        <p:txBody>
-          <a:bodyPr wrap="square">
-            <a:spAutoFit/>
-          </a:bodyPr>
-          <a:lstStyle/>
-          <a:p>
-            <a:pPr algn="l">
+                  <a:srgbClr val="FFFFFF"/>
+                </a:solidFill>
+              </a:defRPr>
+            </a:pPr>
+            <a:r>
+              <a:t>指标复用</a:t>
+            </a:r>
+          </a:p>
+        </p:txBody>
+      </p:sp>
+      <p:sp>
+        <p:nvSpPr>
+          <p:cNvPr id="23" name="TextBox 22"/>
+          <p:cNvSpPr txBox="1"/>
+          <p:nvPr/>
+        </p:nvSpPr>
+        <p:spPr>
+          <a:xfrm>
+            <a:off x="7452360" y="3383280"/>
+            <a:ext cx="1828800" cy="1371600"/>
+          </a:xfrm>
+          <a:prstGeom prst="rect">
+            <a:avLst/>
+          </a:prstGeom>
+          <a:noFill/>
+        </p:spPr>
+        <p:txBody>
+          <a:bodyPr wrap="square">
+            <a:spAutoFit/>
+          </a:bodyPr>
+          <a:lstStyle/>
+          <a:p>
+            <a:pPr algn="ctr">
               <a:defRPr sz="1100" b="0">
                 <a:solidFill>
                   <a:srgbClr val="8B949E"/>
@@ -12838,161 +11220,29 @@
               </a:defRPr>
             </a:pPr>
             <a:r>
-              <a:t>SaaS 模式 + 真实数据 + 商业指标</a:t>
-            </a:r>
-          </a:p>
-        </p:txBody>
-      </p:sp>
-      <p:sp>
-        <p:nvSpPr>
-          <p:cNvPr id="36" name="TextBox 35"/>
-          <p:cNvSpPr txBox="1"/>
-          <p:nvPr/>
-        </p:nvSpPr>
-        <p:spPr>
-          <a:xfrm>
-            <a:off x="1005840" y="5577840"/>
-            <a:ext cx="3200400" cy="365760"/>
-          </a:xfrm>
-          <a:prstGeom prst="rect">
-            <a:avLst/>
-          </a:prstGeom>
-          <a:noFill/>
-        </p:spPr>
-        <p:txBody>
-          <a:bodyPr wrap="square">
-            <a:spAutoFit/>
-          </a:bodyPr>
-          <a:lstStyle/>
-          <a:p>
-            <a:pPr algn="l">
-              <a:defRPr sz="1300" b="0">
-                <a:solidFill>
-                  <a:srgbClr val="FFFFFF"/>
-                </a:solidFill>
-              </a:defRPr>
-            </a:pPr>
-            <a:r>
-              <a:t>路演表达</a:t>
-            </a:r>
-          </a:p>
-        </p:txBody>
-      </p:sp>
-      <p:sp>
-        <p:nvSpPr>
-          <p:cNvPr id="37" name="TextBox 36"/>
-          <p:cNvSpPr txBox="1"/>
-          <p:nvPr/>
-        </p:nvSpPr>
-        <p:spPr>
-          <a:xfrm>
-            <a:off x="4572000" y="5577840"/>
-            <a:ext cx="1371600" cy="365760"/>
-          </a:xfrm>
-          <a:prstGeom prst="rect">
-            <a:avLst/>
-          </a:prstGeom>
-          <a:noFill/>
-        </p:spPr>
-        <p:txBody>
-          <a:bodyPr wrap="square">
-            <a:spAutoFit/>
-          </a:bodyPr>
-          <a:lstStyle/>
-          <a:p>
-            <a:pPr algn="ctr">
-              <a:defRPr sz="1300" b="0">
-                <a:solidFill>
-                  <a:srgbClr val="8B949E"/>
-                </a:solidFill>
-              </a:defRPr>
-            </a:pPr>
-            <a:r>
-              <a:t>10</a:t>
-            </a:r>
-          </a:p>
-        </p:txBody>
-      </p:sp>
-      <p:sp>
-        <p:nvSpPr>
-          <p:cNvPr id="38" name="TextBox 37"/>
-          <p:cNvSpPr txBox="1"/>
-          <p:nvPr/>
-        </p:nvSpPr>
-        <p:spPr>
-          <a:xfrm>
-            <a:off x="6400800" y="5577840"/>
-            <a:ext cx="1371600" cy="365760"/>
-          </a:xfrm>
-          <a:prstGeom prst="rect">
-            <a:avLst/>
-          </a:prstGeom>
-          <a:noFill/>
-        </p:spPr>
-        <p:txBody>
-          <a:bodyPr wrap="square">
-            <a:spAutoFit/>
-          </a:bodyPr>
-          <a:lstStyle/>
-          <a:p>
-            <a:pPr algn="ctr">
-              <a:defRPr sz="1400" b="1">
-                <a:solidFill>
-                  <a:srgbClr val="4AA3FF"/>
-                </a:solidFill>
-              </a:defRPr>
-            </a:pPr>
-            <a:r>
-              <a:t>8-9</a:t>
-            </a:r>
-          </a:p>
-        </p:txBody>
-      </p:sp>
-      <p:sp>
-        <p:nvSpPr>
-          <p:cNvPr id="39" name="TextBox 38"/>
-          <p:cNvSpPr txBox="1"/>
-          <p:nvPr/>
-        </p:nvSpPr>
-        <p:spPr>
-          <a:xfrm>
-            <a:off x="8229600" y="5577840"/>
-            <a:ext cx="3200400" cy="365760"/>
-          </a:xfrm>
-          <a:prstGeom prst="rect">
-            <a:avLst/>
-          </a:prstGeom>
-          <a:noFill/>
-        </p:spPr>
-        <p:txBody>
-          <a:bodyPr wrap="square">
-            <a:spAutoFit/>
-          </a:bodyPr>
-          <a:lstStyle/>
-          <a:p>
-            <a:pPr algn="l">
-              <a:defRPr sz="1100" b="0">
-                <a:solidFill>
-                  <a:srgbClr val="8B949E"/>
-                </a:solidFill>
-              </a:defRPr>
-            </a:pPr>
-            <a:r>
-              <a:t>故事线 + 排练 + PPT</a:t>
-            </a:r>
-          </a:p>
-        </p:txBody>
-      </p:sp>
-      <p:sp>
-        <p:nvSpPr>
-          <p:cNvPr id="40" name="Rounded Rectangle 39"/>
+              <a:t>保存/删除/复用</a:t>
+            </a:r>
+            <a:br/>
+            <a:r>
+              <a:t>分析师预设口径</a:t>
+            </a:r>
+            <a:br/>
+            <a:r>
+              <a:t>业务一键取数</a:t>
+            </a:r>
+          </a:p>
+        </p:txBody>
+      </p:sp>
+      <p:sp>
+        <p:nvSpPr>
+          <p:cNvPr id="24" name="Rounded Rectangle 23"/>
           <p:cNvSpPr/>
           <p:nvPr/>
         </p:nvSpPr>
         <p:spPr>
           <a:xfrm>
-            <a:off x="731520" y="6126480"/>
-            <a:ext cx="5029200" cy="457200"/>
+            <a:off x="9601200" y="2194560"/>
+            <a:ext cx="2103120" cy="3200400"/>
           </a:xfrm>
           <a:prstGeom prst="roundRect">
             <a:avLst/>
@@ -13028,20 +11278,20 @@
       </p:sp>
       <p:sp>
         <p:nvSpPr>
-          <p:cNvPr id="41" name="Rectangle 40"/>
+          <p:cNvPr id="25" name="Rectangle 24"/>
           <p:cNvSpPr/>
           <p:nvPr/>
         </p:nvSpPr>
         <p:spPr>
           <a:xfrm>
-            <a:off x="868680" y="6126480"/>
-            <a:ext cx="4754880" cy="36576"/>
+            <a:off x="9738360" y="2194560"/>
+            <a:ext cx="1828799" cy="36576"/>
           </a:xfrm>
           <a:prstGeom prst="rect">
             <a:avLst/>
           </a:prstGeom>
           <a:solidFill>
-            <a:srgbClr val="1A7F37"/>
+            <a:srgbClr val="FF657A"/>
           </a:solidFill>
           <a:ln>
             <a:noFill/>
@@ -13071,163 +11321,190 @@
       </p:sp>
       <p:sp>
         <p:nvSpPr>
-          <p:cNvPr id="42" name="TextBox 41"/>
-          <p:cNvSpPr txBox="1"/>
-          <p:nvPr/>
-        </p:nvSpPr>
-        <p:spPr>
-          <a:xfrm>
-            <a:off x="1005840" y="6172200"/>
-            <a:ext cx="4572000" cy="365760"/>
-          </a:xfrm>
-          <a:prstGeom prst="rect">
-            <a:avLst/>
-          </a:prstGeom>
-          <a:noFill/>
-        </p:spPr>
-        <p:txBody>
-          <a:bodyPr wrap="square">
-            <a:spAutoFit/>
-          </a:bodyPr>
-          <a:lstStyle/>
-          <a:p>
-            <a:pPr algn="l">
-              <a:defRPr sz="1200" b="1">
+          <p:cNvPr id="26" name="TextBox 25"/>
+          <p:cNvSpPr txBox="1"/>
+          <p:nvPr/>
+        </p:nvSpPr>
+        <p:spPr>
+          <a:xfrm>
+            <a:off x="9738360" y="2377440"/>
+            <a:ext cx="1828800" cy="365760"/>
+          </a:xfrm>
+          <a:prstGeom prst="rect">
+            <a:avLst/>
+          </a:prstGeom>
+          <a:noFill/>
+        </p:spPr>
+        <p:txBody>
+          <a:bodyPr wrap="square">
+            <a:spAutoFit/>
+          </a:bodyPr>
+          <a:lstStyle/>
+          <a:p>
+            <a:pPr algn="ctr">
+              <a:defRPr sz="2000" b="1">
+                <a:solidFill>
+                  <a:srgbClr val="FF657A"/>
+                </a:solidFill>
+              </a:defRPr>
+            </a:pPr>
+            <a:r>
+              <a:t>05</a:t>
+            </a:r>
+          </a:p>
+        </p:txBody>
+      </p:sp>
+      <p:sp>
+        <p:nvSpPr>
+          <p:cNvPr id="27" name="TextBox 26"/>
+          <p:cNvSpPr txBox="1"/>
+          <p:nvPr/>
+        </p:nvSpPr>
+        <p:spPr>
+          <a:xfrm>
+            <a:off x="9738360" y="2834640"/>
+            <a:ext cx="1828800" cy="365760"/>
+          </a:xfrm>
+          <a:prstGeom prst="rect">
+            <a:avLst/>
+          </a:prstGeom>
+          <a:noFill/>
+        </p:spPr>
+        <p:txBody>
+          <a:bodyPr wrap="square">
+            <a:spAutoFit/>
+          </a:bodyPr>
+          <a:lstStyle/>
+          <a:p>
+            <a:pPr algn="ctr">
+              <a:defRPr sz="1400" b="1">
                 <a:solidFill>
                   <a:srgbClr val="FFFFFF"/>
                 </a:solidFill>
               </a:defRPr>
             </a:pPr>
             <a:r>
-              <a:t>加分：ClawHunt 上架 +3 · 游园展示 +2</a:t>
-            </a:r>
-          </a:p>
-        </p:txBody>
-      </p:sp>
-      <p:sp>
-        <p:nvSpPr>
-          <p:cNvPr id="43" name="Rounded Rectangle 42"/>
-          <p:cNvSpPr/>
-          <p:nvPr/>
-        </p:nvSpPr>
-        <p:spPr>
-          <a:xfrm>
-            <a:off x="6126480" y="6126480"/>
-            <a:ext cx="5303520" cy="457200"/>
-          </a:xfrm>
-          <a:prstGeom prst="roundRect">
-            <a:avLst/>
-          </a:prstGeom>
-          <a:solidFill>
-            <a:srgbClr val="141A25"/>
-          </a:solidFill>
-          <a:ln>
-            <a:noFill/>
-          </a:ln>
-        </p:spPr>
-        <p:style>
-          <a:lnRef idx="1">
-            <a:schemeClr val="accent1"/>
-          </a:lnRef>
-          <a:fillRef idx="3">
-            <a:schemeClr val="accent1"/>
-          </a:fillRef>
-          <a:effectRef idx="2">
-            <a:schemeClr val="accent1"/>
-          </a:effectRef>
-          <a:fontRef idx="minor">
-            <a:schemeClr val="lt1"/>
-          </a:fontRef>
-        </p:style>
-        <p:txBody>
-          <a:bodyPr rtlCol="0" anchor="ctr"/>
-          <a:lstStyle/>
-          <a:p>
-            <a:pPr algn="ctr"/>
-          </a:p>
-        </p:txBody>
-      </p:sp>
-      <p:sp>
-        <p:nvSpPr>
-          <p:cNvPr id="44" name="Rectangle 43"/>
-          <p:cNvSpPr/>
-          <p:nvPr/>
-        </p:nvSpPr>
-        <p:spPr>
-          <a:xfrm>
-            <a:off x="6263640" y="6126480"/>
-            <a:ext cx="5029200" cy="36576"/>
-          </a:xfrm>
-          <a:prstGeom prst="rect">
-            <a:avLst/>
-          </a:prstGeom>
-          <a:solidFill>
-            <a:srgbClr val="F7D74D"/>
-          </a:solidFill>
-          <a:ln>
-            <a:noFill/>
-          </a:ln>
-        </p:spPr>
-        <p:style>
-          <a:lnRef idx="1">
-            <a:schemeClr val="accent1"/>
-          </a:lnRef>
-          <a:fillRef idx="3">
-            <a:schemeClr val="accent1"/>
-          </a:fillRef>
-          <a:effectRef idx="2">
-            <a:schemeClr val="accent1"/>
-          </a:effectRef>
-          <a:fontRef idx="minor">
-            <a:schemeClr val="lt1"/>
-          </a:fontRef>
-        </p:style>
-        <p:txBody>
-          <a:bodyPr rtlCol="0" anchor="ctr"/>
-          <a:lstStyle/>
-          <a:p>
-            <a:pPr algn="ctr"/>
-          </a:p>
-        </p:txBody>
-      </p:sp>
-      <p:sp>
-        <p:nvSpPr>
-          <p:cNvPr id="45" name="TextBox 44"/>
-          <p:cNvSpPr txBox="1"/>
-          <p:nvPr/>
-        </p:nvSpPr>
-        <p:spPr>
-          <a:xfrm>
-            <a:off x="6400800" y="6172200"/>
-            <a:ext cx="4754880" cy="365760"/>
-          </a:xfrm>
-          <a:prstGeom prst="rect">
-            <a:avLst/>
-          </a:prstGeom>
-          <a:noFill/>
-        </p:spPr>
-        <p:txBody>
-          <a:bodyPr wrap="square">
-            <a:spAutoFit/>
-          </a:bodyPr>
-          <a:lstStyle/>
-          <a:p>
-            <a:pPr algn="l">
-              <a:defRPr sz="1400" b="1">
-                <a:solidFill>
-                  <a:srgbClr val="FFFFFF"/>
-                </a:solidFill>
-              </a:defRPr>
-            </a:pPr>
-            <a:r>
-              <a:t>总计预估：91-101 / 105</a:t>
-            </a:r>
-          </a:p>
-        </p:txBody>
-      </p:sp>
-      <p:sp>
-        <p:nvSpPr>
-          <p:cNvPr id="46" name="TextBox 45"/>
+              <a:t>自纠正</a:t>
+            </a:r>
+          </a:p>
+        </p:txBody>
+      </p:sp>
+      <p:sp>
+        <p:nvSpPr>
+          <p:cNvPr id="28" name="TextBox 27"/>
+          <p:cNvSpPr txBox="1"/>
+          <p:nvPr/>
+        </p:nvSpPr>
+        <p:spPr>
+          <a:xfrm>
+            <a:off x="9738360" y="3383280"/>
+            <a:ext cx="1828800" cy="1371600"/>
+          </a:xfrm>
+          <a:prstGeom prst="rect">
+            <a:avLst/>
+          </a:prstGeom>
+          <a:noFill/>
+        </p:spPr>
+        <p:txBody>
+          <a:bodyPr wrap="square">
+            <a:spAutoFit/>
+          </a:bodyPr>
+          <a:lstStyle/>
+          <a:p>
+            <a:pPr algn="ctr">
+              <a:defRPr sz="1100" b="0">
+                <a:solidFill>
+                  <a:srgbClr val="8B949E"/>
+                </a:solidFill>
+              </a:defRPr>
+            </a:pPr>
+            <a:r>
+              <a:t>SQL 报错 → 自动修正</a:t>
+            </a:r>
+            <a:br/>
+            <a:r>
+              <a:t>展示修正过程</a:t>
+            </a:r>
+            <a:br/>
+            <a:r>
+              <a:t>增强信任</a:t>
+            </a:r>
+          </a:p>
+        </p:txBody>
+      </p:sp>
+      <p:sp>
+        <p:nvSpPr>
+          <p:cNvPr id="29" name="TextBox 28"/>
+          <p:cNvSpPr txBox="1"/>
+          <p:nvPr/>
+        </p:nvSpPr>
+        <p:spPr>
+          <a:xfrm>
+            <a:off x="731520" y="5760720"/>
+            <a:ext cx="10515600" cy="365760"/>
+          </a:xfrm>
+          <a:prstGeom prst="rect">
+            <a:avLst/>
+          </a:prstGeom>
+          <a:noFill/>
+        </p:spPr>
+        <p:txBody>
+          <a:bodyPr wrap="square">
+            <a:spAutoFit/>
+          </a:bodyPr>
+          <a:lstStyle/>
+          <a:p>
+            <a:pPr algn="ctr">
+              <a:defRPr sz="1400" b="0">
+                <a:solidFill>
+                  <a:srgbClr val="4AA3FF"/>
+                </a:solidFill>
+              </a:defRPr>
+            </a:pPr>
+            <a:r>
+              <a:t>queryforge-production-8d6f.up.railway.app</a:t>
+            </a:r>
+          </a:p>
+        </p:txBody>
+      </p:sp>
+      <p:sp>
+        <p:nvSpPr>
+          <p:cNvPr id="30" name="TextBox 29"/>
+          <p:cNvSpPr txBox="1"/>
+          <p:nvPr/>
+        </p:nvSpPr>
+        <p:spPr>
+          <a:xfrm>
+            <a:off x="731520" y="6126480"/>
+            <a:ext cx="10515600" cy="365760"/>
+          </a:xfrm>
+          <a:prstGeom prst="rect">
+            <a:avLst/>
+          </a:prstGeom>
+          <a:noFill/>
+        </p:spPr>
+        <p:txBody>
+          <a:bodyPr wrap="square">
+            <a:spAutoFit/>
+          </a:bodyPr>
+          <a:lstStyle/>
+          <a:p>
+            <a:pPr algn="ctr">
+              <a:defRPr sz="1200" b="0">
+                <a:solidFill>
+                  <a:srgbClr val="8B949E"/>
+                </a:solidFill>
+              </a:defRPr>
+            </a:pPr>
+            <a:r>
+              <a:t>github.com/eric-stone-plus/queryforge</a:t>
+            </a:r>
+          </a:p>
+        </p:txBody>
+      </p:sp>
+      <p:sp>
+        <p:nvSpPr>
+          <p:cNvPr id="31" name="TextBox 30"/>
           <p:cNvSpPr txBox="1"/>
           <p:nvPr/>
         </p:nvSpPr>
@@ -13262,7 +11539,7 @@
       </p:sp>
       <p:sp>
         <p:nvSpPr>
-          <p:cNvPr id="47" name="TextBox 46"/>
+          <p:cNvPr id="32" name="TextBox 31"/>
           <p:cNvSpPr txBox="1"/>
           <p:nvPr/>
         </p:nvSpPr>
@@ -13323,54 +11600,35 @@
       <p:grpSpPr/>
       <p:sp>
         <p:nvSpPr>
-          <p:cNvPr id="2" name="Rounded Rectangle 1"/>
-          <p:cNvSpPr/>
-          <p:nvPr/>
-        </p:nvSpPr>
-        <p:spPr>
-          <a:xfrm>
-            <a:off x="731520" y="548640"/>
-            <a:ext cx="1645920" cy="320040"/>
-          </a:xfrm>
-          <a:prstGeom prst="roundRect">
-            <a:avLst/>
-          </a:prstGeom>
-          <a:solidFill>
-            <a:srgbClr val="1A2233"/>
-          </a:solidFill>
-          <a:ln w="12700">
-            <a:solidFill>
-              <a:srgbClr val="1A7F37"/>
-            </a:solidFill>
-          </a:ln>
-        </p:spPr>
-        <p:style>
-          <a:lnRef idx="1">
-            <a:schemeClr val="accent1"/>
-          </a:lnRef>
-          <a:fillRef idx="3">
-            <a:schemeClr val="accent1"/>
-          </a:fillRef>
-          <a:effectRef idx="2">
-            <a:schemeClr val="accent1"/>
-          </a:effectRef>
-          <a:fontRef idx="minor">
-            <a:schemeClr val="lt1"/>
-          </a:fontRef>
-        </p:style>
-        <p:txBody>
-          <a:bodyPr rtlCol="0" anchor="ctr"/>
+          <p:cNvPr id="2" name="TextBox 1"/>
+          <p:cNvSpPr txBox="1"/>
+          <p:nvPr/>
+        </p:nvSpPr>
+        <p:spPr>
+          <a:xfrm>
+            <a:off x="914400" y="1828800"/>
+            <a:ext cx="10058400" cy="1097280"/>
+          </a:xfrm>
+          <a:prstGeom prst="rect">
+            <a:avLst/>
+          </a:prstGeom>
+          <a:noFill/>
+        </p:spPr>
+        <p:txBody>
+          <a:bodyPr wrap="square">
+            <a:spAutoFit/>
+          </a:bodyPr>
           <a:lstStyle/>
           <a:p>
             <a:pPr algn="ctr">
-              <a:defRPr sz="1000" b="1">
-                <a:solidFill>
-                  <a:srgbClr val="1A7F37"/>
-                </a:solidFill>
-              </a:defRPr>
-            </a:pPr>
-            <a:r>
-              <a:t>BUSINESS</a:t>
+              <a:defRPr sz="5600" b="1">
+                <a:solidFill>
+                  <a:srgbClr val="4AA3FF"/>
+                </a:solidFill>
+              </a:defRPr>
+            </a:pPr>
+            <a:r>
+              <a:t>QueryForge</a:t>
             </a:r>
           </a:p>
         </p:txBody>
@@ -13383,7 +11641,7 @@
         </p:nvSpPr>
         <p:spPr>
           <a:xfrm>
-            <a:off x="731520" y="1097280"/>
+            <a:off x="914400" y="3017520"/>
             <a:ext cx="10058400" cy="731520"/>
           </a:xfrm>
           <a:prstGeom prst="rect">
@@ -13397,102 +11655,90 @@
           </a:bodyPr>
           <a:lstStyle/>
           <a:p>
-            <a:pPr algn="l">
-              <a:defRPr sz="3200" b="1">
+            <a:pPr algn="ctr">
+              <a:defRPr sz="2400" b="0">
                 <a:solidFill>
                   <a:srgbClr val="FFFFFF"/>
                 </a:solidFill>
               </a:defRPr>
             </a:pPr>
             <a:r>
-              <a:t>商业潜力：SaaS 订阅 + 真实数据 demo</a:t>
-            </a:r>
-          </a:p>
-        </p:txBody>
-      </p:sp>
-      <p:sp>
-        <p:nvSpPr>
-          <p:cNvPr id="4" name="Rounded Rectangle 3"/>
-          <p:cNvSpPr/>
-          <p:nvPr/>
-        </p:nvSpPr>
-        <p:spPr>
-          <a:xfrm>
-            <a:off x="731520" y="2194560"/>
-            <a:ext cx="5303520" cy="3840480"/>
-          </a:xfrm>
-          <a:prstGeom prst="roundRect">
-            <a:avLst/>
-          </a:prstGeom>
-          <a:solidFill>
-            <a:srgbClr val="141A25"/>
-          </a:solidFill>
-          <a:ln>
-            <a:noFill/>
-          </a:ln>
-        </p:spPr>
-        <p:style>
-          <a:lnRef idx="1">
-            <a:schemeClr val="accent1"/>
-          </a:lnRef>
-          <a:fillRef idx="3">
-            <a:schemeClr val="accent1"/>
-          </a:fillRef>
-          <a:effectRef idx="2">
-            <a:schemeClr val="accent1"/>
-          </a:effectRef>
-          <a:fontRef idx="minor">
-            <a:schemeClr val="lt1"/>
-          </a:fontRef>
-        </p:style>
-        <p:txBody>
-          <a:bodyPr rtlCol="0" anchor="ctr"/>
-          <a:lstStyle/>
-          <a:p>
-            <a:pPr algn="ctr"/>
-          </a:p>
-        </p:txBody>
-      </p:sp>
-      <p:sp>
-        <p:nvSpPr>
-          <p:cNvPr id="5" name="Rectangle 4"/>
-          <p:cNvSpPr/>
-          <p:nvPr/>
-        </p:nvSpPr>
-        <p:spPr>
-          <a:xfrm>
-            <a:off x="868680" y="2194560"/>
-            <a:ext cx="5029200" cy="36576"/>
-          </a:xfrm>
-          <a:prstGeom prst="rect">
-            <a:avLst/>
-          </a:prstGeom>
-          <a:solidFill>
-            <a:srgbClr val="4AA3FF"/>
-          </a:solidFill>
-          <a:ln>
-            <a:noFill/>
-          </a:ln>
-        </p:spPr>
-        <p:style>
-          <a:lnRef idx="1">
-            <a:schemeClr val="accent1"/>
-          </a:lnRef>
-          <a:fillRef idx="3">
-            <a:schemeClr val="accent1"/>
-          </a:fillRef>
-          <a:effectRef idx="2">
-            <a:schemeClr val="accent1"/>
-          </a:effectRef>
-          <a:fontRef idx="minor">
-            <a:schemeClr val="lt1"/>
-          </a:fontRef>
-        </p:style>
-        <p:txBody>
-          <a:bodyPr rtlCol="0" anchor="ctr"/>
-          <a:lstStyle/>
-          <a:p>
-            <a:pPr algn="ctr"/>
+              <a:t>让业务部门自助取数</a:t>
+            </a:r>
+            <a:br/>
+            <a:r>
+              <a:t>解放数据分析师的重复需求</a:t>
+            </a:r>
+          </a:p>
+        </p:txBody>
+      </p:sp>
+      <p:sp>
+        <p:nvSpPr>
+          <p:cNvPr id="4" name="TextBox 3"/>
+          <p:cNvSpPr txBox="1"/>
+          <p:nvPr/>
+        </p:nvSpPr>
+        <p:spPr>
+          <a:xfrm>
+            <a:off x="914400" y="4389120"/>
+            <a:ext cx="10058400" cy="457200"/>
+          </a:xfrm>
+          <a:prstGeom prst="rect">
+            <a:avLst/>
+          </a:prstGeom>
+          <a:noFill/>
+        </p:spPr>
+        <p:txBody>
+          <a:bodyPr wrap="square">
+            <a:spAutoFit/>
+          </a:bodyPr>
+          <a:lstStyle/>
+          <a:p>
+            <a:pPr algn="ctr">
+              <a:defRPr sz="1800" b="0">
+                <a:solidFill>
+                  <a:srgbClr val="4AA3FF"/>
+                </a:solidFill>
+              </a:defRPr>
+            </a:pPr>
+            <a:r>
+              <a:t>queryforge-production-8d6f.up.railway.app</a:t>
+            </a:r>
+          </a:p>
+        </p:txBody>
+      </p:sp>
+      <p:sp>
+        <p:nvSpPr>
+          <p:cNvPr id="5" name="TextBox 4"/>
+          <p:cNvSpPr txBox="1"/>
+          <p:nvPr/>
+        </p:nvSpPr>
+        <p:spPr>
+          <a:xfrm>
+            <a:off x="914400" y="5029200"/>
+            <a:ext cx="10058400" cy="457200"/>
+          </a:xfrm>
+          <a:prstGeom prst="rect">
+            <a:avLst/>
+          </a:prstGeom>
+          <a:noFill/>
+        </p:spPr>
+        <p:txBody>
+          <a:bodyPr wrap="square">
+            <a:spAutoFit/>
+          </a:bodyPr>
+          <a:lstStyle/>
+          <a:p>
+            <a:pPr algn="ctr">
+              <a:defRPr sz="1400" b="0">
+                <a:solidFill>
+                  <a:srgbClr val="8B949E"/>
+                </a:solidFill>
+              </a:defRPr>
+            </a:pPr>
+            <a:r>
+              <a:t>github.com/eric-stone-plus/queryforge</a:t>
+            </a:r>
           </a:p>
         </p:txBody>
       </p:sp>
@@ -13504,348 +11750,29 @@
         </p:nvSpPr>
         <p:spPr>
           <a:xfrm>
-            <a:off x="1005840" y="2468880"/>
-            <a:ext cx="4754880" cy="365760"/>
-          </a:xfrm>
-          <a:prstGeom prst="rect">
-            <a:avLst/>
-          </a:prstGeom>
-          <a:noFill/>
-        </p:spPr>
-        <p:txBody>
-          <a:bodyPr wrap="square">
-            <a:spAutoFit/>
-          </a:bodyPr>
-          <a:lstStyle/>
-          <a:p>
-            <a:pPr algn="l">
-              <a:defRPr sz="1800" b="1">
-                <a:solidFill>
-                  <a:srgbClr val="4AA3FF"/>
-                </a:solidFill>
-              </a:defRPr>
-            </a:pPr>
-            <a:r>
-              <a:t>市场规模</a:t>
-            </a:r>
-          </a:p>
-        </p:txBody>
-      </p:sp>
-      <p:sp>
-        <p:nvSpPr>
-          <p:cNvPr id="7" name="TextBox 6"/>
-          <p:cNvSpPr txBox="1"/>
-          <p:nvPr/>
-        </p:nvSpPr>
-        <p:spPr>
-          <a:xfrm>
-            <a:off x="1005840" y="3017520"/>
-            <a:ext cx="4754880" cy="2743200"/>
-          </a:xfrm>
-          <a:prstGeom prst="rect">
-            <a:avLst/>
-          </a:prstGeom>
-          <a:noFill/>
-        </p:spPr>
-        <p:txBody>
-          <a:bodyPr wrap="square">
-            <a:spAutoFit/>
-          </a:bodyPr>
-          <a:lstStyle/>
-          <a:p>
-            <a:pPr algn="l">
-              <a:defRPr sz="1400" b="0">
+            <a:off x="914400" y="5669280"/>
+            <a:ext cx="10058400" cy="457200"/>
+          </a:xfrm>
+          <a:prstGeom prst="rect">
+            <a:avLst/>
+          </a:prstGeom>
+          <a:noFill/>
+        </p:spPr>
+        <p:txBody>
+          <a:bodyPr wrap="square">
+            <a:spAutoFit/>
+          </a:bodyPr>
+          <a:lstStyle/>
+          <a:p>
+            <a:pPr algn="ctr">
+              <a:defRPr sz="1200" b="0">
                 <a:solidFill>
                   <a:srgbClr val="8B949E"/>
                 </a:solidFill>
               </a:defRPr>
             </a:pPr>
             <a:r>
-              <a:t>• 中国 BI 市场规模：¥200亿+（2025）</a:t>
-            </a:r>
-            <a:br/>
-            <a:r>
-              <a:t>• 中小企业数据分析渗透率 &lt; 15%</a:t>
-            </a:r>
-            <a:br/>
-            <a:r>
-              <a:t>• 自然语言 BI 是下一代趋势</a:t>
-            </a:r>
-            <a:br/>
-            <a:br/>
-            <a:r>
-              <a:t>目标用户</a:t>
-            </a:r>
-            <a:br/>
-            <a:r>
-              <a:t>• 运营/销售管理者（不会 SQL）</a:t>
-            </a:r>
-            <a:br/>
-            <a:r>
-              <a:t>• 数据分析师（加速探索）</a:t>
-            </a:r>
-            <a:br/>
-            <a:r>
-              <a:t>• 中小企业老板（快速决策）</a:t>
-            </a:r>
-          </a:p>
-        </p:txBody>
-      </p:sp>
-      <p:sp>
-        <p:nvSpPr>
-          <p:cNvPr id="8" name="Rounded Rectangle 7"/>
-          <p:cNvSpPr/>
-          <p:nvPr/>
-        </p:nvSpPr>
-        <p:spPr>
-          <a:xfrm>
-            <a:off x="6400800" y="2194560"/>
-            <a:ext cx="5303520" cy="3840480"/>
-          </a:xfrm>
-          <a:prstGeom prst="roundRect">
-            <a:avLst/>
-          </a:prstGeom>
-          <a:solidFill>
-            <a:srgbClr val="141A25"/>
-          </a:solidFill>
-          <a:ln>
-            <a:noFill/>
-          </a:ln>
-        </p:spPr>
-        <p:style>
-          <a:lnRef idx="1">
-            <a:schemeClr val="accent1"/>
-          </a:lnRef>
-          <a:fillRef idx="3">
-            <a:schemeClr val="accent1"/>
-          </a:fillRef>
-          <a:effectRef idx="2">
-            <a:schemeClr val="accent1"/>
-          </a:effectRef>
-          <a:fontRef idx="minor">
-            <a:schemeClr val="lt1"/>
-          </a:fontRef>
-        </p:style>
-        <p:txBody>
-          <a:bodyPr rtlCol="0" anchor="ctr"/>
-          <a:lstStyle/>
-          <a:p>
-            <a:pPr algn="ctr"/>
-          </a:p>
-        </p:txBody>
-      </p:sp>
-      <p:sp>
-        <p:nvSpPr>
-          <p:cNvPr id="9" name="Rectangle 8"/>
-          <p:cNvSpPr/>
-          <p:nvPr/>
-        </p:nvSpPr>
-        <p:spPr>
-          <a:xfrm>
-            <a:off x="6537960" y="2194560"/>
-            <a:ext cx="5029200" cy="36576"/>
-          </a:xfrm>
-          <a:prstGeom prst="rect">
-            <a:avLst/>
-          </a:prstGeom>
-          <a:solidFill>
-            <a:srgbClr val="19D3C5"/>
-          </a:solidFill>
-          <a:ln>
-            <a:noFill/>
-          </a:ln>
-        </p:spPr>
-        <p:style>
-          <a:lnRef idx="1">
-            <a:schemeClr val="accent1"/>
-          </a:lnRef>
-          <a:fillRef idx="3">
-            <a:schemeClr val="accent1"/>
-          </a:fillRef>
-          <a:effectRef idx="2">
-            <a:schemeClr val="accent1"/>
-          </a:effectRef>
-          <a:fontRef idx="minor">
-            <a:schemeClr val="lt1"/>
-          </a:fontRef>
-        </p:style>
-        <p:txBody>
-          <a:bodyPr rtlCol="0" anchor="ctr"/>
-          <a:lstStyle/>
-          <a:p>
-            <a:pPr algn="ctr"/>
-          </a:p>
-        </p:txBody>
-      </p:sp>
-      <p:sp>
-        <p:nvSpPr>
-          <p:cNvPr id="10" name="TextBox 9"/>
-          <p:cNvSpPr txBox="1"/>
-          <p:nvPr/>
-        </p:nvSpPr>
-        <p:spPr>
-          <a:xfrm>
-            <a:off x="6675120" y="2468880"/>
-            <a:ext cx="4754880" cy="365760"/>
-          </a:xfrm>
-          <a:prstGeom prst="rect">
-            <a:avLst/>
-          </a:prstGeom>
-          <a:noFill/>
-        </p:spPr>
-        <p:txBody>
-          <a:bodyPr wrap="square">
-            <a:spAutoFit/>
-          </a:bodyPr>
-          <a:lstStyle/>
-          <a:p>
-            <a:pPr algn="l">
-              <a:defRPr sz="1800" b="1">
-                <a:solidFill>
-                  <a:srgbClr val="19D3C5"/>
-                </a:solidFill>
-              </a:defRPr>
-            </a:pPr>
-            <a:r>
-              <a:t>商业模式</a:t>
-            </a:r>
-          </a:p>
-        </p:txBody>
-      </p:sp>
-      <p:sp>
-        <p:nvSpPr>
-          <p:cNvPr id="11" name="TextBox 10"/>
-          <p:cNvSpPr txBox="1"/>
-          <p:nvPr/>
-        </p:nvSpPr>
-        <p:spPr>
-          <a:xfrm>
-            <a:off x="6675120" y="3017520"/>
-            <a:ext cx="4754880" cy="2743200"/>
-          </a:xfrm>
-          <a:prstGeom prst="rect">
-            <a:avLst/>
-          </a:prstGeom>
-          <a:noFill/>
-        </p:spPr>
-        <p:txBody>
-          <a:bodyPr wrap="square">
-            <a:spAutoFit/>
-          </a:bodyPr>
-          <a:lstStyle/>
-          <a:p>
-            <a:pPr algn="l">
-              <a:defRPr sz="1400" b="0">
-                <a:solidFill>
-                  <a:srgbClr val="8B949E"/>
-                </a:solidFill>
-              </a:defRPr>
-            </a:pPr>
-            <a:r>
-              <a:t>SaaS 订阅制</a:t>
-            </a:r>
-            <a:br/>
-            <a:r>
-              <a:t>• 免费版：5 次/天查询</a:t>
-            </a:r>
-            <a:br/>
-            <a:r>
-              <a:t>• Pro 版：¥99/月，无限查询</a:t>
-            </a:r>
-            <a:br/>
-            <a:r>
-              <a:t>• 企业版：¥999/月，私有部署</a:t>
-            </a:r>
-            <a:br/>
-            <a:br/>
-            <a:r>
-              <a:t>竞争优势</a:t>
-            </a:r>
-            <a:br/>
-            <a:r>
-              <a:t>• 真正的 AI 推理（非关键词匹配）</a:t>
-            </a:r>
-            <a:br/>
-            <a:r>
-              <a:t>• 自纠正保证查询成功率</a:t>
-            </a:r>
-            <a:br/>
-            <a:r>
-              <a:t>• 五方审查保证代码质量</a:t>
-            </a:r>
-            <a:br/>
-            <a:r>
-              <a:t>• 成本极低（MiMo token plan）</a:t>
-            </a:r>
-          </a:p>
-        </p:txBody>
-      </p:sp>
-      <p:sp>
-        <p:nvSpPr>
-          <p:cNvPr id="12" name="TextBox 11"/>
-          <p:cNvSpPr txBox="1"/>
-          <p:nvPr/>
-        </p:nvSpPr>
-        <p:spPr>
-          <a:xfrm>
-            <a:off x="731520" y="6400800"/>
-            <a:ext cx="1828800" cy="365760"/>
-          </a:xfrm>
-          <a:prstGeom prst="rect">
-            <a:avLst/>
-          </a:prstGeom>
-          <a:noFill/>
-        </p:spPr>
-        <p:txBody>
-          <a:bodyPr wrap="square">
-            <a:spAutoFit/>
-          </a:bodyPr>
-          <a:lstStyle/>
-          <a:p>
-            <a:pPr algn="l">
-              <a:defRPr sz="1100" b="0">
-                <a:solidFill>
-                  <a:srgbClr val="8B949E"/>
-                </a:solidFill>
-              </a:defRPr>
-            </a:pPr>
-            <a:r>
-              <a:t>QueryForge</a:t>
-            </a:r>
-          </a:p>
-        </p:txBody>
-      </p:sp>
-      <p:sp>
-        <p:nvSpPr>
-          <p:cNvPr id="13" name="TextBox 12"/>
-          <p:cNvSpPr txBox="1"/>
-          <p:nvPr/>
-        </p:nvSpPr>
-        <p:spPr>
-          <a:xfrm>
-            <a:off x="11155680" y="6400800"/>
-            <a:ext cx="731520" cy="365760"/>
-          </a:xfrm>
-          <a:prstGeom prst="rect">
-            <a:avLst/>
-          </a:prstGeom>
-          <a:noFill/>
-        </p:spPr>
-        <p:txBody>
-          <a:bodyPr wrap="square">
-            <a:spAutoFit/>
-          </a:bodyPr>
-          <a:lstStyle/>
-          <a:p>
-            <a:pPr algn="r">
-              <a:defRPr sz="1200" b="0">
-                <a:solidFill>
-                  <a:srgbClr val="8B949E"/>
-                </a:solidFill>
-              </a:defRPr>
-            </a:pPr>
-            <a:r>
-              <a:t>09</a:t>
+              <a:t>ClawHunt Builder Camp 2026 · Track A</a:t>
             </a:r>
           </a:p>
         </p:txBody>
